--- a/figures/figure1/figure1.pptx
+++ b/figures/figure1/figure1.pptx
@@ -2,15 +2,15 @@
 <file path=ppt/presentation.xml><?xml version="1.0" encoding="utf-8"?>
 <p:presentation xmlns:a="http://schemas.openxmlformats.org/drawingml/2006/main" xmlns:r="http://schemas.openxmlformats.org/officeDocument/2006/relationships" xmlns:p="http://schemas.openxmlformats.org/presentationml/2006/main" saveSubsetFonts="1" autoCompressPictures="0">
   <p:sldMasterIdLst>
-    <p:sldMasterId id="2147483756" r:id="rId1"/>
+    <p:sldMasterId id="2147483804" r:id="rId1"/>
   </p:sldMasterIdLst>
   <p:notesMasterIdLst>
     <p:notesMasterId r:id="rId3"/>
   </p:notesMasterIdLst>
   <p:sldIdLst>
-    <p:sldId id="265" r:id="rId2"/>
+    <p:sldId id="267" r:id="rId2"/>
   </p:sldIdLst>
-  <p:sldSz cx="6207125" cy="4357688"/>
+  <p:sldSz cx="5580063" cy="9180513"/>
   <p:notesSz cx="6858000" cy="9144000"/>
   <p:defaultTextStyle>
     <a:defPPr>
@@ -197,7 +197,7 @@
           <a:p>
             <a:fld id="{C03336FD-F2B5-C043-9ABE-661EE14E25C5}" type="datetimeFigureOut">
               <a:rPr lang="en-GB" smtClean="0"/>
-              <a:t>14/07/2026</a:t>
+              <a:t>27/08/2026</a:t>
             </a:fld>
             <a:endParaRPr lang="en-GB"/>
           </a:p>
@@ -215,8 +215,8 @@
         </p:nvSpPr>
         <p:spPr>
           <a:xfrm>
-            <a:off x="1230313" y="1143000"/>
-            <a:ext cx="4397375" cy="3086100"/>
+            <a:off x="2490788" y="1143000"/>
+            <a:ext cx="1876425" cy="3086100"/>
           </a:xfrm>
           <a:prstGeom prst="rect">
             <a:avLst/>
@@ -370,8 +370,8 @@
   </p:cSld>
   <p:clrMap bg1="lt1" tx1="dk1" bg2="lt2" tx2="dk2" accent1="accent1" accent2="accent2" accent3="accent3" accent4="accent4" accent5="accent5" accent6="accent6" hlink="hlink" folHlink="folHlink"/>
   <p:notesStyle>
-    <a:lvl1pPr marL="0" algn="l" defTabSz="914400" rtl="0" eaLnBrk="1" latinLnBrk="0" hangingPunct="1">
-      <a:defRPr sz="1200" kern="1200">
+    <a:lvl1pPr marL="0" algn="l" defTabSz="851933" rtl="0" eaLnBrk="1" latinLnBrk="0" hangingPunct="1">
+      <a:defRPr sz="1118" kern="1200">
         <a:solidFill>
           <a:schemeClr val="tx1"/>
         </a:solidFill>
@@ -380,8 +380,8 @@
         <a:cs typeface="+mn-cs"/>
       </a:defRPr>
     </a:lvl1pPr>
-    <a:lvl2pPr marL="457200" algn="l" defTabSz="914400" rtl="0" eaLnBrk="1" latinLnBrk="0" hangingPunct="1">
-      <a:defRPr sz="1200" kern="1200">
+    <a:lvl2pPr marL="425967" algn="l" defTabSz="851933" rtl="0" eaLnBrk="1" latinLnBrk="0" hangingPunct="1">
+      <a:defRPr sz="1118" kern="1200">
         <a:solidFill>
           <a:schemeClr val="tx1"/>
         </a:solidFill>
@@ -390,8 +390,8 @@
         <a:cs typeface="+mn-cs"/>
       </a:defRPr>
     </a:lvl2pPr>
-    <a:lvl3pPr marL="914400" algn="l" defTabSz="914400" rtl="0" eaLnBrk="1" latinLnBrk="0" hangingPunct="1">
-      <a:defRPr sz="1200" kern="1200">
+    <a:lvl3pPr marL="851933" algn="l" defTabSz="851933" rtl="0" eaLnBrk="1" latinLnBrk="0" hangingPunct="1">
+      <a:defRPr sz="1118" kern="1200">
         <a:solidFill>
           <a:schemeClr val="tx1"/>
         </a:solidFill>
@@ -400,8 +400,8 @@
         <a:cs typeface="+mn-cs"/>
       </a:defRPr>
     </a:lvl3pPr>
-    <a:lvl4pPr marL="1371600" algn="l" defTabSz="914400" rtl="0" eaLnBrk="1" latinLnBrk="0" hangingPunct="1">
-      <a:defRPr sz="1200" kern="1200">
+    <a:lvl4pPr marL="1277899" algn="l" defTabSz="851933" rtl="0" eaLnBrk="1" latinLnBrk="0" hangingPunct="1">
+      <a:defRPr sz="1118" kern="1200">
         <a:solidFill>
           <a:schemeClr val="tx1"/>
         </a:solidFill>
@@ -410,8 +410,8 @@
         <a:cs typeface="+mn-cs"/>
       </a:defRPr>
     </a:lvl4pPr>
-    <a:lvl5pPr marL="1828800" algn="l" defTabSz="914400" rtl="0" eaLnBrk="1" latinLnBrk="0" hangingPunct="1">
-      <a:defRPr sz="1200" kern="1200">
+    <a:lvl5pPr marL="1703866" algn="l" defTabSz="851933" rtl="0" eaLnBrk="1" latinLnBrk="0" hangingPunct="1">
+      <a:defRPr sz="1118" kern="1200">
         <a:solidFill>
           <a:schemeClr val="tx1"/>
         </a:solidFill>
@@ -420,8 +420,8 @@
         <a:cs typeface="+mn-cs"/>
       </a:defRPr>
     </a:lvl5pPr>
-    <a:lvl6pPr marL="2286000" algn="l" defTabSz="914400" rtl="0" eaLnBrk="1" latinLnBrk="0" hangingPunct="1">
-      <a:defRPr sz="1200" kern="1200">
+    <a:lvl6pPr marL="2129832" algn="l" defTabSz="851933" rtl="0" eaLnBrk="1" latinLnBrk="0" hangingPunct="1">
+      <a:defRPr sz="1118" kern="1200">
         <a:solidFill>
           <a:schemeClr val="tx1"/>
         </a:solidFill>
@@ -430,8 +430,8 @@
         <a:cs typeface="+mn-cs"/>
       </a:defRPr>
     </a:lvl6pPr>
-    <a:lvl7pPr marL="2743200" algn="l" defTabSz="914400" rtl="0" eaLnBrk="1" latinLnBrk="0" hangingPunct="1">
-      <a:defRPr sz="1200" kern="1200">
+    <a:lvl7pPr marL="2555799" algn="l" defTabSz="851933" rtl="0" eaLnBrk="1" latinLnBrk="0" hangingPunct="1">
+      <a:defRPr sz="1118" kern="1200">
         <a:solidFill>
           <a:schemeClr val="tx1"/>
         </a:solidFill>
@@ -440,8 +440,8 @@
         <a:cs typeface="+mn-cs"/>
       </a:defRPr>
     </a:lvl7pPr>
-    <a:lvl8pPr marL="3200400" algn="l" defTabSz="914400" rtl="0" eaLnBrk="1" latinLnBrk="0" hangingPunct="1">
-      <a:defRPr sz="1200" kern="1200">
+    <a:lvl8pPr marL="2981766" algn="l" defTabSz="851933" rtl="0" eaLnBrk="1" latinLnBrk="0" hangingPunct="1">
+      <a:defRPr sz="1118" kern="1200">
         <a:solidFill>
           <a:schemeClr val="tx1"/>
         </a:solidFill>
@@ -450,8 +450,8 @@
         <a:cs typeface="+mn-cs"/>
       </a:defRPr>
     </a:lvl8pPr>
-    <a:lvl9pPr marL="3657600" algn="l" defTabSz="914400" rtl="0" eaLnBrk="1" latinLnBrk="0" hangingPunct="1">
-      <a:defRPr sz="1200" kern="1200">
+    <a:lvl9pPr marL="3407732" algn="l" defTabSz="851933" rtl="0" eaLnBrk="1" latinLnBrk="0" hangingPunct="1">
+      <a:defRPr sz="1118" kern="1200">
         <a:solidFill>
           <a:schemeClr val="tx1"/>
         </a:solidFill>
@@ -462,95 +462,6 @@
     </a:lvl9pPr>
   </p:notesStyle>
 </p:notesMaster>
-</file>
-
-<file path=ppt/notesSlides/notesSlide1.xml><?xml version="1.0" encoding="utf-8"?>
-<p:notes xmlns:a="http://schemas.openxmlformats.org/drawingml/2006/main" xmlns:r="http://schemas.openxmlformats.org/officeDocument/2006/relationships" xmlns:p="http://schemas.openxmlformats.org/presentationml/2006/main">
-  <p:cSld>
-    <p:spTree>
-      <p:nvGrpSpPr>
-        <p:cNvPr id="1" name=""/>
-        <p:cNvGrpSpPr/>
-        <p:nvPr/>
-      </p:nvGrpSpPr>
-      <p:grpSpPr>
-        <a:xfrm>
-          <a:off x="0" y="0"/>
-          <a:ext cx="0" cy="0"/>
-          <a:chOff x="0" y="0"/>
-          <a:chExt cx="0" cy="0"/>
-        </a:xfrm>
-      </p:grpSpPr>
-      <p:sp>
-        <p:nvSpPr>
-          <p:cNvPr id="2" name="Slide Image Placeholder 1"/>
-          <p:cNvSpPr>
-            <a:spLocks noGrp="1" noRot="1" noChangeAspect="1"/>
-          </p:cNvSpPr>
-          <p:nvPr>
-            <p:ph type="sldImg"/>
-          </p:nvPr>
-        </p:nvSpPr>
-        <p:spPr>
-          <a:xfrm>
-            <a:off x="1230313" y="1143000"/>
-            <a:ext cx="4397375" cy="3086100"/>
-          </a:xfrm>
-        </p:spPr>
-      </p:sp>
-      <p:sp>
-        <p:nvSpPr>
-          <p:cNvPr id="3" name="Notes Placeholder 2"/>
-          <p:cNvSpPr>
-            <a:spLocks noGrp="1"/>
-          </p:cNvSpPr>
-          <p:nvPr>
-            <p:ph type="body" idx="1"/>
-          </p:nvPr>
-        </p:nvSpPr>
-        <p:spPr/>
-        <p:txBody>
-          <a:bodyPr/>
-          <a:lstStyle/>
-          <a:p>
-            <a:endParaRPr lang="en-GB" dirty="0"/>
-          </a:p>
-        </p:txBody>
-      </p:sp>
-      <p:sp>
-        <p:nvSpPr>
-          <p:cNvPr id="4" name="Slide Number Placeholder 3"/>
-          <p:cNvSpPr>
-            <a:spLocks noGrp="1"/>
-          </p:cNvSpPr>
-          <p:nvPr>
-            <p:ph type="sldNum" sz="quarter" idx="5"/>
-          </p:nvPr>
-        </p:nvSpPr>
-        <p:spPr/>
-        <p:txBody>
-          <a:bodyPr/>
-          <a:lstStyle/>
-          <a:p>
-            <a:fld id="{9431CD9F-6B7B-9E4E-BD4C-50E5DD341F4A}" type="slidenum">
-              <a:rPr lang="en-GB" smtClean="0"/>
-              <a:t>1</a:t>
-            </a:fld>
-            <a:endParaRPr lang="en-GB"/>
-          </a:p>
-        </p:txBody>
-      </p:sp>
-    </p:spTree>
-    <p:extLst>
-      <p:ext uri="{BB962C8B-B14F-4D97-AF65-F5344CB8AC3E}">
-        <p14:creationId xmlns:p14="http://schemas.microsoft.com/office/powerpoint/2010/main" val="3477909789"/>
-      </p:ext>
-    </p:extLst>
-  </p:cSld>
-  <p:clrMapOvr>
-    <a:masterClrMapping/>
-  </p:clrMapOvr>
-</p:notes>
 </file>
 
 <file path=ppt/slideLayouts/slideLayout1.xml><?xml version="1.0" encoding="utf-8"?>
@@ -582,15 +493,15 @@
         </p:nvSpPr>
         <p:spPr>
           <a:xfrm>
-            <a:off x="465535" y="713168"/>
-            <a:ext cx="5276056" cy="1517121"/>
+            <a:off x="418505" y="1502459"/>
+            <a:ext cx="4743054" cy="3196179"/>
           </a:xfrm>
         </p:spPr>
         <p:txBody>
           <a:bodyPr anchor="b"/>
           <a:lstStyle>
             <a:lvl1pPr algn="ctr">
-              <a:defRPr sz="3812"/>
+              <a:defRPr sz="3661"/>
             </a:lvl1pPr>
           </a:lstStyle>
           <a:p>
@@ -614,8 +525,8 @@
         </p:nvSpPr>
         <p:spPr>
           <a:xfrm>
-            <a:off x="775891" y="2288795"/>
-            <a:ext cx="4655344" cy="1052099"/>
+            <a:off x="697508" y="4821895"/>
+            <a:ext cx="4185047" cy="2216498"/>
           </a:xfrm>
         </p:spPr>
         <p:txBody>
@@ -623,39 +534,39 @@
           <a:lstStyle>
             <a:lvl1pPr marL="0" indent="0" algn="ctr">
               <a:buNone/>
-              <a:defRPr sz="1525"/>
+              <a:defRPr sz="1464"/>
             </a:lvl1pPr>
-            <a:lvl2pPr marL="290505" indent="0" algn="ctr">
+            <a:lvl2pPr marL="278983" indent="0" algn="ctr">
               <a:buNone/>
-              <a:defRPr sz="1271"/>
+              <a:defRPr sz="1220"/>
             </a:lvl2pPr>
-            <a:lvl3pPr marL="581010" indent="0" algn="ctr">
+            <a:lvl3pPr marL="557967" indent="0" algn="ctr">
               <a:buNone/>
-              <a:defRPr sz="1144"/>
+              <a:defRPr sz="1098"/>
             </a:lvl3pPr>
-            <a:lvl4pPr marL="871515" indent="0" algn="ctr">
+            <a:lvl4pPr marL="836950" indent="0" algn="ctr">
               <a:buNone/>
-              <a:defRPr sz="1017"/>
+              <a:defRPr sz="976"/>
             </a:lvl4pPr>
-            <a:lvl5pPr marL="1162020" indent="0" algn="ctr">
+            <a:lvl5pPr marL="1115934" indent="0" algn="ctr">
               <a:buNone/>
-              <a:defRPr sz="1017"/>
+              <a:defRPr sz="976"/>
             </a:lvl5pPr>
-            <a:lvl6pPr marL="1452524" indent="0" algn="ctr">
+            <a:lvl6pPr marL="1394917" indent="0" algn="ctr">
               <a:buNone/>
-              <a:defRPr sz="1017"/>
+              <a:defRPr sz="976"/>
             </a:lvl6pPr>
-            <a:lvl7pPr marL="1743029" indent="0" algn="ctr">
+            <a:lvl7pPr marL="1673901" indent="0" algn="ctr">
               <a:buNone/>
-              <a:defRPr sz="1017"/>
+              <a:defRPr sz="976"/>
             </a:lvl7pPr>
-            <a:lvl8pPr marL="2033534" indent="0" algn="ctr">
+            <a:lvl8pPr marL="1952884" indent="0" algn="ctr">
               <a:buNone/>
-              <a:defRPr sz="1017"/>
+              <a:defRPr sz="976"/>
             </a:lvl8pPr>
-            <a:lvl9pPr marL="2324039" indent="0" algn="ctr">
+            <a:lvl9pPr marL="2231868" indent="0" algn="ctr">
               <a:buNone/>
-              <a:defRPr sz="1017"/>
+              <a:defRPr sz="976"/>
             </a:lvl9pPr>
           </a:lstStyle>
           <a:p>
@@ -684,7 +595,7 @@
           <a:p>
             <a:fld id="{C744240D-CD7D-0147-AFDB-B56ED61B1864}" type="datetimeFigureOut">
               <a:rPr lang="en-GB" smtClean="0"/>
-              <a:t>14/07/2026</a:t>
+              <a:t>27/08/2026</a:t>
             </a:fld>
             <a:endParaRPr lang="en-GB"/>
           </a:p>
@@ -735,7 +646,7 @@
     </p:spTree>
     <p:extLst>
       <p:ext uri="{BB962C8B-B14F-4D97-AF65-F5344CB8AC3E}">
-        <p14:creationId xmlns:p14="http://schemas.microsoft.com/office/powerpoint/2010/main" val="1853649956"/>
+        <p14:creationId xmlns:p14="http://schemas.microsoft.com/office/powerpoint/2010/main" val="2475298690"/>
       </p:ext>
     </p:extLst>
   </p:cSld>
@@ -854,7 +765,7 @@
           <a:p>
             <a:fld id="{C744240D-CD7D-0147-AFDB-B56ED61B1864}" type="datetimeFigureOut">
               <a:rPr lang="en-GB" smtClean="0"/>
-              <a:t>14/07/2026</a:t>
+              <a:t>27/08/2026</a:t>
             </a:fld>
             <a:endParaRPr lang="en-GB"/>
           </a:p>
@@ -905,7 +816,7 @@
     </p:spTree>
     <p:extLst>
       <p:ext uri="{BB962C8B-B14F-4D97-AF65-F5344CB8AC3E}">
-        <p14:creationId xmlns:p14="http://schemas.microsoft.com/office/powerpoint/2010/main" val="549159139"/>
+        <p14:creationId xmlns:p14="http://schemas.microsoft.com/office/powerpoint/2010/main" val="1650637541"/>
       </p:ext>
     </p:extLst>
   </p:cSld>
@@ -944,8 +855,8 @@
         </p:nvSpPr>
         <p:spPr>
           <a:xfrm>
-            <a:off x="4441974" y="232007"/>
-            <a:ext cx="1338411" cy="3692939"/>
+            <a:off x="3993233" y="488778"/>
+            <a:ext cx="1203201" cy="7780060"/>
           </a:xfrm>
         </p:spPr>
         <p:txBody>
@@ -972,8 +883,8 @@
         </p:nvSpPr>
         <p:spPr>
           <a:xfrm>
-            <a:off x="426740" y="232007"/>
-            <a:ext cx="3937645" cy="3692939"/>
+            <a:off x="383630" y="488778"/>
+            <a:ext cx="3539852" cy="7780060"/>
           </a:xfrm>
         </p:spPr>
         <p:txBody>
@@ -1034,7 +945,7 @@
           <a:p>
             <a:fld id="{C744240D-CD7D-0147-AFDB-B56ED61B1864}" type="datetimeFigureOut">
               <a:rPr lang="en-GB" smtClean="0"/>
-              <a:t>14/07/2026</a:t>
+              <a:t>27/08/2026</a:t>
             </a:fld>
             <a:endParaRPr lang="en-GB"/>
           </a:p>
@@ -1085,7 +996,7 @@
     </p:spTree>
     <p:extLst>
       <p:ext uri="{BB962C8B-B14F-4D97-AF65-F5344CB8AC3E}">
-        <p14:creationId xmlns:p14="http://schemas.microsoft.com/office/powerpoint/2010/main" val="798098562"/>
+        <p14:creationId xmlns:p14="http://schemas.microsoft.com/office/powerpoint/2010/main" val="3363050310"/>
       </p:ext>
     </p:extLst>
   </p:cSld>
@@ -1204,7 +1115,7 @@
           <a:p>
             <a:fld id="{C744240D-CD7D-0147-AFDB-B56ED61B1864}" type="datetimeFigureOut">
               <a:rPr lang="en-GB" smtClean="0"/>
-              <a:t>14/07/2026</a:t>
+              <a:t>27/08/2026</a:t>
             </a:fld>
             <a:endParaRPr lang="en-GB"/>
           </a:p>
@@ -1255,7 +1166,7 @@
     </p:spTree>
     <p:extLst>
       <p:ext uri="{BB962C8B-B14F-4D97-AF65-F5344CB8AC3E}">
-        <p14:creationId xmlns:p14="http://schemas.microsoft.com/office/powerpoint/2010/main" val="1200802476"/>
+        <p14:creationId xmlns:p14="http://schemas.microsoft.com/office/powerpoint/2010/main" val="3217315304"/>
       </p:ext>
     </p:extLst>
   </p:cSld>
@@ -1294,15 +1205,15 @@
         </p:nvSpPr>
         <p:spPr>
           <a:xfrm>
-            <a:off x="423507" y="1086397"/>
-            <a:ext cx="5353645" cy="1812677"/>
+            <a:off x="380724" y="2288755"/>
+            <a:ext cx="4812804" cy="3818838"/>
           </a:xfrm>
         </p:spPr>
         <p:txBody>
           <a:bodyPr anchor="b"/>
           <a:lstStyle>
             <a:lvl1pPr>
-              <a:defRPr sz="3812"/>
+              <a:defRPr sz="3661"/>
             </a:lvl1pPr>
           </a:lstStyle>
           <a:p>
@@ -1326,8 +1237,8 @@
         </p:nvSpPr>
         <p:spPr>
           <a:xfrm>
-            <a:off x="423507" y="2916223"/>
-            <a:ext cx="5353645" cy="953244"/>
+            <a:off x="380724" y="6143721"/>
+            <a:ext cx="4812804" cy="2008237"/>
           </a:xfrm>
         </p:spPr>
         <p:txBody>
@@ -1335,7 +1246,7 @@
           <a:lstStyle>
             <a:lvl1pPr marL="0" indent="0">
               <a:buNone/>
-              <a:defRPr sz="1525">
+              <a:defRPr sz="1464">
                 <a:solidFill>
                   <a:schemeClr val="tx1">
                     <a:tint val="82000"/>
@@ -1343,9 +1254,9 @@
                 </a:solidFill>
               </a:defRPr>
             </a:lvl1pPr>
-            <a:lvl2pPr marL="290505" indent="0">
+            <a:lvl2pPr marL="278983" indent="0">
               <a:buNone/>
-              <a:defRPr sz="1271">
+              <a:defRPr sz="1220">
                 <a:solidFill>
                   <a:schemeClr val="tx1">
                     <a:tint val="82000"/>
@@ -1353,9 +1264,9 @@
                 </a:solidFill>
               </a:defRPr>
             </a:lvl2pPr>
-            <a:lvl3pPr marL="581010" indent="0">
+            <a:lvl3pPr marL="557967" indent="0">
               <a:buNone/>
-              <a:defRPr sz="1144">
+              <a:defRPr sz="1098">
                 <a:solidFill>
                   <a:schemeClr val="tx1">
                     <a:tint val="82000"/>
@@ -1363,9 +1274,9 @@
                 </a:solidFill>
               </a:defRPr>
             </a:lvl3pPr>
-            <a:lvl4pPr marL="871515" indent="0">
+            <a:lvl4pPr marL="836950" indent="0">
               <a:buNone/>
-              <a:defRPr sz="1017">
+              <a:defRPr sz="976">
                 <a:solidFill>
                   <a:schemeClr val="tx1">
                     <a:tint val="82000"/>
@@ -1373,9 +1284,9 @@
                 </a:solidFill>
               </a:defRPr>
             </a:lvl4pPr>
-            <a:lvl5pPr marL="1162020" indent="0">
+            <a:lvl5pPr marL="1115934" indent="0">
               <a:buNone/>
-              <a:defRPr sz="1017">
+              <a:defRPr sz="976">
                 <a:solidFill>
                   <a:schemeClr val="tx1">
                     <a:tint val="82000"/>
@@ -1383,9 +1294,9 @@
                 </a:solidFill>
               </a:defRPr>
             </a:lvl5pPr>
-            <a:lvl6pPr marL="1452524" indent="0">
+            <a:lvl6pPr marL="1394917" indent="0">
               <a:buNone/>
-              <a:defRPr sz="1017">
+              <a:defRPr sz="976">
                 <a:solidFill>
                   <a:schemeClr val="tx1">
                     <a:tint val="82000"/>
@@ -1393,9 +1304,9 @@
                 </a:solidFill>
               </a:defRPr>
             </a:lvl6pPr>
-            <a:lvl7pPr marL="1743029" indent="0">
+            <a:lvl7pPr marL="1673901" indent="0">
               <a:buNone/>
-              <a:defRPr sz="1017">
+              <a:defRPr sz="976">
                 <a:solidFill>
                   <a:schemeClr val="tx1">
                     <a:tint val="82000"/>
@@ -1403,9 +1314,9 @@
                 </a:solidFill>
               </a:defRPr>
             </a:lvl7pPr>
-            <a:lvl8pPr marL="2033534" indent="0">
+            <a:lvl8pPr marL="1952884" indent="0">
               <a:buNone/>
-              <a:defRPr sz="1017">
+              <a:defRPr sz="976">
                 <a:solidFill>
                   <a:schemeClr val="tx1">
                     <a:tint val="82000"/>
@@ -1413,9 +1324,9 @@
                 </a:solidFill>
               </a:defRPr>
             </a:lvl8pPr>
-            <a:lvl9pPr marL="2324039" indent="0">
+            <a:lvl9pPr marL="2231868" indent="0">
               <a:buNone/>
-              <a:defRPr sz="1017">
+              <a:defRPr sz="976">
                 <a:solidFill>
                   <a:schemeClr val="tx1">
                     <a:tint val="82000"/>
@@ -1450,7 +1361,7 @@
           <a:p>
             <a:fld id="{C744240D-CD7D-0147-AFDB-B56ED61B1864}" type="datetimeFigureOut">
               <a:rPr lang="en-GB" smtClean="0"/>
-              <a:t>14/07/2026</a:t>
+              <a:t>27/08/2026</a:t>
             </a:fld>
             <a:endParaRPr lang="en-GB"/>
           </a:p>
@@ -1501,7 +1412,7 @@
     </p:spTree>
     <p:extLst>
       <p:ext uri="{BB962C8B-B14F-4D97-AF65-F5344CB8AC3E}">
-        <p14:creationId xmlns:p14="http://schemas.microsoft.com/office/powerpoint/2010/main" val="2291360858"/>
+        <p14:creationId xmlns:p14="http://schemas.microsoft.com/office/powerpoint/2010/main" val="3966901796"/>
       </p:ext>
     </p:extLst>
   </p:cSld>
@@ -1563,8 +1474,8 @@
         </p:nvSpPr>
         <p:spPr>
           <a:xfrm>
-            <a:off x="426740" y="1160033"/>
-            <a:ext cx="2638028" cy="2764913"/>
+            <a:off x="383629" y="2443887"/>
+            <a:ext cx="2371527" cy="5824951"/>
           </a:xfrm>
         </p:spPr>
         <p:txBody>
@@ -1620,8 +1531,8 @@
         </p:nvSpPr>
         <p:spPr>
           <a:xfrm>
-            <a:off x="3142357" y="1160033"/>
-            <a:ext cx="2638028" cy="2764913"/>
+            <a:off x="2824907" y="2443887"/>
+            <a:ext cx="2371527" cy="5824951"/>
           </a:xfrm>
         </p:spPr>
         <p:txBody>
@@ -1682,7 +1593,7 @@
           <a:p>
             <a:fld id="{C744240D-CD7D-0147-AFDB-B56ED61B1864}" type="datetimeFigureOut">
               <a:rPr lang="en-GB" smtClean="0"/>
-              <a:t>14/07/2026</a:t>
+              <a:t>27/08/2026</a:t>
             </a:fld>
             <a:endParaRPr lang="en-GB"/>
           </a:p>
@@ -1733,7 +1644,7 @@
     </p:spTree>
     <p:extLst>
       <p:ext uri="{BB962C8B-B14F-4D97-AF65-F5344CB8AC3E}">
-        <p14:creationId xmlns:p14="http://schemas.microsoft.com/office/powerpoint/2010/main" val="587647426"/>
+        <p14:creationId xmlns:p14="http://schemas.microsoft.com/office/powerpoint/2010/main" val="2476017763"/>
       </p:ext>
     </p:extLst>
   </p:cSld>
@@ -1772,8 +1683,8 @@
         </p:nvSpPr>
         <p:spPr>
           <a:xfrm>
-            <a:off x="427548" y="232007"/>
-            <a:ext cx="5353645" cy="842285"/>
+            <a:off x="384356" y="488779"/>
+            <a:ext cx="4812804" cy="1774475"/>
           </a:xfrm>
         </p:spPr>
         <p:txBody>
@@ -1800,8 +1711,8 @@
         </p:nvSpPr>
         <p:spPr>
           <a:xfrm>
-            <a:off x="427549" y="1068239"/>
-            <a:ext cx="2625904" cy="523527"/>
+            <a:off x="384357" y="2250501"/>
+            <a:ext cx="2360628" cy="1102936"/>
           </a:xfrm>
         </p:spPr>
         <p:txBody>
@@ -1809,39 +1720,39 @@
           <a:lstStyle>
             <a:lvl1pPr marL="0" indent="0">
               <a:buNone/>
-              <a:defRPr sz="1525" b="1"/>
+              <a:defRPr sz="1464" b="1"/>
             </a:lvl1pPr>
-            <a:lvl2pPr marL="290505" indent="0">
+            <a:lvl2pPr marL="278983" indent="0">
               <a:buNone/>
-              <a:defRPr sz="1271" b="1"/>
+              <a:defRPr sz="1220" b="1"/>
             </a:lvl2pPr>
-            <a:lvl3pPr marL="581010" indent="0">
+            <a:lvl3pPr marL="557967" indent="0">
               <a:buNone/>
-              <a:defRPr sz="1144" b="1"/>
+              <a:defRPr sz="1098" b="1"/>
             </a:lvl3pPr>
-            <a:lvl4pPr marL="871515" indent="0">
+            <a:lvl4pPr marL="836950" indent="0">
               <a:buNone/>
-              <a:defRPr sz="1017" b="1"/>
+              <a:defRPr sz="976" b="1"/>
             </a:lvl4pPr>
-            <a:lvl5pPr marL="1162020" indent="0">
+            <a:lvl5pPr marL="1115934" indent="0">
               <a:buNone/>
-              <a:defRPr sz="1017" b="1"/>
+              <a:defRPr sz="976" b="1"/>
             </a:lvl5pPr>
-            <a:lvl6pPr marL="1452524" indent="0">
+            <a:lvl6pPr marL="1394917" indent="0">
               <a:buNone/>
-              <a:defRPr sz="1017" b="1"/>
+              <a:defRPr sz="976" b="1"/>
             </a:lvl6pPr>
-            <a:lvl7pPr marL="1743029" indent="0">
+            <a:lvl7pPr marL="1673901" indent="0">
               <a:buNone/>
-              <a:defRPr sz="1017" b="1"/>
+              <a:defRPr sz="976" b="1"/>
             </a:lvl7pPr>
-            <a:lvl8pPr marL="2033534" indent="0">
+            <a:lvl8pPr marL="1952884" indent="0">
               <a:buNone/>
-              <a:defRPr sz="1017" b="1"/>
+              <a:defRPr sz="976" b="1"/>
             </a:lvl8pPr>
-            <a:lvl9pPr marL="2324039" indent="0">
+            <a:lvl9pPr marL="2231868" indent="0">
               <a:buNone/>
-              <a:defRPr sz="1017" b="1"/>
+              <a:defRPr sz="976" b="1"/>
             </a:lvl9pPr>
           </a:lstStyle>
           <a:p>
@@ -1865,8 +1776,8 @@
         </p:nvSpPr>
         <p:spPr>
           <a:xfrm>
-            <a:off x="427549" y="1591767"/>
-            <a:ext cx="2625904" cy="2341249"/>
+            <a:off x="384357" y="3353438"/>
+            <a:ext cx="2360628" cy="4932401"/>
           </a:xfrm>
         </p:spPr>
         <p:txBody>
@@ -1922,8 +1833,8 @@
         </p:nvSpPr>
         <p:spPr>
           <a:xfrm>
-            <a:off x="3142357" y="1068239"/>
-            <a:ext cx="2638837" cy="523527"/>
+            <a:off x="2824907" y="2250501"/>
+            <a:ext cx="2372254" cy="1102936"/>
           </a:xfrm>
         </p:spPr>
         <p:txBody>
@@ -1931,39 +1842,39 @@
           <a:lstStyle>
             <a:lvl1pPr marL="0" indent="0">
               <a:buNone/>
-              <a:defRPr sz="1525" b="1"/>
+              <a:defRPr sz="1464" b="1"/>
             </a:lvl1pPr>
-            <a:lvl2pPr marL="290505" indent="0">
+            <a:lvl2pPr marL="278983" indent="0">
               <a:buNone/>
-              <a:defRPr sz="1271" b="1"/>
+              <a:defRPr sz="1220" b="1"/>
             </a:lvl2pPr>
-            <a:lvl3pPr marL="581010" indent="0">
+            <a:lvl3pPr marL="557967" indent="0">
               <a:buNone/>
-              <a:defRPr sz="1144" b="1"/>
+              <a:defRPr sz="1098" b="1"/>
             </a:lvl3pPr>
-            <a:lvl4pPr marL="871515" indent="0">
+            <a:lvl4pPr marL="836950" indent="0">
               <a:buNone/>
-              <a:defRPr sz="1017" b="1"/>
+              <a:defRPr sz="976" b="1"/>
             </a:lvl4pPr>
-            <a:lvl5pPr marL="1162020" indent="0">
+            <a:lvl5pPr marL="1115934" indent="0">
               <a:buNone/>
-              <a:defRPr sz="1017" b="1"/>
+              <a:defRPr sz="976" b="1"/>
             </a:lvl5pPr>
-            <a:lvl6pPr marL="1452524" indent="0">
+            <a:lvl6pPr marL="1394917" indent="0">
               <a:buNone/>
-              <a:defRPr sz="1017" b="1"/>
+              <a:defRPr sz="976" b="1"/>
             </a:lvl6pPr>
-            <a:lvl7pPr marL="1743029" indent="0">
+            <a:lvl7pPr marL="1673901" indent="0">
               <a:buNone/>
-              <a:defRPr sz="1017" b="1"/>
+              <a:defRPr sz="976" b="1"/>
             </a:lvl7pPr>
-            <a:lvl8pPr marL="2033534" indent="0">
+            <a:lvl8pPr marL="1952884" indent="0">
               <a:buNone/>
-              <a:defRPr sz="1017" b="1"/>
+              <a:defRPr sz="976" b="1"/>
             </a:lvl8pPr>
-            <a:lvl9pPr marL="2324039" indent="0">
+            <a:lvl9pPr marL="2231868" indent="0">
               <a:buNone/>
-              <a:defRPr sz="1017" b="1"/>
+              <a:defRPr sz="976" b="1"/>
             </a:lvl9pPr>
           </a:lstStyle>
           <a:p>
@@ -1987,8 +1898,8 @@
         </p:nvSpPr>
         <p:spPr>
           <a:xfrm>
-            <a:off x="3142357" y="1591767"/>
-            <a:ext cx="2638837" cy="2341249"/>
+            <a:off x="2824907" y="3353438"/>
+            <a:ext cx="2372254" cy="4932401"/>
           </a:xfrm>
         </p:spPr>
         <p:txBody>
@@ -2049,7 +1960,7 @@
           <a:p>
             <a:fld id="{C744240D-CD7D-0147-AFDB-B56ED61B1864}" type="datetimeFigureOut">
               <a:rPr lang="en-GB" smtClean="0"/>
-              <a:t>14/07/2026</a:t>
+              <a:t>27/08/2026</a:t>
             </a:fld>
             <a:endParaRPr lang="en-GB"/>
           </a:p>
@@ -2100,7 +2011,7 @@
     </p:spTree>
     <p:extLst>
       <p:ext uri="{BB962C8B-B14F-4D97-AF65-F5344CB8AC3E}">
-        <p14:creationId xmlns:p14="http://schemas.microsoft.com/office/powerpoint/2010/main" val="2566508564"/>
+        <p14:creationId xmlns:p14="http://schemas.microsoft.com/office/powerpoint/2010/main" val="2814804671"/>
       </p:ext>
     </p:extLst>
   </p:cSld>
@@ -2167,7 +2078,7 @@
           <a:p>
             <a:fld id="{C744240D-CD7D-0147-AFDB-B56ED61B1864}" type="datetimeFigureOut">
               <a:rPr lang="en-GB" smtClean="0"/>
-              <a:t>14/07/2026</a:t>
+              <a:t>27/08/2026</a:t>
             </a:fld>
             <a:endParaRPr lang="en-GB"/>
           </a:p>
@@ -2218,7 +2129,7 @@
     </p:spTree>
     <p:extLst>
       <p:ext uri="{BB962C8B-B14F-4D97-AF65-F5344CB8AC3E}">
-        <p14:creationId xmlns:p14="http://schemas.microsoft.com/office/powerpoint/2010/main" val="940681963"/>
+        <p14:creationId xmlns:p14="http://schemas.microsoft.com/office/powerpoint/2010/main" val="1500549459"/>
       </p:ext>
     </p:extLst>
   </p:cSld>
@@ -2262,7 +2173,7 @@
           <a:p>
             <a:fld id="{C744240D-CD7D-0147-AFDB-B56ED61B1864}" type="datetimeFigureOut">
               <a:rPr lang="en-GB" smtClean="0"/>
-              <a:t>14/07/2026</a:t>
+              <a:t>27/08/2026</a:t>
             </a:fld>
             <a:endParaRPr lang="en-GB"/>
           </a:p>
@@ -2313,7 +2224,7 @@
     </p:spTree>
     <p:extLst>
       <p:ext uri="{BB962C8B-B14F-4D97-AF65-F5344CB8AC3E}">
-        <p14:creationId xmlns:p14="http://schemas.microsoft.com/office/powerpoint/2010/main" val="1856023117"/>
+        <p14:creationId xmlns:p14="http://schemas.microsoft.com/office/powerpoint/2010/main" val="3910946435"/>
       </p:ext>
     </p:extLst>
   </p:cSld>
@@ -2352,15 +2263,15 @@
         </p:nvSpPr>
         <p:spPr>
           <a:xfrm>
-            <a:off x="427549" y="290512"/>
-            <a:ext cx="2001959" cy="1016794"/>
+            <a:off x="384356" y="612034"/>
+            <a:ext cx="1799716" cy="2142120"/>
           </a:xfrm>
         </p:spPr>
         <p:txBody>
           <a:bodyPr anchor="b"/>
           <a:lstStyle>
             <a:lvl1pPr>
-              <a:defRPr sz="2033"/>
+              <a:defRPr sz="1953"/>
             </a:lvl1pPr>
           </a:lstStyle>
           <a:p>
@@ -2384,39 +2295,39 @@
         </p:nvSpPr>
         <p:spPr>
           <a:xfrm>
-            <a:off x="2638837" y="627427"/>
-            <a:ext cx="3142357" cy="3096783"/>
+            <a:off x="2372254" y="1321826"/>
+            <a:ext cx="2824907" cy="6524115"/>
           </a:xfrm>
         </p:spPr>
         <p:txBody>
           <a:bodyPr/>
           <a:lstStyle>
             <a:lvl1pPr>
-              <a:defRPr sz="2033"/>
+              <a:defRPr sz="1953"/>
             </a:lvl1pPr>
             <a:lvl2pPr>
-              <a:defRPr sz="1779"/>
+              <a:defRPr sz="1709"/>
             </a:lvl2pPr>
             <a:lvl3pPr>
-              <a:defRPr sz="1525"/>
+              <a:defRPr sz="1464"/>
             </a:lvl3pPr>
             <a:lvl4pPr>
-              <a:defRPr sz="1271"/>
+              <a:defRPr sz="1220"/>
             </a:lvl4pPr>
             <a:lvl5pPr>
-              <a:defRPr sz="1271"/>
+              <a:defRPr sz="1220"/>
             </a:lvl5pPr>
             <a:lvl6pPr>
-              <a:defRPr sz="1271"/>
+              <a:defRPr sz="1220"/>
             </a:lvl6pPr>
             <a:lvl7pPr>
-              <a:defRPr sz="1271"/>
+              <a:defRPr sz="1220"/>
             </a:lvl7pPr>
             <a:lvl8pPr>
-              <a:defRPr sz="1271"/>
+              <a:defRPr sz="1220"/>
             </a:lvl8pPr>
             <a:lvl9pPr>
-              <a:defRPr sz="1271"/>
+              <a:defRPr sz="1220"/>
             </a:lvl9pPr>
           </a:lstStyle>
           <a:p>
@@ -2469,8 +2380,8 @@
         </p:nvSpPr>
         <p:spPr>
           <a:xfrm>
-            <a:off x="427549" y="1307306"/>
-            <a:ext cx="2001959" cy="2421947"/>
+            <a:off x="384356" y="2754154"/>
+            <a:ext cx="1799716" cy="5102411"/>
           </a:xfrm>
         </p:spPr>
         <p:txBody>
@@ -2478,39 +2389,39 @@
           <a:lstStyle>
             <a:lvl1pPr marL="0" indent="0">
               <a:buNone/>
-              <a:defRPr sz="1017"/>
+              <a:defRPr sz="976"/>
             </a:lvl1pPr>
-            <a:lvl2pPr marL="290505" indent="0">
+            <a:lvl2pPr marL="278983" indent="0">
               <a:buNone/>
-              <a:defRPr sz="890"/>
+              <a:defRPr sz="854"/>
             </a:lvl2pPr>
-            <a:lvl3pPr marL="581010" indent="0">
+            <a:lvl3pPr marL="557967" indent="0">
               <a:buNone/>
-              <a:defRPr sz="762"/>
+              <a:defRPr sz="732"/>
             </a:lvl3pPr>
-            <a:lvl4pPr marL="871515" indent="0">
+            <a:lvl4pPr marL="836950" indent="0">
               <a:buNone/>
-              <a:defRPr sz="635"/>
+              <a:defRPr sz="610"/>
             </a:lvl4pPr>
-            <a:lvl5pPr marL="1162020" indent="0">
+            <a:lvl5pPr marL="1115934" indent="0">
               <a:buNone/>
-              <a:defRPr sz="635"/>
+              <a:defRPr sz="610"/>
             </a:lvl5pPr>
-            <a:lvl6pPr marL="1452524" indent="0">
+            <a:lvl6pPr marL="1394917" indent="0">
               <a:buNone/>
-              <a:defRPr sz="635"/>
+              <a:defRPr sz="610"/>
             </a:lvl6pPr>
-            <a:lvl7pPr marL="1743029" indent="0">
+            <a:lvl7pPr marL="1673901" indent="0">
               <a:buNone/>
-              <a:defRPr sz="635"/>
+              <a:defRPr sz="610"/>
             </a:lvl7pPr>
-            <a:lvl8pPr marL="2033534" indent="0">
+            <a:lvl8pPr marL="1952884" indent="0">
               <a:buNone/>
-              <a:defRPr sz="635"/>
+              <a:defRPr sz="610"/>
             </a:lvl8pPr>
-            <a:lvl9pPr marL="2324039" indent="0">
+            <a:lvl9pPr marL="2231868" indent="0">
               <a:buNone/>
-              <a:defRPr sz="635"/>
+              <a:defRPr sz="610"/>
             </a:lvl9pPr>
           </a:lstStyle>
           <a:p>
@@ -2539,7 +2450,7 @@
           <a:p>
             <a:fld id="{C744240D-CD7D-0147-AFDB-B56ED61B1864}" type="datetimeFigureOut">
               <a:rPr lang="en-GB" smtClean="0"/>
-              <a:t>14/07/2026</a:t>
+              <a:t>27/08/2026</a:t>
             </a:fld>
             <a:endParaRPr lang="en-GB"/>
           </a:p>
@@ -2590,7 +2501,7 @@
     </p:spTree>
     <p:extLst>
       <p:ext uri="{BB962C8B-B14F-4D97-AF65-F5344CB8AC3E}">
-        <p14:creationId xmlns:p14="http://schemas.microsoft.com/office/powerpoint/2010/main" val="3963855633"/>
+        <p14:creationId xmlns:p14="http://schemas.microsoft.com/office/powerpoint/2010/main" val="475486453"/>
       </p:ext>
     </p:extLst>
   </p:cSld>
@@ -2629,15 +2540,15 @@
         </p:nvSpPr>
         <p:spPr>
           <a:xfrm>
-            <a:off x="427549" y="290512"/>
-            <a:ext cx="2001959" cy="1016794"/>
+            <a:off x="384356" y="612034"/>
+            <a:ext cx="1799716" cy="2142120"/>
           </a:xfrm>
         </p:spPr>
         <p:txBody>
           <a:bodyPr anchor="b"/>
           <a:lstStyle>
             <a:lvl1pPr>
-              <a:defRPr sz="2033"/>
+              <a:defRPr sz="1953"/>
             </a:lvl1pPr>
           </a:lstStyle>
           <a:p>
@@ -2661,8 +2572,8 @@
         </p:nvSpPr>
         <p:spPr>
           <a:xfrm>
-            <a:off x="2638837" y="627427"/>
-            <a:ext cx="3142357" cy="3096783"/>
+            <a:off x="2372254" y="1321826"/>
+            <a:ext cx="2824907" cy="6524115"/>
           </a:xfrm>
         </p:spPr>
         <p:txBody>
@@ -2670,39 +2581,39 @@
           <a:lstStyle>
             <a:lvl1pPr marL="0" indent="0">
               <a:buNone/>
-              <a:defRPr sz="2033"/>
+              <a:defRPr sz="1953"/>
             </a:lvl1pPr>
-            <a:lvl2pPr marL="290505" indent="0">
+            <a:lvl2pPr marL="278983" indent="0">
               <a:buNone/>
-              <a:defRPr sz="1779"/>
+              <a:defRPr sz="1709"/>
             </a:lvl2pPr>
-            <a:lvl3pPr marL="581010" indent="0">
+            <a:lvl3pPr marL="557967" indent="0">
               <a:buNone/>
-              <a:defRPr sz="1525"/>
+              <a:defRPr sz="1464"/>
             </a:lvl3pPr>
-            <a:lvl4pPr marL="871515" indent="0">
+            <a:lvl4pPr marL="836950" indent="0">
               <a:buNone/>
-              <a:defRPr sz="1271"/>
+              <a:defRPr sz="1220"/>
             </a:lvl4pPr>
-            <a:lvl5pPr marL="1162020" indent="0">
+            <a:lvl5pPr marL="1115934" indent="0">
               <a:buNone/>
-              <a:defRPr sz="1271"/>
+              <a:defRPr sz="1220"/>
             </a:lvl5pPr>
-            <a:lvl6pPr marL="1452524" indent="0">
+            <a:lvl6pPr marL="1394917" indent="0">
               <a:buNone/>
-              <a:defRPr sz="1271"/>
+              <a:defRPr sz="1220"/>
             </a:lvl6pPr>
-            <a:lvl7pPr marL="1743029" indent="0">
+            <a:lvl7pPr marL="1673901" indent="0">
               <a:buNone/>
-              <a:defRPr sz="1271"/>
+              <a:defRPr sz="1220"/>
             </a:lvl7pPr>
-            <a:lvl8pPr marL="2033534" indent="0">
+            <a:lvl8pPr marL="1952884" indent="0">
               <a:buNone/>
-              <a:defRPr sz="1271"/>
+              <a:defRPr sz="1220"/>
             </a:lvl8pPr>
-            <a:lvl9pPr marL="2324039" indent="0">
+            <a:lvl9pPr marL="2231868" indent="0">
               <a:buNone/>
-              <a:defRPr sz="1271"/>
+              <a:defRPr sz="1220"/>
             </a:lvl9pPr>
           </a:lstStyle>
           <a:p>
@@ -2726,8 +2637,8 @@
         </p:nvSpPr>
         <p:spPr>
           <a:xfrm>
-            <a:off x="427549" y="1307306"/>
-            <a:ext cx="2001959" cy="2421947"/>
+            <a:off x="384356" y="2754154"/>
+            <a:ext cx="1799716" cy="5102411"/>
           </a:xfrm>
         </p:spPr>
         <p:txBody>
@@ -2735,39 +2646,39 @@
           <a:lstStyle>
             <a:lvl1pPr marL="0" indent="0">
               <a:buNone/>
-              <a:defRPr sz="1017"/>
+              <a:defRPr sz="976"/>
             </a:lvl1pPr>
-            <a:lvl2pPr marL="290505" indent="0">
+            <a:lvl2pPr marL="278983" indent="0">
               <a:buNone/>
-              <a:defRPr sz="890"/>
+              <a:defRPr sz="854"/>
             </a:lvl2pPr>
-            <a:lvl3pPr marL="581010" indent="0">
+            <a:lvl3pPr marL="557967" indent="0">
               <a:buNone/>
-              <a:defRPr sz="762"/>
+              <a:defRPr sz="732"/>
             </a:lvl3pPr>
-            <a:lvl4pPr marL="871515" indent="0">
+            <a:lvl4pPr marL="836950" indent="0">
               <a:buNone/>
-              <a:defRPr sz="635"/>
+              <a:defRPr sz="610"/>
             </a:lvl4pPr>
-            <a:lvl5pPr marL="1162020" indent="0">
+            <a:lvl5pPr marL="1115934" indent="0">
               <a:buNone/>
-              <a:defRPr sz="635"/>
+              <a:defRPr sz="610"/>
             </a:lvl5pPr>
-            <a:lvl6pPr marL="1452524" indent="0">
+            <a:lvl6pPr marL="1394917" indent="0">
               <a:buNone/>
-              <a:defRPr sz="635"/>
+              <a:defRPr sz="610"/>
             </a:lvl6pPr>
-            <a:lvl7pPr marL="1743029" indent="0">
+            <a:lvl7pPr marL="1673901" indent="0">
               <a:buNone/>
-              <a:defRPr sz="635"/>
+              <a:defRPr sz="610"/>
             </a:lvl7pPr>
-            <a:lvl8pPr marL="2033534" indent="0">
+            <a:lvl8pPr marL="1952884" indent="0">
               <a:buNone/>
-              <a:defRPr sz="635"/>
+              <a:defRPr sz="610"/>
             </a:lvl8pPr>
-            <a:lvl9pPr marL="2324039" indent="0">
+            <a:lvl9pPr marL="2231868" indent="0">
               <a:buNone/>
-              <a:defRPr sz="635"/>
+              <a:defRPr sz="610"/>
             </a:lvl9pPr>
           </a:lstStyle>
           <a:p>
@@ -2796,7 +2707,7 @@
           <a:p>
             <a:fld id="{C744240D-CD7D-0147-AFDB-B56ED61B1864}" type="datetimeFigureOut">
               <a:rPr lang="en-GB" smtClean="0"/>
-              <a:t>14/07/2026</a:t>
+              <a:t>27/08/2026</a:t>
             </a:fld>
             <a:endParaRPr lang="en-GB"/>
           </a:p>
@@ -2847,7 +2758,7 @@
     </p:spTree>
     <p:extLst>
       <p:ext uri="{BB962C8B-B14F-4D97-AF65-F5344CB8AC3E}">
-        <p14:creationId xmlns:p14="http://schemas.microsoft.com/office/powerpoint/2010/main" val="3367251365"/>
+        <p14:creationId xmlns:p14="http://schemas.microsoft.com/office/powerpoint/2010/main" val="2393196459"/>
       </p:ext>
     </p:extLst>
   </p:cSld>
@@ -2891,8 +2802,8 @@
         </p:nvSpPr>
         <p:spPr>
           <a:xfrm>
-            <a:off x="426740" y="232007"/>
-            <a:ext cx="5353645" cy="842285"/>
+            <a:off x="383630" y="488779"/>
+            <a:ext cx="4812804" cy="1774475"/>
           </a:xfrm>
           <a:prstGeom prst="rect">
             <a:avLst/>
@@ -2924,8 +2835,8 @@
         </p:nvSpPr>
         <p:spPr>
           <a:xfrm>
-            <a:off x="426740" y="1160033"/>
-            <a:ext cx="5353645" cy="2764913"/>
+            <a:off x="383630" y="2443887"/>
+            <a:ext cx="4812804" cy="5824951"/>
           </a:xfrm>
           <a:prstGeom prst="rect">
             <a:avLst/>
@@ -2986,8 +2897,8 @@
         </p:nvSpPr>
         <p:spPr>
           <a:xfrm>
-            <a:off x="426740" y="4038932"/>
-            <a:ext cx="1396603" cy="232007"/>
+            <a:off x="383629" y="8508978"/>
+            <a:ext cx="1255514" cy="488777"/>
           </a:xfrm>
           <a:prstGeom prst="rect">
             <a:avLst/>
@@ -2997,7 +2908,7 @@
           <a:bodyPr vert="horz" lIns="91440" tIns="45720" rIns="91440" bIns="45720" rtlCol="0" anchor="ctr"/>
           <a:lstStyle>
             <a:lvl1pPr algn="l">
-              <a:defRPr sz="762">
+              <a:defRPr sz="732">
                 <a:solidFill>
                   <a:schemeClr val="tx1">
                     <a:tint val="82000"/>
@@ -3009,7 +2920,7 @@
           <a:p>
             <a:fld id="{C744240D-CD7D-0147-AFDB-B56ED61B1864}" type="datetimeFigureOut">
               <a:rPr lang="en-GB" smtClean="0"/>
-              <a:t>14/07/2026</a:t>
+              <a:t>27/08/2026</a:t>
             </a:fld>
             <a:endParaRPr lang="en-GB"/>
           </a:p>
@@ -3027,8 +2938,8 @@
         </p:nvSpPr>
         <p:spPr>
           <a:xfrm>
-            <a:off x="2056110" y="4038932"/>
-            <a:ext cx="2094905" cy="232007"/>
+            <a:off x="1848396" y="8508978"/>
+            <a:ext cx="1883271" cy="488777"/>
           </a:xfrm>
           <a:prstGeom prst="rect">
             <a:avLst/>
@@ -3038,7 +2949,7 @@
           <a:bodyPr vert="horz" lIns="91440" tIns="45720" rIns="91440" bIns="45720" rtlCol="0" anchor="ctr"/>
           <a:lstStyle>
             <a:lvl1pPr algn="ctr">
-              <a:defRPr sz="762">
+              <a:defRPr sz="732">
                 <a:solidFill>
                   <a:schemeClr val="tx1">
                     <a:tint val="82000"/>
@@ -3064,8 +2975,8 @@
         </p:nvSpPr>
         <p:spPr>
           <a:xfrm>
-            <a:off x="4383782" y="4038932"/>
-            <a:ext cx="1396603" cy="232007"/>
+            <a:off x="3940920" y="8508978"/>
+            <a:ext cx="1255514" cy="488777"/>
           </a:xfrm>
           <a:prstGeom prst="rect">
             <a:avLst/>
@@ -3075,7 +2986,7 @@
           <a:bodyPr vert="horz" lIns="91440" tIns="45720" rIns="91440" bIns="45720" rtlCol="0" anchor="ctr"/>
           <a:lstStyle>
             <a:lvl1pPr algn="r">
-              <a:defRPr sz="762">
+              <a:defRPr sz="732">
                 <a:solidFill>
                   <a:schemeClr val="tx1">
                     <a:tint val="82000"/>
@@ -3096,27 +3007,27 @@
     </p:spTree>
     <p:extLst>
       <p:ext uri="{BB962C8B-B14F-4D97-AF65-F5344CB8AC3E}">
-        <p14:creationId xmlns:p14="http://schemas.microsoft.com/office/powerpoint/2010/main" val="3308115509"/>
+        <p14:creationId xmlns:p14="http://schemas.microsoft.com/office/powerpoint/2010/main" val="1767966787"/>
       </p:ext>
     </p:extLst>
   </p:cSld>
   <p:clrMap bg1="lt1" tx1="dk1" bg2="lt2" tx2="dk2" accent1="accent1" accent2="accent2" accent3="accent3" accent4="accent4" accent5="accent5" accent6="accent6" hlink="hlink" folHlink="folHlink"/>
   <p:sldLayoutIdLst>
-    <p:sldLayoutId id="2147483757" r:id="rId1"/>
-    <p:sldLayoutId id="2147483758" r:id="rId2"/>
-    <p:sldLayoutId id="2147483759" r:id="rId3"/>
-    <p:sldLayoutId id="2147483760" r:id="rId4"/>
-    <p:sldLayoutId id="2147483761" r:id="rId5"/>
-    <p:sldLayoutId id="2147483762" r:id="rId6"/>
-    <p:sldLayoutId id="2147483763" r:id="rId7"/>
-    <p:sldLayoutId id="2147483764" r:id="rId8"/>
-    <p:sldLayoutId id="2147483765" r:id="rId9"/>
-    <p:sldLayoutId id="2147483766" r:id="rId10"/>
-    <p:sldLayoutId id="2147483767" r:id="rId11"/>
+    <p:sldLayoutId id="2147483805" r:id="rId1"/>
+    <p:sldLayoutId id="2147483806" r:id="rId2"/>
+    <p:sldLayoutId id="2147483807" r:id="rId3"/>
+    <p:sldLayoutId id="2147483808" r:id="rId4"/>
+    <p:sldLayoutId id="2147483809" r:id="rId5"/>
+    <p:sldLayoutId id="2147483810" r:id="rId6"/>
+    <p:sldLayoutId id="2147483811" r:id="rId7"/>
+    <p:sldLayoutId id="2147483812" r:id="rId8"/>
+    <p:sldLayoutId id="2147483813" r:id="rId9"/>
+    <p:sldLayoutId id="2147483814" r:id="rId10"/>
+    <p:sldLayoutId id="2147483815" r:id="rId11"/>
   </p:sldLayoutIdLst>
   <p:txStyles>
     <p:titleStyle>
-      <a:lvl1pPr algn="l" defTabSz="581010" rtl="0" eaLnBrk="1" latinLnBrk="0" hangingPunct="1">
+      <a:lvl1pPr algn="l" defTabSz="557967" rtl="0" eaLnBrk="1" latinLnBrk="0" hangingPunct="1">
         <a:lnSpc>
           <a:spcPct val="90000"/>
         </a:lnSpc>
@@ -3124,7 +3035,7 @@
           <a:spcPct val="0"/>
         </a:spcBef>
         <a:buNone/>
-        <a:defRPr sz="2796" kern="1200">
+        <a:defRPr sz="2685" kern="1200">
           <a:solidFill>
             <a:schemeClr val="tx1"/>
           </a:solidFill>
@@ -3135,16 +3046,16 @@
       </a:lvl1pPr>
     </p:titleStyle>
     <p:bodyStyle>
-      <a:lvl1pPr marL="145252" indent="-145252" algn="l" defTabSz="581010" rtl="0" eaLnBrk="1" latinLnBrk="0" hangingPunct="1">
+      <a:lvl1pPr marL="139492" indent="-139492" algn="l" defTabSz="557967" rtl="0" eaLnBrk="1" latinLnBrk="0" hangingPunct="1">
         <a:lnSpc>
           <a:spcPct val="90000"/>
         </a:lnSpc>
         <a:spcBef>
-          <a:spcPts val="635"/>
+          <a:spcPts val="610"/>
         </a:spcBef>
         <a:buFont typeface="Arial" panose="020B0604020202020204" pitchFamily="34" charset="0"/>
         <a:buChar char="•"/>
-        <a:defRPr sz="1779" kern="1200">
+        <a:defRPr sz="1709" kern="1200">
           <a:solidFill>
             <a:schemeClr val="tx1"/>
           </a:solidFill>
@@ -3153,16 +3064,16 @@
           <a:cs typeface="+mn-cs"/>
         </a:defRPr>
       </a:lvl1pPr>
-      <a:lvl2pPr marL="435757" indent="-145252" algn="l" defTabSz="581010" rtl="0" eaLnBrk="1" latinLnBrk="0" hangingPunct="1">
+      <a:lvl2pPr marL="418475" indent="-139492" algn="l" defTabSz="557967" rtl="0" eaLnBrk="1" latinLnBrk="0" hangingPunct="1">
         <a:lnSpc>
           <a:spcPct val="90000"/>
         </a:lnSpc>
         <a:spcBef>
-          <a:spcPts val="318"/>
+          <a:spcPts val="305"/>
         </a:spcBef>
         <a:buFont typeface="Arial" panose="020B0604020202020204" pitchFamily="34" charset="0"/>
         <a:buChar char="•"/>
-        <a:defRPr sz="1525" kern="1200">
+        <a:defRPr sz="1464" kern="1200">
           <a:solidFill>
             <a:schemeClr val="tx1"/>
           </a:solidFill>
@@ -3171,16 +3082,16 @@
           <a:cs typeface="+mn-cs"/>
         </a:defRPr>
       </a:lvl2pPr>
-      <a:lvl3pPr marL="726262" indent="-145252" algn="l" defTabSz="581010" rtl="0" eaLnBrk="1" latinLnBrk="0" hangingPunct="1">
+      <a:lvl3pPr marL="697459" indent="-139492" algn="l" defTabSz="557967" rtl="0" eaLnBrk="1" latinLnBrk="0" hangingPunct="1">
         <a:lnSpc>
           <a:spcPct val="90000"/>
         </a:lnSpc>
         <a:spcBef>
-          <a:spcPts val="318"/>
+          <a:spcPts val="305"/>
         </a:spcBef>
         <a:buFont typeface="Arial" panose="020B0604020202020204" pitchFamily="34" charset="0"/>
         <a:buChar char="•"/>
-        <a:defRPr sz="1271" kern="1200">
+        <a:defRPr sz="1220" kern="1200">
           <a:solidFill>
             <a:schemeClr val="tx1"/>
           </a:solidFill>
@@ -3189,16 +3100,16 @@
           <a:cs typeface="+mn-cs"/>
         </a:defRPr>
       </a:lvl3pPr>
-      <a:lvl4pPr marL="1016767" indent="-145252" algn="l" defTabSz="581010" rtl="0" eaLnBrk="1" latinLnBrk="0" hangingPunct="1">
+      <a:lvl4pPr marL="976442" indent="-139492" algn="l" defTabSz="557967" rtl="0" eaLnBrk="1" latinLnBrk="0" hangingPunct="1">
         <a:lnSpc>
           <a:spcPct val="90000"/>
         </a:lnSpc>
         <a:spcBef>
-          <a:spcPts val="318"/>
+          <a:spcPts val="305"/>
         </a:spcBef>
         <a:buFont typeface="Arial" panose="020B0604020202020204" pitchFamily="34" charset="0"/>
         <a:buChar char="•"/>
-        <a:defRPr sz="1144" kern="1200">
+        <a:defRPr sz="1098" kern="1200">
           <a:solidFill>
             <a:schemeClr val="tx1"/>
           </a:solidFill>
@@ -3207,16 +3118,16 @@
           <a:cs typeface="+mn-cs"/>
         </a:defRPr>
       </a:lvl4pPr>
-      <a:lvl5pPr marL="1307272" indent="-145252" algn="l" defTabSz="581010" rtl="0" eaLnBrk="1" latinLnBrk="0" hangingPunct="1">
+      <a:lvl5pPr marL="1255425" indent="-139492" algn="l" defTabSz="557967" rtl="0" eaLnBrk="1" latinLnBrk="0" hangingPunct="1">
         <a:lnSpc>
           <a:spcPct val="90000"/>
         </a:lnSpc>
         <a:spcBef>
-          <a:spcPts val="318"/>
+          <a:spcPts val="305"/>
         </a:spcBef>
         <a:buFont typeface="Arial" panose="020B0604020202020204" pitchFamily="34" charset="0"/>
         <a:buChar char="•"/>
-        <a:defRPr sz="1144" kern="1200">
+        <a:defRPr sz="1098" kern="1200">
           <a:solidFill>
             <a:schemeClr val="tx1"/>
           </a:solidFill>
@@ -3225,16 +3136,16 @@
           <a:cs typeface="+mn-cs"/>
         </a:defRPr>
       </a:lvl5pPr>
-      <a:lvl6pPr marL="1597777" indent="-145252" algn="l" defTabSz="581010" rtl="0" eaLnBrk="1" latinLnBrk="0" hangingPunct="1">
+      <a:lvl6pPr marL="1534409" indent="-139492" algn="l" defTabSz="557967" rtl="0" eaLnBrk="1" latinLnBrk="0" hangingPunct="1">
         <a:lnSpc>
           <a:spcPct val="90000"/>
         </a:lnSpc>
         <a:spcBef>
-          <a:spcPts val="318"/>
+          <a:spcPts val="305"/>
         </a:spcBef>
         <a:buFont typeface="Arial" panose="020B0604020202020204" pitchFamily="34" charset="0"/>
         <a:buChar char="•"/>
-        <a:defRPr sz="1144" kern="1200">
+        <a:defRPr sz="1098" kern="1200">
           <a:solidFill>
             <a:schemeClr val="tx1"/>
           </a:solidFill>
@@ -3243,16 +3154,16 @@
           <a:cs typeface="+mn-cs"/>
         </a:defRPr>
       </a:lvl6pPr>
-      <a:lvl7pPr marL="1888282" indent="-145252" algn="l" defTabSz="581010" rtl="0" eaLnBrk="1" latinLnBrk="0" hangingPunct="1">
+      <a:lvl7pPr marL="1813392" indent="-139492" algn="l" defTabSz="557967" rtl="0" eaLnBrk="1" latinLnBrk="0" hangingPunct="1">
         <a:lnSpc>
           <a:spcPct val="90000"/>
         </a:lnSpc>
         <a:spcBef>
-          <a:spcPts val="318"/>
+          <a:spcPts val="305"/>
         </a:spcBef>
         <a:buFont typeface="Arial" panose="020B0604020202020204" pitchFamily="34" charset="0"/>
         <a:buChar char="•"/>
-        <a:defRPr sz="1144" kern="1200">
+        <a:defRPr sz="1098" kern="1200">
           <a:solidFill>
             <a:schemeClr val="tx1"/>
           </a:solidFill>
@@ -3261,16 +3172,16 @@
           <a:cs typeface="+mn-cs"/>
         </a:defRPr>
       </a:lvl7pPr>
-      <a:lvl8pPr marL="2178787" indent="-145252" algn="l" defTabSz="581010" rtl="0" eaLnBrk="1" latinLnBrk="0" hangingPunct="1">
+      <a:lvl8pPr marL="2092376" indent="-139492" algn="l" defTabSz="557967" rtl="0" eaLnBrk="1" latinLnBrk="0" hangingPunct="1">
         <a:lnSpc>
           <a:spcPct val="90000"/>
         </a:lnSpc>
         <a:spcBef>
-          <a:spcPts val="318"/>
+          <a:spcPts val="305"/>
         </a:spcBef>
         <a:buFont typeface="Arial" panose="020B0604020202020204" pitchFamily="34" charset="0"/>
         <a:buChar char="•"/>
-        <a:defRPr sz="1144" kern="1200">
+        <a:defRPr sz="1098" kern="1200">
           <a:solidFill>
             <a:schemeClr val="tx1"/>
           </a:solidFill>
@@ -3279,16 +3190,16 @@
           <a:cs typeface="+mn-cs"/>
         </a:defRPr>
       </a:lvl8pPr>
-      <a:lvl9pPr marL="2469291" indent="-145252" algn="l" defTabSz="581010" rtl="0" eaLnBrk="1" latinLnBrk="0" hangingPunct="1">
+      <a:lvl9pPr marL="2371359" indent="-139492" algn="l" defTabSz="557967" rtl="0" eaLnBrk="1" latinLnBrk="0" hangingPunct="1">
         <a:lnSpc>
           <a:spcPct val="90000"/>
         </a:lnSpc>
         <a:spcBef>
-          <a:spcPts val="318"/>
+          <a:spcPts val="305"/>
         </a:spcBef>
         <a:buFont typeface="Arial" panose="020B0604020202020204" pitchFamily="34" charset="0"/>
         <a:buChar char="•"/>
-        <a:defRPr sz="1144" kern="1200">
+        <a:defRPr sz="1098" kern="1200">
           <a:solidFill>
             <a:schemeClr val="tx1"/>
           </a:solidFill>
@@ -3302,8 +3213,8 @@
       <a:defPPr>
         <a:defRPr lang="en-US"/>
       </a:defPPr>
-      <a:lvl1pPr marL="0" algn="l" defTabSz="581010" rtl="0" eaLnBrk="1" latinLnBrk="0" hangingPunct="1">
-        <a:defRPr sz="1144" kern="1200">
+      <a:lvl1pPr marL="0" algn="l" defTabSz="557967" rtl="0" eaLnBrk="1" latinLnBrk="0" hangingPunct="1">
+        <a:defRPr sz="1098" kern="1200">
           <a:solidFill>
             <a:schemeClr val="tx1"/>
           </a:solidFill>
@@ -3312,8 +3223,8 @@
           <a:cs typeface="+mn-cs"/>
         </a:defRPr>
       </a:lvl1pPr>
-      <a:lvl2pPr marL="290505" algn="l" defTabSz="581010" rtl="0" eaLnBrk="1" latinLnBrk="0" hangingPunct="1">
-        <a:defRPr sz="1144" kern="1200">
+      <a:lvl2pPr marL="278983" algn="l" defTabSz="557967" rtl="0" eaLnBrk="1" latinLnBrk="0" hangingPunct="1">
+        <a:defRPr sz="1098" kern="1200">
           <a:solidFill>
             <a:schemeClr val="tx1"/>
           </a:solidFill>
@@ -3322,8 +3233,8 @@
           <a:cs typeface="+mn-cs"/>
         </a:defRPr>
       </a:lvl2pPr>
-      <a:lvl3pPr marL="581010" algn="l" defTabSz="581010" rtl="0" eaLnBrk="1" latinLnBrk="0" hangingPunct="1">
-        <a:defRPr sz="1144" kern="1200">
+      <a:lvl3pPr marL="557967" algn="l" defTabSz="557967" rtl="0" eaLnBrk="1" latinLnBrk="0" hangingPunct="1">
+        <a:defRPr sz="1098" kern="1200">
           <a:solidFill>
             <a:schemeClr val="tx1"/>
           </a:solidFill>
@@ -3332,8 +3243,8 @@
           <a:cs typeface="+mn-cs"/>
         </a:defRPr>
       </a:lvl3pPr>
-      <a:lvl4pPr marL="871515" algn="l" defTabSz="581010" rtl="0" eaLnBrk="1" latinLnBrk="0" hangingPunct="1">
-        <a:defRPr sz="1144" kern="1200">
+      <a:lvl4pPr marL="836950" algn="l" defTabSz="557967" rtl="0" eaLnBrk="1" latinLnBrk="0" hangingPunct="1">
+        <a:defRPr sz="1098" kern="1200">
           <a:solidFill>
             <a:schemeClr val="tx1"/>
           </a:solidFill>
@@ -3342,8 +3253,8 @@
           <a:cs typeface="+mn-cs"/>
         </a:defRPr>
       </a:lvl4pPr>
-      <a:lvl5pPr marL="1162020" algn="l" defTabSz="581010" rtl="0" eaLnBrk="1" latinLnBrk="0" hangingPunct="1">
-        <a:defRPr sz="1144" kern="1200">
+      <a:lvl5pPr marL="1115934" algn="l" defTabSz="557967" rtl="0" eaLnBrk="1" latinLnBrk="0" hangingPunct="1">
+        <a:defRPr sz="1098" kern="1200">
           <a:solidFill>
             <a:schemeClr val="tx1"/>
           </a:solidFill>
@@ -3352,8 +3263,8 @@
           <a:cs typeface="+mn-cs"/>
         </a:defRPr>
       </a:lvl5pPr>
-      <a:lvl6pPr marL="1452524" algn="l" defTabSz="581010" rtl="0" eaLnBrk="1" latinLnBrk="0" hangingPunct="1">
-        <a:defRPr sz="1144" kern="1200">
+      <a:lvl6pPr marL="1394917" algn="l" defTabSz="557967" rtl="0" eaLnBrk="1" latinLnBrk="0" hangingPunct="1">
+        <a:defRPr sz="1098" kern="1200">
           <a:solidFill>
             <a:schemeClr val="tx1"/>
           </a:solidFill>
@@ -3362,8 +3273,8 @@
           <a:cs typeface="+mn-cs"/>
         </a:defRPr>
       </a:lvl6pPr>
-      <a:lvl7pPr marL="1743029" algn="l" defTabSz="581010" rtl="0" eaLnBrk="1" latinLnBrk="0" hangingPunct="1">
-        <a:defRPr sz="1144" kern="1200">
+      <a:lvl7pPr marL="1673901" algn="l" defTabSz="557967" rtl="0" eaLnBrk="1" latinLnBrk="0" hangingPunct="1">
+        <a:defRPr sz="1098" kern="1200">
           <a:solidFill>
             <a:schemeClr val="tx1"/>
           </a:solidFill>
@@ -3372,8 +3283,8 @@
           <a:cs typeface="+mn-cs"/>
         </a:defRPr>
       </a:lvl7pPr>
-      <a:lvl8pPr marL="2033534" algn="l" defTabSz="581010" rtl="0" eaLnBrk="1" latinLnBrk="0" hangingPunct="1">
-        <a:defRPr sz="1144" kern="1200">
+      <a:lvl8pPr marL="1952884" algn="l" defTabSz="557967" rtl="0" eaLnBrk="1" latinLnBrk="0" hangingPunct="1">
+        <a:defRPr sz="1098" kern="1200">
           <a:solidFill>
             <a:schemeClr val="tx1"/>
           </a:solidFill>
@@ -3382,8 +3293,8 @@
           <a:cs typeface="+mn-cs"/>
         </a:defRPr>
       </a:lvl8pPr>
-      <a:lvl9pPr marL="2324039" algn="l" defTabSz="581010" rtl="0" eaLnBrk="1" latinLnBrk="0" hangingPunct="1">
-        <a:defRPr sz="1144" kern="1200">
+      <a:lvl9pPr marL="2231868" algn="l" defTabSz="557967" rtl="0" eaLnBrk="1" latinLnBrk="0" hangingPunct="1">
+        <a:defRPr sz="1098" kern="1200">
           <a:solidFill>
             <a:schemeClr val="tx1"/>
           </a:solidFill>
@@ -3402,13 +3313,7 @@
   <p:cSld>
     <p:spTree>
       <p:nvGrpSpPr>
-        <p:cNvPr id="1" name="">
-          <a:extLst>
-            <a:ext uri="{FF2B5EF4-FFF2-40B4-BE49-F238E27FC236}">
-              <a16:creationId xmlns:a16="http://schemas.microsoft.com/office/drawing/2014/main" id="{45755735-297C-FF63-5780-38E212861112}"/>
-            </a:ext>
-          </a:extLst>
-        </p:cNvPr>
+        <p:cNvPr id="1" name=""/>
         <p:cNvGrpSpPr/>
         <p:nvPr/>
       </p:nvGrpSpPr>
@@ -3422,10 +3327,10 @@
       </p:grpSpPr>
       <p:sp>
         <p:nvSpPr>
-          <p:cNvPr id="2" name="TextBox 1">
-            <a:extLst>
-              <a:ext uri="{FF2B5EF4-FFF2-40B4-BE49-F238E27FC236}">
-                <a16:creationId xmlns:a16="http://schemas.microsoft.com/office/drawing/2014/main" id="{5E64B162-518D-FAB1-57B7-2243B6F0BD64}"/>
+          <p:cNvPr id="4" name="TextBox 3">
+            <a:extLst>
+              <a:ext uri="{FF2B5EF4-FFF2-40B4-BE49-F238E27FC236}">
+                <a16:creationId xmlns:a16="http://schemas.microsoft.com/office/drawing/2014/main" id="{52F5E2ED-0D6E-0AAD-A00A-6BC947DCB6A7}"/>
               </a:ext>
             </a:extLst>
           </p:cNvPr>
@@ -3434,605 +3339,2090 @@
         </p:nvSpPr>
         <p:spPr>
           <a:xfrm>
-            <a:off x="363202" y="2089128"/>
-            <a:ext cx="1620000" cy="612000"/>
+            <a:off x="355320" y="630340"/>
+            <a:ext cx="2160000" cy="461665"/>
           </a:xfrm>
           <a:prstGeom prst="rect">
             <a:avLst/>
           </a:prstGeom>
           <a:solidFill>
-            <a:schemeClr val="accent3">
-              <a:lumMod val="20000"/>
-              <a:lumOff val="80000"/>
+            <a:srgbClr val="C2F1C8"/>
+          </a:solidFill>
+        </p:spPr>
+        <p:txBody>
+          <a:bodyPr wrap="square" rtlCol="0">
+            <a:spAutoFit/>
+          </a:bodyPr>
+          <a:lstStyle/>
+          <a:p>
+            <a:r>
+              <a:rPr lang="en-GB" sz="800" dirty="0">
+                <a:latin typeface="Helvetica" pitchFamily="2" charset="0"/>
+              </a:rPr>
+              <a:t>File: </a:t>
+            </a:r>
+            <a:r>
+              <a:rPr lang="en-GB" sz="800" dirty="0" err="1">
+                <a:latin typeface="Helvetica" pitchFamily="2" charset="0"/>
+              </a:rPr>
+              <a:t>annotations.json</a:t>
+            </a:r>
+            <a:endParaRPr lang="en-GB" sz="800" dirty="0">
+              <a:latin typeface="Helvetica" pitchFamily="2" charset="0"/>
+            </a:endParaRPr>
+          </a:p>
+          <a:p>
+            <a:r>
+              <a:rPr lang="en-GB" sz="800" dirty="0">
+                <a:latin typeface="Helvetica" pitchFamily="2" charset="0"/>
+              </a:rPr>
+              <a:t>Source: Open Tree of Life 16.1</a:t>
+            </a:r>
+          </a:p>
+          <a:p>
+            <a:r>
+              <a:rPr lang="en-GB" sz="800" dirty="0">
+                <a:latin typeface="Helvetica" pitchFamily="2" charset="0"/>
+              </a:rPr>
+              <a:t>Data: Nodes supported by phylogeny</a:t>
+            </a:r>
+          </a:p>
+        </p:txBody>
+      </p:sp>
+      <p:sp>
+        <p:nvSpPr>
+          <p:cNvPr id="5" name="TextBox 4">
+            <a:extLst>
+              <a:ext uri="{FF2B5EF4-FFF2-40B4-BE49-F238E27FC236}">
+                <a16:creationId xmlns:a16="http://schemas.microsoft.com/office/drawing/2014/main" id="{3D6370F9-7BED-A592-85E7-E9022330F885}"/>
+              </a:ext>
+            </a:extLst>
+          </p:cNvPr>
+          <p:cNvSpPr txBox="1"/>
+          <p:nvPr/>
+        </p:nvSpPr>
+        <p:spPr>
+          <a:xfrm>
+            <a:off x="355320" y="118621"/>
+            <a:ext cx="2160000" cy="461665"/>
+          </a:xfrm>
+          <a:prstGeom prst="rect">
+            <a:avLst/>
+          </a:prstGeom>
+          <a:solidFill>
+            <a:srgbClr val="C2F1C8"/>
+          </a:solidFill>
+        </p:spPr>
+        <p:txBody>
+          <a:bodyPr wrap="square" rtlCol="0">
+            <a:spAutoFit/>
+          </a:bodyPr>
+          <a:lstStyle/>
+          <a:p>
+            <a:r>
+              <a:rPr lang="en-GB" sz="800" dirty="0">
+                <a:latin typeface="Helvetica" pitchFamily="2" charset="0"/>
+              </a:rPr>
+              <a:t>File: </a:t>
+            </a:r>
+            <a:r>
+              <a:rPr lang="en-GB" sz="800" dirty="0" err="1">
+                <a:latin typeface="Helvetica" pitchFamily="2" charset="0"/>
+              </a:rPr>
+              <a:t>taxonomy.tsv</a:t>
+            </a:r>
+            <a:endParaRPr lang="en-GB" sz="800" dirty="0">
+              <a:latin typeface="Helvetica" pitchFamily="2" charset="0"/>
+            </a:endParaRPr>
+          </a:p>
+          <a:p>
+            <a:r>
+              <a:rPr lang="en-GB" sz="800" dirty="0">
+                <a:latin typeface="Helvetica" pitchFamily="2" charset="0"/>
+              </a:rPr>
+              <a:t>Source: Open Tree Taxonomy 3.7.3</a:t>
+            </a:r>
+          </a:p>
+          <a:p>
+            <a:r>
+              <a:rPr lang="en-GB" sz="800" dirty="0">
+                <a:latin typeface="Helvetica" pitchFamily="2" charset="0"/>
+              </a:rPr>
+              <a:t>Data: Taxonomic ranks, extinct flags</a:t>
+            </a:r>
+          </a:p>
+        </p:txBody>
+      </p:sp>
+      <p:sp>
+        <p:nvSpPr>
+          <p:cNvPr id="8" name="TextBox 7">
+            <a:extLst>
+              <a:ext uri="{FF2B5EF4-FFF2-40B4-BE49-F238E27FC236}">
+                <a16:creationId xmlns:a16="http://schemas.microsoft.com/office/drawing/2014/main" id="{ED3C93D9-ECB4-3FDF-5527-A4B11095AD01}"/>
+              </a:ext>
+            </a:extLst>
+          </p:cNvPr>
+          <p:cNvSpPr txBox="1"/>
+          <p:nvPr/>
+        </p:nvSpPr>
+        <p:spPr>
+          <a:xfrm>
+            <a:off x="355320" y="1148933"/>
+            <a:ext cx="2160000" cy="461665"/>
+          </a:xfrm>
+          <a:prstGeom prst="rect">
+            <a:avLst/>
+          </a:prstGeom>
+          <a:solidFill>
+            <a:srgbClr val="C2F1C8"/>
+          </a:solidFill>
+        </p:spPr>
+        <p:txBody>
+          <a:bodyPr wrap="square" rtlCol="0">
+            <a:spAutoFit/>
+          </a:bodyPr>
+          <a:lstStyle/>
+          <a:p>
+            <a:r>
+              <a:rPr lang="en-GB" sz="800" dirty="0">
+                <a:latin typeface="Helvetica" pitchFamily="2" charset="0"/>
+              </a:rPr>
+              <a:t>File: </a:t>
+            </a:r>
+            <a:r>
+              <a:rPr lang="en-GB" sz="800" dirty="0" err="1">
+                <a:latin typeface="Helvetica" pitchFamily="2" charset="0"/>
+              </a:rPr>
+              <a:t>labelled_supertree_ottnames.tre</a:t>
+            </a:r>
+            <a:endParaRPr lang="en-GB" sz="800" dirty="0">
+              <a:latin typeface="Helvetica" pitchFamily="2" charset="0"/>
+            </a:endParaRPr>
+          </a:p>
+          <a:p>
+            <a:r>
+              <a:rPr lang="en-GB" sz="800" dirty="0">
+                <a:latin typeface="Helvetica" pitchFamily="2" charset="0"/>
+              </a:rPr>
+              <a:t>Source: Open Tree of Life 16.1</a:t>
+            </a:r>
+          </a:p>
+          <a:p>
+            <a:r>
+              <a:rPr lang="en-GB" sz="800" dirty="0">
+                <a:latin typeface="Helvetica" pitchFamily="2" charset="0"/>
+              </a:rPr>
+              <a:t>Data: </a:t>
+            </a:r>
+            <a:r>
+              <a:rPr lang="en-GB" sz="800" dirty="0" err="1">
+                <a:latin typeface="Helvetica" pitchFamily="2" charset="0"/>
+              </a:rPr>
+              <a:t>Newick</a:t>
+            </a:r>
+            <a:r>
+              <a:rPr lang="en-GB" sz="800" dirty="0">
+                <a:latin typeface="Helvetica" pitchFamily="2" charset="0"/>
+              </a:rPr>
+              <a:t>-format tree</a:t>
+            </a:r>
+          </a:p>
+        </p:txBody>
+      </p:sp>
+      <p:sp>
+        <p:nvSpPr>
+          <p:cNvPr id="10" name="TextBox 9">
+            <a:extLst>
+              <a:ext uri="{FF2B5EF4-FFF2-40B4-BE49-F238E27FC236}">
+                <a16:creationId xmlns:a16="http://schemas.microsoft.com/office/drawing/2014/main" id="{18B00A36-F6D2-444B-72FA-F05718469177}"/>
+              </a:ext>
+            </a:extLst>
+          </p:cNvPr>
+          <p:cNvSpPr txBox="1"/>
+          <p:nvPr/>
+        </p:nvSpPr>
+        <p:spPr>
+          <a:xfrm>
+            <a:off x="3099876" y="625926"/>
+            <a:ext cx="2340000" cy="215444"/>
+          </a:xfrm>
+          <a:prstGeom prst="rect">
+            <a:avLst/>
+          </a:prstGeom>
+          <a:noFill/>
+          <a:ln w="6350">
+            <a:solidFill>
+              <a:schemeClr val="bg1">
+                <a:lumMod val="50000"/>
+              </a:schemeClr>
+            </a:solidFill>
+          </a:ln>
+        </p:spPr>
+        <p:txBody>
+          <a:bodyPr wrap="square" rtlCol="0">
+            <a:spAutoFit/>
+          </a:bodyPr>
+          <a:lstStyle/>
+          <a:p>
+            <a:r>
+              <a:rPr lang="en-GB" sz="800" dirty="0" err="1">
+                <a:latin typeface="Helvetica" pitchFamily="2" charset="0"/>
+              </a:rPr>
+              <a:t>tree_loading.load_metadata</a:t>
+            </a:r>
+            <a:endParaRPr lang="en-GB" sz="800" dirty="0">
+              <a:latin typeface="Helvetica" pitchFamily="2" charset="0"/>
+            </a:endParaRPr>
+          </a:p>
+        </p:txBody>
+      </p:sp>
+      <p:sp>
+        <p:nvSpPr>
+          <p:cNvPr id="11" name="TextBox 10">
+            <a:extLst>
+              <a:ext uri="{FF2B5EF4-FFF2-40B4-BE49-F238E27FC236}">
+                <a16:creationId xmlns:a16="http://schemas.microsoft.com/office/drawing/2014/main" id="{EE2490BF-42E9-7C3C-366F-093997406D03}"/>
+              </a:ext>
+            </a:extLst>
+          </p:cNvPr>
+          <p:cNvSpPr txBox="1"/>
+          <p:nvPr/>
+        </p:nvSpPr>
+        <p:spPr>
+          <a:xfrm>
+            <a:off x="3099876" y="1154210"/>
+            <a:ext cx="2340000" cy="215444"/>
+          </a:xfrm>
+          <a:prstGeom prst="rect">
+            <a:avLst/>
+          </a:prstGeom>
+          <a:noFill/>
+          <a:ln w="6350">
+            <a:solidFill>
+              <a:schemeClr val="bg1">
+                <a:lumMod val="50000"/>
+              </a:schemeClr>
+            </a:solidFill>
+          </a:ln>
+        </p:spPr>
+        <p:txBody>
+          <a:bodyPr wrap="square" rtlCol="0">
+            <a:spAutoFit/>
+          </a:bodyPr>
+          <a:lstStyle/>
+          <a:p>
+            <a:r>
+              <a:rPr lang="en-GB" sz="800" dirty="0" err="1">
+                <a:latin typeface="Helvetica" pitchFamily="2" charset="0"/>
+              </a:rPr>
+              <a:t>tree_loading.build_and_annotate_tree</a:t>
+            </a:r>
+            <a:endParaRPr lang="en-GB" sz="800" dirty="0">
+              <a:latin typeface="Helvetica" pitchFamily="2" charset="0"/>
+            </a:endParaRPr>
+          </a:p>
+        </p:txBody>
+      </p:sp>
+      <p:sp>
+        <p:nvSpPr>
+          <p:cNvPr id="12" name="TextBox 11">
+            <a:extLst>
+              <a:ext uri="{FF2B5EF4-FFF2-40B4-BE49-F238E27FC236}">
+                <a16:creationId xmlns:a16="http://schemas.microsoft.com/office/drawing/2014/main" id="{E5667B09-AD5B-6838-5DBE-892CD5F742DD}"/>
+              </a:ext>
+            </a:extLst>
+          </p:cNvPr>
+          <p:cNvSpPr txBox="1"/>
+          <p:nvPr/>
+        </p:nvSpPr>
+        <p:spPr>
+          <a:xfrm>
+            <a:off x="3099876" y="3269697"/>
+            <a:ext cx="2340000" cy="215444"/>
+          </a:xfrm>
+          <a:prstGeom prst="rect">
+            <a:avLst/>
+          </a:prstGeom>
+          <a:noFill/>
+          <a:ln w="6350">
+            <a:solidFill>
+              <a:schemeClr val="bg1">
+                <a:lumMod val="50000"/>
+              </a:schemeClr>
+            </a:solidFill>
+          </a:ln>
+        </p:spPr>
+        <p:txBody>
+          <a:bodyPr wrap="square" rtlCol="0">
+            <a:spAutoFit/>
+          </a:bodyPr>
+          <a:lstStyle/>
+          <a:p>
+            <a:r>
+              <a:rPr lang="en-GB" sz="800" dirty="0" err="1">
+                <a:latin typeface="Helvetica" pitchFamily="2" charset="0"/>
+              </a:rPr>
+              <a:t>tree_labelling.add_ancestral_ranks</a:t>
+            </a:r>
+            <a:endParaRPr lang="en-GB" sz="800" dirty="0">
+              <a:latin typeface="Helvetica" pitchFamily="2" charset="0"/>
+            </a:endParaRPr>
+          </a:p>
+        </p:txBody>
+      </p:sp>
+      <p:sp>
+        <p:nvSpPr>
+          <p:cNvPr id="13" name="TextBox 12">
+            <a:extLst>
+              <a:ext uri="{FF2B5EF4-FFF2-40B4-BE49-F238E27FC236}">
+                <a16:creationId xmlns:a16="http://schemas.microsoft.com/office/drawing/2014/main" id="{4877FF21-00B3-4DE4-E939-BC0BC3630CCB}"/>
+              </a:ext>
+            </a:extLst>
+          </p:cNvPr>
+          <p:cNvSpPr txBox="1"/>
+          <p:nvPr/>
+        </p:nvSpPr>
+        <p:spPr>
+          <a:xfrm>
+            <a:off x="3099876" y="3541602"/>
+            <a:ext cx="2340000" cy="215444"/>
+          </a:xfrm>
+          <a:prstGeom prst="rect">
+            <a:avLst/>
+          </a:prstGeom>
+          <a:noFill/>
+          <a:ln w="6350">
+            <a:solidFill>
+              <a:schemeClr val="bg1">
+                <a:lumMod val="50000"/>
+              </a:schemeClr>
+            </a:solidFill>
+          </a:ln>
+        </p:spPr>
+        <p:txBody>
+          <a:bodyPr wrap="square" rtlCol="0">
+            <a:spAutoFit/>
+          </a:bodyPr>
+          <a:lstStyle/>
+          <a:p>
+            <a:r>
+              <a:rPr lang="en-GB" sz="800" dirty="0" err="1">
+                <a:latin typeface="Helvetica" pitchFamily="2" charset="0"/>
+              </a:rPr>
+              <a:t>tree_labelling.add_descendant_ranks</a:t>
+            </a:r>
+            <a:endParaRPr lang="en-GB" sz="800" dirty="0">
+              <a:latin typeface="Helvetica" pitchFamily="2" charset="0"/>
+            </a:endParaRPr>
+          </a:p>
+        </p:txBody>
+      </p:sp>
+      <p:sp>
+        <p:nvSpPr>
+          <p:cNvPr id="14" name="TextBox 13">
+            <a:extLst>
+              <a:ext uri="{FF2B5EF4-FFF2-40B4-BE49-F238E27FC236}">
+                <a16:creationId xmlns:a16="http://schemas.microsoft.com/office/drawing/2014/main" id="{D82D6261-00DB-3733-EFD1-AFF455F65601}"/>
+              </a:ext>
+            </a:extLst>
+          </p:cNvPr>
+          <p:cNvSpPr txBox="1"/>
+          <p:nvPr/>
+        </p:nvSpPr>
+        <p:spPr>
+          <a:xfrm>
+            <a:off x="3099876" y="2174072"/>
+            <a:ext cx="2340000" cy="215444"/>
+          </a:xfrm>
+          <a:prstGeom prst="rect">
+            <a:avLst/>
+          </a:prstGeom>
+          <a:noFill/>
+          <a:ln w="6350">
+            <a:solidFill>
+              <a:schemeClr val="bg1">
+                <a:lumMod val="50000"/>
+              </a:schemeClr>
+            </a:solidFill>
+          </a:ln>
+        </p:spPr>
+        <p:txBody>
+          <a:bodyPr wrap="square" rtlCol="0">
+            <a:spAutoFit/>
+          </a:bodyPr>
+          <a:lstStyle/>
+          <a:p>
+            <a:r>
+              <a:rPr lang="en-GB" sz="800" dirty="0" err="1">
+                <a:latin typeface="Helvetica" pitchFamily="2" charset="0"/>
+              </a:rPr>
+              <a:t>tree_pruning.strip_birds</a:t>
+            </a:r>
+            <a:endParaRPr lang="en-GB" sz="800" dirty="0">
+              <a:latin typeface="Helvetica" pitchFamily="2" charset="0"/>
+            </a:endParaRPr>
+          </a:p>
+        </p:txBody>
+      </p:sp>
+      <p:sp>
+        <p:nvSpPr>
+          <p:cNvPr id="15" name="TextBox 14">
+            <a:extLst>
+              <a:ext uri="{FF2B5EF4-FFF2-40B4-BE49-F238E27FC236}">
+                <a16:creationId xmlns:a16="http://schemas.microsoft.com/office/drawing/2014/main" id="{B484690D-55A9-E782-7706-92724C0530CF}"/>
+              </a:ext>
+            </a:extLst>
+          </p:cNvPr>
+          <p:cNvSpPr txBox="1"/>
+          <p:nvPr/>
+        </p:nvSpPr>
+        <p:spPr>
+          <a:xfrm>
+            <a:off x="355320" y="1929478"/>
+            <a:ext cx="2160000" cy="461665"/>
+          </a:xfrm>
+          <a:prstGeom prst="rect">
+            <a:avLst/>
+          </a:prstGeom>
+          <a:solidFill>
+            <a:srgbClr val="C2F1C8"/>
+          </a:solidFill>
+        </p:spPr>
+        <p:txBody>
+          <a:bodyPr wrap="square" rtlCol="0">
+            <a:spAutoFit/>
+          </a:bodyPr>
+          <a:lstStyle/>
+          <a:p>
+            <a:r>
+              <a:rPr lang="en-GB" sz="800" dirty="0">
+                <a:latin typeface="Helvetica" pitchFamily="2" charset="0"/>
+              </a:rPr>
+              <a:t>File: config/</a:t>
+            </a:r>
+            <a:r>
+              <a:rPr lang="en-GB" sz="800" dirty="0" err="1">
+                <a:latin typeface="Helvetica" pitchFamily="2" charset="0"/>
+              </a:rPr>
+              <a:t>birds.csv</a:t>
+            </a:r>
+            <a:endParaRPr lang="en-GB" sz="800" dirty="0">
+              <a:latin typeface="Helvetica" pitchFamily="2" charset="0"/>
+            </a:endParaRPr>
+          </a:p>
+          <a:p>
+            <a:r>
+              <a:rPr lang="en-GB" sz="800" dirty="0">
+                <a:latin typeface="Helvetica" pitchFamily="2" charset="0"/>
+              </a:rPr>
+              <a:t>Source: McTavish </a:t>
+            </a:r>
+            <a:r>
+              <a:rPr lang="en-GB" sz="800">
+                <a:latin typeface="Helvetica" pitchFamily="2" charset="0"/>
+              </a:rPr>
+              <a:t>et al. </a:t>
+            </a:r>
+            <a:r>
+              <a:rPr lang="en-GB" sz="800" dirty="0">
+                <a:latin typeface="Helvetica" pitchFamily="2" charset="0"/>
+              </a:rPr>
+              <a:t>(2025); included Data: Checklist of bird species</a:t>
+            </a:r>
+          </a:p>
+        </p:txBody>
+      </p:sp>
+      <p:sp>
+        <p:nvSpPr>
+          <p:cNvPr id="17" name="TextBox 16">
+            <a:extLst>
+              <a:ext uri="{FF2B5EF4-FFF2-40B4-BE49-F238E27FC236}">
+                <a16:creationId xmlns:a16="http://schemas.microsoft.com/office/drawing/2014/main" id="{9F6F7A4E-24AE-138B-A354-20638F58C83D}"/>
+              </a:ext>
+            </a:extLst>
+          </p:cNvPr>
+          <p:cNvSpPr txBox="1"/>
+          <p:nvPr/>
+        </p:nvSpPr>
+        <p:spPr>
+          <a:xfrm>
+            <a:off x="3099876" y="2447632"/>
+            <a:ext cx="2340000" cy="215444"/>
+          </a:xfrm>
+          <a:prstGeom prst="rect">
+            <a:avLst/>
+          </a:prstGeom>
+          <a:noFill/>
+          <a:ln w="6350">
+            <a:solidFill>
+              <a:schemeClr val="bg1">
+                <a:lumMod val="50000"/>
+              </a:schemeClr>
+            </a:solidFill>
+          </a:ln>
+        </p:spPr>
+        <p:txBody>
+          <a:bodyPr wrap="square" rtlCol="0">
+            <a:spAutoFit/>
+          </a:bodyPr>
+          <a:lstStyle/>
+          <a:p>
+            <a:r>
+              <a:rPr lang="en-GB" sz="800" dirty="0" err="1">
+                <a:latin typeface="Helvetica" pitchFamily="2" charset="0"/>
+              </a:rPr>
+              <a:t>tree_pruning.strip_turtles</a:t>
+            </a:r>
+            <a:endParaRPr lang="en-GB" sz="800" dirty="0">
+              <a:latin typeface="Helvetica" pitchFamily="2" charset="0"/>
+            </a:endParaRPr>
+          </a:p>
+        </p:txBody>
+      </p:sp>
+      <p:sp>
+        <p:nvSpPr>
+          <p:cNvPr id="18" name="TextBox 17">
+            <a:extLst>
+              <a:ext uri="{FF2B5EF4-FFF2-40B4-BE49-F238E27FC236}">
+                <a16:creationId xmlns:a16="http://schemas.microsoft.com/office/drawing/2014/main" id="{33A690E4-AF5E-35CF-46D9-298201F78571}"/>
+              </a:ext>
+            </a:extLst>
+          </p:cNvPr>
+          <p:cNvSpPr txBox="1"/>
+          <p:nvPr/>
+        </p:nvSpPr>
+        <p:spPr>
+          <a:xfrm>
+            <a:off x="3099876" y="2719537"/>
+            <a:ext cx="2340000" cy="215444"/>
+          </a:xfrm>
+          <a:prstGeom prst="rect">
+            <a:avLst/>
+          </a:prstGeom>
+          <a:noFill/>
+          <a:ln w="6350">
+            <a:solidFill>
+              <a:schemeClr val="bg1">
+                <a:lumMod val="50000"/>
+              </a:schemeClr>
+            </a:solidFill>
+          </a:ln>
+        </p:spPr>
+        <p:txBody>
+          <a:bodyPr wrap="square" rtlCol="0">
+            <a:spAutoFit/>
+          </a:bodyPr>
+          <a:lstStyle/>
+          <a:p>
+            <a:r>
+              <a:rPr lang="en-GB" sz="800" dirty="0" err="1">
+                <a:latin typeface="Helvetica" pitchFamily="2" charset="0"/>
+              </a:rPr>
+              <a:t>tree_pruning.remove_subspecies</a:t>
+            </a:r>
+            <a:endParaRPr lang="en-GB" sz="800" dirty="0">
+              <a:latin typeface="Helvetica" pitchFamily="2" charset="0"/>
+            </a:endParaRPr>
+          </a:p>
+        </p:txBody>
+      </p:sp>
+      <p:sp>
+        <p:nvSpPr>
+          <p:cNvPr id="19" name="TextBox 18">
+            <a:extLst>
+              <a:ext uri="{FF2B5EF4-FFF2-40B4-BE49-F238E27FC236}">
+                <a16:creationId xmlns:a16="http://schemas.microsoft.com/office/drawing/2014/main" id="{57E30337-E8AD-0FCE-ED4C-EFE1161269D5}"/>
+              </a:ext>
+            </a:extLst>
+          </p:cNvPr>
+          <p:cNvSpPr txBox="1"/>
+          <p:nvPr/>
+        </p:nvSpPr>
+        <p:spPr>
+          <a:xfrm>
+            <a:off x="3099876" y="2994617"/>
+            <a:ext cx="2340000" cy="215444"/>
+          </a:xfrm>
+          <a:prstGeom prst="rect">
+            <a:avLst/>
+          </a:prstGeom>
+          <a:noFill/>
+          <a:ln w="6350">
+            <a:solidFill>
+              <a:schemeClr val="bg1">
+                <a:lumMod val="50000"/>
+              </a:schemeClr>
+            </a:solidFill>
+          </a:ln>
+        </p:spPr>
+        <p:txBody>
+          <a:bodyPr wrap="square" rtlCol="0">
+            <a:spAutoFit/>
+          </a:bodyPr>
+          <a:lstStyle/>
+          <a:p>
+            <a:r>
+              <a:rPr lang="en-GB" sz="800" dirty="0" err="1">
+                <a:latin typeface="Helvetica" pitchFamily="2" charset="0"/>
+              </a:rPr>
+              <a:t>tree_pruning.impute_species_into_empty_taxa</a:t>
+            </a:r>
+            <a:endParaRPr lang="en-GB" sz="800" dirty="0">
+              <a:latin typeface="Helvetica" pitchFamily="2" charset="0"/>
+            </a:endParaRPr>
+          </a:p>
+        </p:txBody>
+      </p:sp>
+      <p:sp>
+        <p:nvSpPr>
+          <p:cNvPr id="20" name="TextBox 19">
+            <a:extLst>
+              <a:ext uri="{FF2B5EF4-FFF2-40B4-BE49-F238E27FC236}">
+                <a16:creationId xmlns:a16="http://schemas.microsoft.com/office/drawing/2014/main" id="{412F2EBF-D436-E03B-C71C-D5A0BDC77ABB}"/>
+              </a:ext>
+            </a:extLst>
+          </p:cNvPr>
+          <p:cNvSpPr txBox="1"/>
+          <p:nvPr/>
+        </p:nvSpPr>
+        <p:spPr>
+          <a:xfrm>
+            <a:off x="3099271" y="3813508"/>
+            <a:ext cx="2340000" cy="215444"/>
+          </a:xfrm>
+          <a:prstGeom prst="rect">
+            <a:avLst/>
+          </a:prstGeom>
+          <a:noFill/>
+          <a:ln w="6350">
+            <a:solidFill>
+              <a:schemeClr val="bg1">
+                <a:lumMod val="50000"/>
+              </a:schemeClr>
+            </a:solidFill>
+          </a:ln>
+        </p:spPr>
+        <p:txBody>
+          <a:bodyPr wrap="square" rtlCol="0">
+            <a:spAutoFit/>
+          </a:bodyPr>
+          <a:lstStyle/>
+          <a:p>
+            <a:r>
+              <a:rPr lang="en-GB" sz="800" dirty="0" err="1">
+                <a:latin typeface="Helvetica" pitchFamily="2" charset="0"/>
+              </a:rPr>
+              <a:t>tree_labelling.fix_taxonomy_ordering</a:t>
+            </a:r>
+            <a:endParaRPr lang="en-GB" sz="800" dirty="0">
+              <a:latin typeface="Helvetica" pitchFamily="2" charset="0"/>
+            </a:endParaRPr>
+          </a:p>
+        </p:txBody>
+      </p:sp>
+      <p:sp>
+        <p:nvSpPr>
+          <p:cNvPr id="22" name="TextBox 21">
+            <a:extLst>
+              <a:ext uri="{FF2B5EF4-FFF2-40B4-BE49-F238E27FC236}">
+                <a16:creationId xmlns:a16="http://schemas.microsoft.com/office/drawing/2014/main" id="{3FE2056B-4076-B253-DF2A-ABEE7976B7A0}"/>
+              </a:ext>
+            </a:extLst>
+          </p:cNvPr>
+          <p:cNvSpPr txBox="1"/>
+          <p:nvPr/>
+        </p:nvSpPr>
+        <p:spPr>
+          <a:xfrm>
+            <a:off x="3099271" y="4549527"/>
+            <a:ext cx="2340000" cy="215444"/>
+          </a:xfrm>
+          <a:prstGeom prst="rect">
+            <a:avLst/>
+          </a:prstGeom>
+          <a:noFill/>
+          <a:ln w="6350">
+            <a:solidFill>
+              <a:schemeClr val="bg1">
+                <a:lumMod val="50000"/>
+              </a:schemeClr>
+            </a:solidFill>
+          </a:ln>
+        </p:spPr>
+        <p:txBody>
+          <a:bodyPr wrap="square" rtlCol="0">
+            <a:spAutoFit/>
+          </a:bodyPr>
+          <a:lstStyle/>
+          <a:p>
+            <a:r>
+              <a:rPr lang="en-GB" sz="800" dirty="0" err="1">
+                <a:latin typeface="Helvetica" pitchFamily="2" charset="0"/>
+              </a:rPr>
+              <a:t>tree_topology.forced_taxa_moves</a:t>
+            </a:r>
+            <a:endParaRPr lang="en-GB" sz="800" dirty="0">
+              <a:latin typeface="Helvetica" pitchFamily="2" charset="0"/>
+            </a:endParaRPr>
+          </a:p>
+        </p:txBody>
+      </p:sp>
+      <p:sp>
+        <p:nvSpPr>
+          <p:cNvPr id="25" name="TextBox 24">
+            <a:extLst>
+              <a:ext uri="{FF2B5EF4-FFF2-40B4-BE49-F238E27FC236}">
+                <a16:creationId xmlns:a16="http://schemas.microsoft.com/office/drawing/2014/main" id="{B9461955-C0B8-FBC6-6D54-5D57B35AAA19}"/>
+              </a:ext>
+            </a:extLst>
+          </p:cNvPr>
+          <p:cNvSpPr txBox="1"/>
+          <p:nvPr/>
+        </p:nvSpPr>
+        <p:spPr>
+          <a:xfrm>
+            <a:off x="-4339872" y="759003"/>
+            <a:ext cx="1490475" cy="738664"/>
+          </a:xfrm>
+          <a:prstGeom prst="rect">
+            <a:avLst/>
+          </a:prstGeom>
+          <a:noFill/>
+        </p:spPr>
+        <p:txBody>
+          <a:bodyPr wrap="square" rtlCol="0">
+            <a:spAutoFit/>
+          </a:bodyPr>
+          <a:lstStyle/>
+          <a:p>
+            <a:r>
+              <a:rPr lang="en-GB" sz="1400" dirty="0"/>
+              <a:t>colour by included / external data?</a:t>
+            </a:r>
+          </a:p>
+        </p:txBody>
+      </p:sp>
+      <p:sp>
+        <p:nvSpPr>
+          <p:cNvPr id="26" name="TextBox 25">
+            <a:extLst>
+              <a:ext uri="{FF2B5EF4-FFF2-40B4-BE49-F238E27FC236}">
+                <a16:creationId xmlns:a16="http://schemas.microsoft.com/office/drawing/2014/main" id="{0BA34554-977C-1995-A90E-92DD0DDDF45B}"/>
+              </a:ext>
+            </a:extLst>
+          </p:cNvPr>
+          <p:cNvSpPr txBox="1"/>
+          <p:nvPr/>
+        </p:nvSpPr>
+        <p:spPr>
+          <a:xfrm>
+            <a:off x="355320" y="2436080"/>
+            <a:ext cx="2160000" cy="461665"/>
+          </a:xfrm>
+          <a:prstGeom prst="rect">
+            <a:avLst/>
+          </a:prstGeom>
+          <a:solidFill>
+            <a:srgbClr val="C2F1C8"/>
+          </a:solidFill>
+        </p:spPr>
+        <p:txBody>
+          <a:bodyPr wrap="square" rtlCol="0">
+            <a:spAutoFit/>
+          </a:bodyPr>
+          <a:lstStyle/>
+          <a:p>
+            <a:r>
+              <a:rPr lang="en-GB" sz="800" dirty="0">
+                <a:latin typeface="Helvetica" pitchFamily="2" charset="0"/>
+              </a:rPr>
+              <a:t>File: config/</a:t>
+            </a:r>
+            <a:r>
+              <a:rPr lang="en-GB" sz="800" dirty="0" err="1">
+                <a:latin typeface="Helvetica" pitchFamily="2" charset="0"/>
+              </a:rPr>
+              <a:t>turtles.csv</a:t>
+            </a:r>
+            <a:endParaRPr lang="en-GB" sz="800" dirty="0">
+              <a:latin typeface="Helvetica" pitchFamily="2" charset="0"/>
+            </a:endParaRPr>
+          </a:p>
+          <a:p>
+            <a:r>
+              <a:rPr lang="en-GB" sz="800" dirty="0">
+                <a:latin typeface="Helvetica" pitchFamily="2" charset="0"/>
+              </a:rPr>
+              <a:t>Source: Turtles of the World; included</a:t>
+            </a:r>
+          </a:p>
+          <a:p>
+            <a:r>
+              <a:rPr lang="en-GB" sz="800" dirty="0">
+                <a:latin typeface="Helvetica" pitchFamily="2" charset="0"/>
+              </a:rPr>
+              <a:t>Data: Checklist of turtle species</a:t>
+            </a:r>
+          </a:p>
+        </p:txBody>
+      </p:sp>
+      <p:sp>
+        <p:nvSpPr>
+          <p:cNvPr id="27" name="TextBox 26">
+            <a:extLst>
+              <a:ext uri="{FF2B5EF4-FFF2-40B4-BE49-F238E27FC236}">
+                <a16:creationId xmlns:a16="http://schemas.microsoft.com/office/drawing/2014/main" id="{7527B521-D86A-3697-0B43-1F9EA6A8CA4E}"/>
+              </a:ext>
+            </a:extLst>
+          </p:cNvPr>
+          <p:cNvSpPr txBox="1"/>
+          <p:nvPr/>
+        </p:nvSpPr>
+        <p:spPr>
+          <a:xfrm>
+            <a:off x="3099876" y="1897726"/>
+            <a:ext cx="2340000" cy="215444"/>
+          </a:xfrm>
+          <a:prstGeom prst="rect">
+            <a:avLst/>
+          </a:prstGeom>
+          <a:noFill/>
+          <a:ln w="6350">
+            <a:solidFill>
+              <a:schemeClr val="bg1">
+                <a:lumMod val="50000"/>
+              </a:schemeClr>
+            </a:solidFill>
+          </a:ln>
+        </p:spPr>
+        <p:txBody>
+          <a:bodyPr wrap="square" rtlCol="0">
+            <a:spAutoFit/>
+          </a:bodyPr>
+          <a:lstStyle/>
+          <a:p>
+            <a:r>
+              <a:rPr lang="en-GB" sz="800" dirty="0" err="1">
+                <a:latin typeface="Helvetica" pitchFamily="2" charset="0"/>
+              </a:rPr>
+              <a:t>tree_pruning.remove_based_on_props</a:t>
+            </a:r>
+            <a:endParaRPr lang="en-GB" sz="800" dirty="0">
+              <a:latin typeface="Helvetica" pitchFamily="2" charset="0"/>
+            </a:endParaRPr>
+          </a:p>
+        </p:txBody>
+      </p:sp>
+      <p:sp>
+        <p:nvSpPr>
+          <p:cNvPr id="32" name="TextBox 31">
+            <a:extLst>
+              <a:ext uri="{FF2B5EF4-FFF2-40B4-BE49-F238E27FC236}">
+                <a16:creationId xmlns:a16="http://schemas.microsoft.com/office/drawing/2014/main" id="{BFC70AE1-2943-51D3-03FD-8F1121EC18A4}"/>
+              </a:ext>
+            </a:extLst>
+          </p:cNvPr>
+          <p:cNvSpPr txBox="1"/>
+          <p:nvPr/>
+        </p:nvSpPr>
+        <p:spPr>
+          <a:xfrm>
+            <a:off x="360882" y="3476495"/>
+            <a:ext cx="2160000" cy="584775"/>
+          </a:xfrm>
+          <a:prstGeom prst="rect">
+            <a:avLst/>
+          </a:prstGeom>
+          <a:solidFill>
+            <a:srgbClr val="C2F1C8"/>
+          </a:solidFill>
+        </p:spPr>
+        <p:txBody>
+          <a:bodyPr wrap="square" rtlCol="0">
+            <a:spAutoFit/>
+          </a:bodyPr>
+          <a:lstStyle/>
+          <a:p>
+            <a:r>
+              <a:rPr lang="en-GB" sz="800" dirty="0">
+                <a:latin typeface="Helvetica" pitchFamily="2" charset="0"/>
+              </a:rPr>
+              <a:t>File: config/</a:t>
+            </a:r>
+            <a:r>
+              <a:rPr lang="en-GB" sz="800" dirty="0" err="1">
+                <a:latin typeface="Helvetica" pitchFamily="2" charset="0"/>
+              </a:rPr>
+              <a:t>taxonomy_fixes.csv</a:t>
+            </a:r>
+            <a:endParaRPr lang="en-GB" sz="800" dirty="0">
+              <a:latin typeface="Helvetica" pitchFamily="2" charset="0"/>
+            </a:endParaRPr>
+          </a:p>
+          <a:p>
+            <a:r>
+              <a:rPr lang="en-GB" sz="800" dirty="0">
+                <a:latin typeface="Helvetica" pitchFamily="2" charset="0"/>
+              </a:rPr>
+              <a:t>Source: Included in package</a:t>
+            </a:r>
+          </a:p>
+          <a:p>
+            <a:r>
+              <a:rPr lang="en-GB" sz="800" dirty="0">
+                <a:latin typeface="Helvetica" pitchFamily="2" charset="0"/>
+              </a:rPr>
+              <a:t>Data: Taxa with rank labels inconsistent with taxonomic hierarchy </a:t>
+            </a:r>
+          </a:p>
+        </p:txBody>
+      </p:sp>
+      <p:sp>
+        <p:nvSpPr>
+          <p:cNvPr id="44" name="TextBox 43">
+            <a:extLst>
+              <a:ext uri="{FF2B5EF4-FFF2-40B4-BE49-F238E27FC236}">
+                <a16:creationId xmlns:a16="http://schemas.microsoft.com/office/drawing/2014/main" id="{729FE4BA-7FC1-96D3-1B42-246C4723E10A}"/>
+              </a:ext>
+            </a:extLst>
+          </p:cNvPr>
+          <p:cNvSpPr txBox="1"/>
+          <p:nvPr/>
+        </p:nvSpPr>
+        <p:spPr>
+          <a:xfrm>
+            <a:off x="668439" y="5403550"/>
+            <a:ext cx="2340000" cy="215444"/>
+          </a:xfrm>
+          <a:prstGeom prst="rect">
+            <a:avLst/>
+          </a:prstGeom>
+          <a:noFill/>
+          <a:ln w="6350">
+            <a:solidFill>
+              <a:schemeClr val="bg1">
+                <a:lumMod val="50000"/>
+              </a:schemeClr>
+            </a:solidFill>
+          </a:ln>
+        </p:spPr>
+        <p:txBody>
+          <a:bodyPr wrap="square" rtlCol="0">
+            <a:spAutoFit/>
+          </a:bodyPr>
+          <a:lstStyle/>
+          <a:p>
+            <a:r>
+              <a:rPr lang="en-GB" sz="800" dirty="0" err="1">
+                <a:latin typeface="Helvetica" pitchFamily="2" charset="0"/>
+              </a:rPr>
+              <a:t>tree_labelling.populate_genus_dict</a:t>
+            </a:r>
+            <a:endParaRPr lang="en-GB" sz="800" dirty="0">
+              <a:latin typeface="Helvetica" pitchFamily="2" charset="0"/>
+            </a:endParaRPr>
+          </a:p>
+        </p:txBody>
+      </p:sp>
+      <p:sp>
+        <p:nvSpPr>
+          <p:cNvPr id="45" name="TextBox 44">
+            <a:extLst>
+              <a:ext uri="{FF2B5EF4-FFF2-40B4-BE49-F238E27FC236}">
+                <a16:creationId xmlns:a16="http://schemas.microsoft.com/office/drawing/2014/main" id="{7AAF76CF-57AE-725E-FC03-76EEF623F6B9}"/>
+              </a:ext>
+            </a:extLst>
+          </p:cNvPr>
+          <p:cNvSpPr txBox="1"/>
+          <p:nvPr/>
+        </p:nvSpPr>
+        <p:spPr>
+          <a:xfrm>
+            <a:off x="3099271" y="5128397"/>
+            <a:ext cx="2340000" cy="215444"/>
+          </a:xfrm>
+          <a:prstGeom prst="rect">
+            <a:avLst/>
+          </a:prstGeom>
+          <a:noFill/>
+          <a:ln w="6350">
+            <a:solidFill>
+              <a:schemeClr val="bg1">
+                <a:lumMod val="50000"/>
+              </a:schemeClr>
+            </a:solidFill>
+          </a:ln>
+        </p:spPr>
+        <p:txBody>
+          <a:bodyPr wrap="square" rtlCol="0">
+            <a:spAutoFit/>
+          </a:bodyPr>
+          <a:lstStyle/>
+          <a:p>
+            <a:r>
+              <a:rPr lang="en-GB" sz="800" dirty="0" err="1">
+                <a:latin typeface="Helvetica" pitchFamily="2" charset="0"/>
+              </a:rPr>
+              <a:t>tree_labelling.populate_tofix_dict</a:t>
+            </a:r>
+            <a:endParaRPr lang="en-GB" sz="800" dirty="0">
+              <a:latin typeface="Helvetica" pitchFamily="2" charset="0"/>
+            </a:endParaRPr>
+          </a:p>
+        </p:txBody>
+      </p:sp>
+      <p:sp>
+        <p:nvSpPr>
+          <p:cNvPr id="46" name="TextBox 45">
+            <a:extLst>
+              <a:ext uri="{FF2B5EF4-FFF2-40B4-BE49-F238E27FC236}">
+                <a16:creationId xmlns:a16="http://schemas.microsoft.com/office/drawing/2014/main" id="{AFB243EC-636B-58D0-B973-E6B8C735BA31}"/>
+              </a:ext>
+            </a:extLst>
+          </p:cNvPr>
+          <p:cNvSpPr txBox="1"/>
+          <p:nvPr/>
+        </p:nvSpPr>
+        <p:spPr>
+          <a:xfrm>
+            <a:off x="668439" y="5675597"/>
+            <a:ext cx="2340000" cy="215444"/>
+          </a:xfrm>
+          <a:prstGeom prst="rect">
+            <a:avLst/>
+          </a:prstGeom>
+          <a:noFill/>
+          <a:ln w="6350">
+            <a:solidFill>
+              <a:schemeClr val="bg1">
+                <a:lumMod val="50000"/>
+              </a:schemeClr>
+            </a:solidFill>
+          </a:ln>
+        </p:spPr>
+        <p:txBody>
+          <a:bodyPr wrap="square" rtlCol="0">
+            <a:spAutoFit/>
+          </a:bodyPr>
+          <a:lstStyle/>
+          <a:p>
+            <a:r>
+              <a:rPr lang="en-GB" sz="800" dirty="0" err="1">
+                <a:latin typeface="Helvetica" pitchFamily="2" charset="0"/>
+              </a:rPr>
+              <a:t>tree_topology.fix_polyphyly</a:t>
+            </a:r>
+            <a:r>
+              <a:rPr lang="en-GB" sz="800" dirty="0">
+                <a:latin typeface="Helvetica" pitchFamily="2" charset="0"/>
+              </a:rPr>
+              <a:t>(</a:t>
+            </a:r>
+            <a:r>
+              <a:rPr lang="en-GB" sz="800" dirty="0" err="1">
+                <a:latin typeface="Helvetica" pitchFamily="2" charset="0"/>
+              </a:rPr>
+              <a:t>genus_dict</a:t>
+            </a:r>
+            <a:r>
+              <a:rPr lang="en-GB" sz="800" dirty="0">
+                <a:latin typeface="Helvetica" pitchFamily="2" charset="0"/>
+              </a:rPr>
+              <a:t>)</a:t>
+            </a:r>
+          </a:p>
+        </p:txBody>
+      </p:sp>
+      <p:sp>
+        <p:nvSpPr>
+          <p:cNvPr id="47" name="TextBox 46">
+            <a:extLst>
+              <a:ext uri="{FF2B5EF4-FFF2-40B4-BE49-F238E27FC236}">
+                <a16:creationId xmlns:a16="http://schemas.microsoft.com/office/drawing/2014/main" id="{26B082EC-37E6-4A98-8992-CE430A617D7F}"/>
+              </a:ext>
+            </a:extLst>
+          </p:cNvPr>
+          <p:cNvSpPr txBox="1"/>
+          <p:nvPr/>
+        </p:nvSpPr>
+        <p:spPr>
+          <a:xfrm>
+            <a:off x="668439" y="5949197"/>
+            <a:ext cx="2340000" cy="215444"/>
+          </a:xfrm>
+          <a:prstGeom prst="rect">
+            <a:avLst/>
+          </a:prstGeom>
+          <a:noFill/>
+          <a:ln w="6350">
+            <a:solidFill>
+              <a:schemeClr val="bg1">
+                <a:lumMod val="50000"/>
+              </a:schemeClr>
+            </a:solidFill>
+          </a:ln>
+        </p:spPr>
+        <p:txBody>
+          <a:bodyPr wrap="square" rtlCol="0">
+            <a:spAutoFit/>
+          </a:bodyPr>
+          <a:lstStyle/>
+          <a:p>
+            <a:r>
+              <a:rPr lang="en-GB" sz="800" dirty="0" err="1">
+                <a:latin typeface="Helvetica" pitchFamily="2" charset="0"/>
+              </a:rPr>
+              <a:t>tree_fixing.fix_polyphyly</a:t>
+            </a:r>
+            <a:r>
+              <a:rPr lang="en-GB" sz="800" dirty="0">
+                <a:latin typeface="Helvetica" pitchFamily="2" charset="0"/>
+              </a:rPr>
+              <a:t>(</a:t>
+            </a:r>
+            <a:r>
+              <a:rPr lang="en-GB" sz="800" dirty="0" err="1">
+                <a:latin typeface="Helvetica" pitchFamily="2" charset="0"/>
+              </a:rPr>
+              <a:t>nmp_genera</a:t>
+            </a:r>
+            <a:r>
+              <a:rPr lang="en-GB" sz="800" dirty="0">
+                <a:latin typeface="Helvetica" pitchFamily="2" charset="0"/>
+              </a:rPr>
+              <a:t>)</a:t>
+            </a:r>
+          </a:p>
+        </p:txBody>
+      </p:sp>
+      <p:sp>
+        <p:nvSpPr>
+          <p:cNvPr id="48" name="TextBox 47">
+            <a:extLst>
+              <a:ext uri="{FF2B5EF4-FFF2-40B4-BE49-F238E27FC236}">
+                <a16:creationId xmlns:a16="http://schemas.microsoft.com/office/drawing/2014/main" id="{338BB0E6-A266-A342-4848-F52D890E0D54}"/>
+              </a:ext>
+            </a:extLst>
+          </p:cNvPr>
+          <p:cNvSpPr txBox="1"/>
+          <p:nvPr/>
+        </p:nvSpPr>
+        <p:spPr>
+          <a:xfrm>
+            <a:off x="668439" y="6222797"/>
+            <a:ext cx="2340000" cy="215444"/>
+          </a:xfrm>
+          <a:prstGeom prst="rect">
+            <a:avLst/>
+          </a:prstGeom>
+          <a:noFill/>
+          <a:ln w="6350">
+            <a:solidFill>
+              <a:schemeClr val="bg1">
+                <a:lumMod val="50000"/>
+              </a:schemeClr>
+            </a:solidFill>
+          </a:ln>
+        </p:spPr>
+        <p:txBody>
+          <a:bodyPr wrap="square" rtlCol="0">
+            <a:spAutoFit/>
+          </a:bodyPr>
+          <a:lstStyle/>
+          <a:p>
+            <a:r>
+              <a:rPr lang="en-GB" sz="800" dirty="0" err="1">
+                <a:latin typeface="Helvetica" pitchFamily="2" charset="0"/>
+              </a:rPr>
+              <a:t>tree_topology.remove_nonspecies_leaves</a:t>
+            </a:r>
+            <a:endParaRPr lang="en-GB" sz="800" dirty="0">
+              <a:latin typeface="Helvetica" pitchFamily="2" charset="0"/>
+            </a:endParaRPr>
+          </a:p>
+        </p:txBody>
+      </p:sp>
+      <p:sp>
+        <p:nvSpPr>
+          <p:cNvPr id="49" name="TextBox 48">
+            <a:extLst>
+              <a:ext uri="{FF2B5EF4-FFF2-40B4-BE49-F238E27FC236}">
+                <a16:creationId xmlns:a16="http://schemas.microsoft.com/office/drawing/2014/main" id="{1E78E4EE-876B-BD03-9AB2-54CFE692A01B}"/>
+              </a:ext>
+            </a:extLst>
+          </p:cNvPr>
+          <p:cNvSpPr txBox="1"/>
+          <p:nvPr/>
+        </p:nvSpPr>
+        <p:spPr>
+          <a:xfrm>
+            <a:off x="3099271" y="5401997"/>
+            <a:ext cx="2340000" cy="215444"/>
+          </a:xfrm>
+          <a:prstGeom prst="rect">
+            <a:avLst/>
+          </a:prstGeom>
+          <a:noFill/>
+          <a:ln w="6350">
+            <a:solidFill>
+              <a:schemeClr val="bg1">
+                <a:lumMod val="50000"/>
+              </a:schemeClr>
+            </a:solidFill>
+          </a:ln>
+        </p:spPr>
+        <p:txBody>
+          <a:bodyPr wrap="square" rtlCol="0">
+            <a:spAutoFit/>
+          </a:bodyPr>
+          <a:lstStyle/>
+          <a:p>
+            <a:r>
+              <a:rPr lang="en-GB" sz="800" dirty="0" err="1">
+                <a:latin typeface="Helvetica" pitchFamily="2" charset="0"/>
+              </a:rPr>
+              <a:t>tree_labelling.populate_tofix_bkb</a:t>
+            </a:r>
+            <a:endParaRPr lang="en-GB" sz="800" dirty="0">
+              <a:latin typeface="Helvetica" pitchFamily="2" charset="0"/>
+            </a:endParaRPr>
+          </a:p>
+        </p:txBody>
+      </p:sp>
+      <p:sp>
+        <p:nvSpPr>
+          <p:cNvPr id="50" name="TextBox 49">
+            <a:extLst>
+              <a:ext uri="{FF2B5EF4-FFF2-40B4-BE49-F238E27FC236}">
+                <a16:creationId xmlns:a16="http://schemas.microsoft.com/office/drawing/2014/main" id="{2779B2D8-78A7-E8EE-DE0C-664F4A9C3CCF}"/>
+              </a:ext>
+            </a:extLst>
+          </p:cNvPr>
+          <p:cNvSpPr txBox="1"/>
+          <p:nvPr/>
+        </p:nvSpPr>
+        <p:spPr>
+          <a:xfrm>
+            <a:off x="3099271" y="5949197"/>
+            <a:ext cx="2340000" cy="215444"/>
+          </a:xfrm>
+          <a:prstGeom prst="rect">
+            <a:avLst/>
+          </a:prstGeom>
+          <a:noFill/>
+          <a:ln w="6350">
+            <a:solidFill>
+              <a:schemeClr val="bg1">
+                <a:lumMod val="50000"/>
+              </a:schemeClr>
+            </a:solidFill>
+          </a:ln>
+        </p:spPr>
+        <p:txBody>
+          <a:bodyPr wrap="square" rtlCol="0">
+            <a:spAutoFit/>
+          </a:bodyPr>
+          <a:lstStyle/>
+          <a:p>
+            <a:r>
+              <a:rPr lang="en-GB" sz="800" dirty="0" err="1">
+                <a:latin typeface="Helvetica" pitchFamily="2" charset="0"/>
+              </a:rPr>
+              <a:t>tree_topology.fix_polyphyly</a:t>
+            </a:r>
+            <a:r>
+              <a:rPr lang="en-GB" sz="800" dirty="0">
+                <a:latin typeface="Helvetica" pitchFamily="2" charset="0"/>
+              </a:rPr>
+              <a:t>(</a:t>
+            </a:r>
+            <a:r>
+              <a:rPr lang="en-GB" sz="800" dirty="0" err="1">
+                <a:latin typeface="Helvetica" pitchFamily="2" charset="0"/>
+              </a:rPr>
+              <a:t>fix_dict</a:t>
+            </a:r>
+            <a:r>
+              <a:rPr lang="en-GB" sz="800" dirty="0">
+                <a:latin typeface="Helvetica" pitchFamily="2" charset="0"/>
+              </a:rPr>
+              <a:t>)</a:t>
+            </a:r>
+          </a:p>
+        </p:txBody>
+      </p:sp>
+      <p:sp>
+        <p:nvSpPr>
+          <p:cNvPr id="51" name="TextBox 50">
+            <a:extLst>
+              <a:ext uri="{FF2B5EF4-FFF2-40B4-BE49-F238E27FC236}">
+                <a16:creationId xmlns:a16="http://schemas.microsoft.com/office/drawing/2014/main" id="{97F79452-FB01-E59D-9B24-0FF7DE2C558B}"/>
+              </a:ext>
+            </a:extLst>
+          </p:cNvPr>
+          <p:cNvSpPr txBox="1"/>
+          <p:nvPr/>
+        </p:nvSpPr>
+        <p:spPr>
+          <a:xfrm>
+            <a:off x="3099271" y="5675597"/>
+            <a:ext cx="2340000" cy="215444"/>
+          </a:xfrm>
+          <a:prstGeom prst="rect">
+            <a:avLst/>
+          </a:prstGeom>
+          <a:noFill/>
+          <a:ln w="6350">
+            <a:solidFill>
+              <a:schemeClr val="bg1">
+                <a:lumMod val="50000"/>
+              </a:schemeClr>
+            </a:solidFill>
+          </a:ln>
+        </p:spPr>
+        <p:txBody>
+          <a:bodyPr wrap="square" rtlCol="0">
+            <a:spAutoFit/>
+          </a:bodyPr>
+          <a:lstStyle/>
+          <a:p>
+            <a:r>
+              <a:rPr lang="en-GB" sz="800" dirty="0" err="1">
+                <a:latin typeface="Helvetica" pitchFamily="2" charset="0"/>
+              </a:rPr>
+              <a:t>tree_labelling.process_tofix_bkb</a:t>
+            </a:r>
+            <a:endParaRPr lang="en-GB" sz="800" dirty="0">
+              <a:latin typeface="Helvetica" pitchFamily="2" charset="0"/>
+            </a:endParaRPr>
+          </a:p>
+        </p:txBody>
+      </p:sp>
+      <p:sp>
+        <p:nvSpPr>
+          <p:cNvPr id="52" name="TextBox 51">
+            <a:extLst>
+              <a:ext uri="{FF2B5EF4-FFF2-40B4-BE49-F238E27FC236}">
+                <a16:creationId xmlns:a16="http://schemas.microsoft.com/office/drawing/2014/main" id="{FBF18E1E-C4D9-C28F-1A76-6B5DBEF853A1}"/>
+              </a:ext>
+            </a:extLst>
+          </p:cNvPr>
+          <p:cNvSpPr txBox="1"/>
+          <p:nvPr/>
+        </p:nvSpPr>
+        <p:spPr>
+          <a:xfrm>
+            <a:off x="3099271" y="6695969"/>
+            <a:ext cx="2340000" cy="215444"/>
+          </a:xfrm>
+          <a:prstGeom prst="rect">
+            <a:avLst/>
+          </a:prstGeom>
+          <a:noFill/>
+          <a:ln w="6350">
+            <a:solidFill>
+              <a:schemeClr val="bg1">
+                <a:lumMod val="50000"/>
+              </a:schemeClr>
+            </a:solidFill>
+          </a:ln>
+        </p:spPr>
+        <p:txBody>
+          <a:bodyPr wrap="square" rtlCol="0">
+            <a:spAutoFit/>
+          </a:bodyPr>
+          <a:lstStyle/>
+          <a:p>
+            <a:r>
+              <a:rPr lang="en-GB" sz="800" dirty="0" err="1">
+                <a:latin typeface="Helvetica" pitchFamily="2" charset="0"/>
+              </a:rPr>
+              <a:t>tree_topology.fix_remaining_polytomies</a:t>
+            </a:r>
+            <a:endParaRPr lang="en-GB" sz="800" dirty="0">
+              <a:latin typeface="Helvetica" pitchFamily="2" charset="0"/>
+            </a:endParaRPr>
+          </a:p>
+        </p:txBody>
+      </p:sp>
+      <p:sp>
+        <p:nvSpPr>
+          <p:cNvPr id="53" name="TextBox 52">
+            <a:extLst>
+              <a:ext uri="{FF2B5EF4-FFF2-40B4-BE49-F238E27FC236}">
+                <a16:creationId xmlns:a16="http://schemas.microsoft.com/office/drawing/2014/main" id="{7FC6D95E-F161-E771-33E6-FF8041193902}"/>
+              </a:ext>
+            </a:extLst>
+          </p:cNvPr>
+          <p:cNvSpPr txBox="1"/>
+          <p:nvPr/>
+        </p:nvSpPr>
+        <p:spPr>
+          <a:xfrm>
+            <a:off x="3099271" y="6222797"/>
+            <a:ext cx="2340000" cy="215444"/>
+          </a:xfrm>
+          <a:prstGeom prst="rect">
+            <a:avLst/>
+          </a:prstGeom>
+          <a:noFill/>
+          <a:ln w="6350">
+            <a:solidFill>
+              <a:schemeClr val="bg1">
+                <a:lumMod val="50000"/>
+              </a:schemeClr>
+            </a:solidFill>
+          </a:ln>
+        </p:spPr>
+        <p:txBody>
+          <a:bodyPr wrap="square" rtlCol="0">
+            <a:spAutoFit/>
+          </a:bodyPr>
+          <a:lstStyle/>
+          <a:p>
+            <a:r>
+              <a:rPr lang="en-GB" sz="800" dirty="0" err="1">
+                <a:latin typeface="Helvetica" pitchFamily="2" charset="0"/>
+              </a:rPr>
+              <a:t>tree_topology.remove_nonspecies_leaves</a:t>
+            </a:r>
+            <a:endParaRPr lang="en-GB" sz="800" dirty="0">
+              <a:latin typeface="Helvetica" pitchFamily="2" charset="0"/>
+            </a:endParaRPr>
+          </a:p>
+        </p:txBody>
+      </p:sp>
+      <p:sp>
+        <p:nvSpPr>
+          <p:cNvPr id="54" name="TextBox 53">
+            <a:extLst>
+              <a:ext uri="{FF2B5EF4-FFF2-40B4-BE49-F238E27FC236}">
+                <a16:creationId xmlns:a16="http://schemas.microsoft.com/office/drawing/2014/main" id="{C32DA3CC-1651-638D-AFEB-5F4FBA13F036}"/>
+              </a:ext>
+            </a:extLst>
+          </p:cNvPr>
+          <p:cNvSpPr txBox="1"/>
+          <p:nvPr/>
+        </p:nvSpPr>
+        <p:spPr>
+          <a:xfrm>
+            <a:off x="3099271" y="6967997"/>
+            <a:ext cx="2340000" cy="215444"/>
+          </a:xfrm>
+          <a:prstGeom prst="rect">
+            <a:avLst/>
+          </a:prstGeom>
+          <a:noFill/>
+          <a:ln w="6350">
+            <a:solidFill>
+              <a:schemeClr val="bg1">
+                <a:lumMod val="50000"/>
+              </a:schemeClr>
+            </a:solidFill>
+          </a:ln>
+        </p:spPr>
+        <p:txBody>
+          <a:bodyPr wrap="square" rtlCol="0">
+            <a:spAutoFit/>
+          </a:bodyPr>
+          <a:lstStyle/>
+          <a:p>
+            <a:r>
+              <a:rPr lang="en-GB" sz="800" dirty="0" err="1">
+                <a:latin typeface="Helvetica" pitchFamily="2" charset="0"/>
+              </a:rPr>
+              <a:t>tree_topology.delete_one_child_nodes</a:t>
+            </a:r>
+            <a:endParaRPr lang="en-GB" sz="800" dirty="0">
+              <a:latin typeface="Helvetica" pitchFamily="2" charset="0"/>
+            </a:endParaRPr>
+          </a:p>
+        </p:txBody>
+      </p:sp>
+      <p:sp>
+        <p:nvSpPr>
+          <p:cNvPr id="55" name="TextBox 54">
+            <a:extLst>
+              <a:ext uri="{FF2B5EF4-FFF2-40B4-BE49-F238E27FC236}">
+                <a16:creationId xmlns:a16="http://schemas.microsoft.com/office/drawing/2014/main" id="{4C4E8B14-2AAC-5DEA-7EB0-FADF4004F04D}"/>
+              </a:ext>
+            </a:extLst>
+          </p:cNvPr>
+          <p:cNvSpPr txBox="1"/>
+          <p:nvPr/>
+        </p:nvSpPr>
+        <p:spPr>
+          <a:xfrm>
+            <a:off x="3099271" y="7917895"/>
+            <a:ext cx="2340000" cy="215444"/>
+          </a:xfrm>
+          <a:prstGeom prst="rect">
+            <a:avLst/>
+          </a:prstGeom>
+          <a:noFill/>
+          <a:ln w="6350">
+            <a:solidFill>
+              <a:schemeClr val="bg1">
+                <a:lumMod val="50000"/>
+              </a:schemeClr>
+            </a:solidFill>
+          </a:ln>
+        </p:spPr>
+        <p:txBody>
+          <a:bodyPr wrap="square" rtlCol="0">
+            <a:spAutoFit/>
+          </a:bodyPr>
+          <a:lstStyle/>
+          <a:p>
+            <a:r>
+              <a:rPr lang="en-GB" sz="800" dirty="0" err="1">
+                <a:latin typeface="Helvetica" pitchFamily="2" charset="0"/>
+              </a:rPr>
+              <a:t>tree_dating.assign_dates</a:t>
+            </a:r>
+            <a:endParaRPr lang="en-GB" sz="800" dirty="0">
+              <a:latin typeface="Helvetica" pitchFamily="2" charset="0"/>
+            </a:endParaRPr>
+          </a:p>
+        </p:txBody>
+      </p:sp>
+      <p:sp>
+        <p:nvSpPr>
+          <p:cNvPr id="56" name="TextBox 55">
+            <a:extLst>
+              <a:ext uri="{FF2B5EF4-FFF2-40B4-BE49-F238E27FC236}">
+                <a16:creationId xmlns:a16="http://schemas.microsoft.com/office/drawing/2014/main" id="{8014F540-700B-3589-6880-0F3887178D40}"/>
+              </a:ext>
+            </a:extLst>
+          </p:cNvPr>
+          <p:cNvSpPr txBox="1"/>
+          <p:nvPr/>
+        </p:nvSpPr>
+        <p:spPr>
+          <a:xfrm>
+            <a:off x="3099271" y="8195597"/>
+            <a:ext cx="2340000" cy="215444"/>
+          </a:xfrm>
+          <a:prstGeom prst="rect">
+            <a:avLst/>
+          </a:prstGeom>
+          <a:noFill/>
+          <a:ln w="6350">
+            <a:solidFill>
+              <a:schemeClr val="bg1">
+                <a:lumMod val="50000"/>
+              </a:schemeClr>
+            </a:solidFill>
+          </a:ln>
+        </p:spPr>
+        <p:txBody>
+          <a:bodyPr wrap="square" rtlCol="0">
+            <a:spAutoFit/>
+          </a:bodyPr>
+          <a:lstStyle/>
+          <a:p>
+            <a:r>
+              <a:rPr lang="en-GB" sz="800" dirty="0" err="1">
+                <a:latin typeface="Helvetica" pitchFamily="2" charset="0"/>
+              </a:rPr>
+              <a:t>tree_dating.dq_date_removal</a:t>
+            </a:r>
+            <a:endParaRPr lang="en-GB" sz="800" dirty="0">
+              <a:latin typeface="Helvetica" pitchFamily="2" charset="0"/>
+            </a:endParaRPr>
+          </a:p>
+        </p:txBody>
+      </p:sp>
+      <p:sp>
+        <p:nvSpPr>
+          <p:cNvPr id="57" name="TextBox 56">
+            <a:extLst>
+              <a:ext uri="{FF2B5EF4-FFF2-40B4-BE49-F238E27FC236}">
+                <a16:creationId xmlns:a16="http://schemas.microsoft.com/office/drawing/2014/main" id="{9C13A97C-CC3C-24C3-3B8E-B236E52EC594}"/>
+              </a:ext>
+            </a:extLst>
+          </p:cNvPr>
+          <p:cNvSpPr txBox="1"/>
+          <p:nvPr/>
+        </p:nvSpPr>
+        <p:spPr>
+          <a:xfrm>
+            <a:off x="3099271" y="8472797"/>
+            <a:ext cx="2340000" cy="215444"/>
+          </a:xfrm>
+          <a:prstGeom prst="rect">
+            <a:avLst/>
+          </a:prstGeom>
+          <a:noFill/>
+          <a:ln w="6350">
+            <a:solidFill>
+              <a:schemeClr val="bg1">
+                <a:lumMod val="50000"/>
+              </a:schemeClr>
+            </a:solidFill>
+          </a:ln>
+        </p:spPr>
+        <p:txBody>
+          <a:bodyPr wrap="square" rtlCol="0">
+            <a:spAutoFit/>
+          </a:bodyPr>
+          <a:lstStyle/>
+          <a:p>
+            <a:r>
+              <a:rPr lang="en-GB" sz="800" dirty="0" err="1">
+                <a:latin typeface="Helvetica" pitchFamily="2" charset="0"/>
+              </a:rPr>
+              <a:t>tree_dating.impute_missing_dates</a:t>
+            </a:r>
+            <a:endParaRPr lang="en-GB" sz="800" dirty="0">
+              <a:latin typeface="Helvetica" pitchFamily="2" charset="0"/>
+            </a:endParaRPr>
+          </a:p>
+        </p:txBody>
+      </p:sp>
+      <p:sp>
+        <p:nvSpPr>
+          <p:cNvPr id="59" name="TextBox 58">
+            <a:extLst>
+              <a:ext uri="{FF2B5EF4-FFF2-40B4-BE49-F238E27FC236}">
+                <a16:creationId xmlns:a16="http://schemas.microsoft.com/office/drawing/2014/main" id="{6DBB37AA-B7E1-14A5-2F96-19B796A3BA95}"/>
+              </a:ext>
+            </a:extLst>
+          </p:cNvPr>
+          <p:cNvSpPr txBox="1"/>
+          <p:nvPr/>
+        </p:nvSpPr>
+        <p:spPr>
+          <a:xfrm>
+            <a:off x="3099271" y="7640304"/>
+            <a:ext cx="2340000" cy="215444"/>
+          </a:xfrm>
+          <a:prstGeom prst="rect">
+            <a:avLst/>
+          </a:prstGeom>
+          <a:noFill/>
+          <a:ln w="6350">
+            <a:solidFill>
+              <a:schemeClr val="bg1">
+                <a:lumMod val="50000"/>
+              </a:schemeClr>
+            </a:solidFill>
+          </a:ln>
+        </p:spPr>
+        <p:txBody>
+          <a:bodyPr wrap="square" rtlCol="0">
+            <a:spAutoFit/>
+          </a:bodyPr>
+          <a:lstStyle/>
+          <a:p>
+            <a:r>
+              <a:rPr lang="en-GB" sz="800" dirty="0" err="1">
+                <a:latin typeface="Helvetica" pitchFamily="2" charset="0"/>
+              </a:rPr>
+              <a:t>tree_loading.load_dates</a:t>
+            </a:r>
+            <a:endParaRPr lang="en-GB" sz="800" dirty="0">
+              <a:latin typeface="Helvetica" pitchFamily="2" charset="0"/>
+            </a:endParaRPr>
+          </a:p>
+        </p:txBody>
+      </p:sp>
+      <p:sp>
+        <p:nvSpPr>
+          <p:cNvPr id="62" name="Rectangle 61">
+            <a:extLst>
+              <a:ext uri="{FF2B5EF4-FFF2-40B4-BE49-F238E27FC236}">
+                <a16:creationId xmlns:a16="http://schemas.microsoft.com/office/drawing/2014/main" id="{519298B0-185D-5AF9-9AB6-5B5AA578DB5D}"/>
+              </a:ext>
+            </a:extLst>
+          </p:cNvPr>
+          <p:cNvSpPr/>
+          <p:nvPr/>
+        </p:nvSpPr>
+        <p:spPr>
+          <a:xfrm>
+            <a:off x="50097" y="48259"/>
+            <a:ext cx="5469707" cy="1713830"/>
+          </a:xfrm>
+          <a:prstGeom prst="rect">
+            <a:avLst/>
+          </a:prstGeom>
+          <a:noFill/>
+          <a:ln>
+            <a:solidFill>
+              <a:schemeClr val="bg1">
+                <a:lumMod val="75000"/>
+              </a:schemeClr>
+            </a:solidFill>
+          </a:ln>
+        </p:spPr>
+        <p:style>
+          <a:lnRef idx="2">
+            <a:schemeClr val="accent1">
+              <a:shade val="15000"/>
             </a:schemeClr>
-          </a:solidFill>
+          </a:lnRef>
+          <a:fillRef idx="1">
+            <a:schemeClr val="accent1"/>
+          </a:fillRef>
+          <a:effectRef idx="0">
+            <a:schemeClr val="accent1"/>
+          </a:effectRef>
+          <a:fontRef idx="minor">
+            <a:schemeClr val="lt1"/>
+          </a:fontRef>
+        </p:style>
+        <p:txBody>
+          <a:bodyPr rtlCol="0" anchor="ctr"/>
+          <a:lstStyle/>
+          <a:p>
+            <a:pPr algn="ctr"/>
+            <a:endParaRPr lang="en-GB"/>
+          </a:p>
+        </p:txBody>
+      </p:sp>
+      <p:sp>
+        <p:nvSpPr>
+          <p:cNvPr id="63" name="Rectangle 62">
+            <a:extLst>
+              <a:ext uri="{FF2B5EF4-FFF2-40B4-BE49-F238E27FC236}">
+                <a16:creationId xmlns:a16="http://schemas.microsoft.com/office/drawing/2014/main" id="{A694501E-F97B-8334-F710-DF8CF23B139B}"/>
+              </a:ext>
+            </a:extLst>
+          </p:cNvPr>
+          <p:cNvSpPr/>
+          <p:nvPr/>
+        </p:nvSpPr>
+        <p:spPr>
+          <a:xfrm>
+            <a:off x="50096" y="1814177"/>
+            <a:ext cx="5469706" cy="2594613"/>
+          </a:xfrm>
+          <a:prstGeom prst="rect">
+            <a:avLst/>
+          </a:prstGeom>
+          <a:noFill/>
           <a:ln>
+            <a:solidFill>
+              <a:schemeClr val="bg1">
+                <a:lumMod val="75000"/>
+              </a:schemeClr>
+            </a:solidFill>
+          </a:ln>
+        </p:spPr>
+        <p:style>
+          <a:lnRef idx="2">
+            <a:schemeClr val="accent1">
+              <a:shade val="15000"/>
+            </a:schemeClr>
+          </a:lnRef>
+          <a:fillRef idx="1">
+            <a:schemeClr val="accent1"/>
+          </a:fillRef>
+          <a:effectRef idx="0">
+            <a:schemeClr val="accent1"/>
+          </a:effectRef>
+          <a:fontRef idx="minor">
+            <a:schemeClr val="lt1"/>
+          </a:fontRef>
+        </p:style>
+        <p:txBody>
+          <a:bodyPr rtlCol="0" anchor="ctr"/>
+          <a:lstStyle/>
+          <a:p>
+            <a:pPr algn="ctr"/>
+            <a:endParaRPr lang="en-GB"/>
+          </a:p>
+        </p:txBody>
+      </p:sp>
+      <p:sp>
+        <p:nvSpPr>
+          <p:cNvPr id="64" name="Rectangle 63">
+            <a:extLst>
+              <a:ext uri="{FF2B5EF4-FFF2-40B4-BE49-F238E27FC236}">
+                <a16:creationId xmlns:a16="http://schemas.microsoft.com/office/drawing/2014/main" id="{B7337B38-5ACE-197C-9F0D-1590A7920DCC}"/>
+              </a:ext>
+            </a:extLst>
+          </p:cNvPr>
+          <p:cNvSpPr/>
+          <p:nvPr/>
+        </p:nvSpPr>
+        <p:spPr>
+          <a:xfrm>
+            <a:off x="50096" y="4463777"/>
+            <a:ext cx="5469706" cy="3028808"/>
+          </a:xfrm>
+          <a:prstGeom prst="rect">
+            <a:avLst/>
+          </a:prstGeom>
+          <a:noFill/>
+          <a:ln>
+            <a:solidFill>
+              <a:schemeClr val="bg1">
+                <a:lumMod val="75000"/>
+              </a:schemeClr>
+            </a:solidFill>
+          </a:ln>
+        </p:spPr>
+        <p:style>
+          <a:lnRef idx="2">
+            <a:schemeClr val="accent1">
+              <a:shade val="15000"/>
+            </a:schemeClr>
+          </a:lnRef>
+          <a:fillRef idx="1">
+            <a:schemeClr val="accent1"/>
+          </a:fillRef>
+          <a:effectRef idx="0">
+            <a:schemeClr val="accent1"/>
+          </a:effectRef>
+          <a:fontRef idx="minor">
+            <a:schemeClr val="lt1"/>
+          </a:fontRef>
+        </p:style>
+        <p:txBody>
+          <a:bodyPr rtlCol="0" anchor="ctr"/>
+          <a:lstStyle/>
+          <a:p>
+            <a:pPr algn="ctr"/>
+            <a:endParaRPr lang="en-GB"/>
+          </a:p>
+        </p:txBody>
+      </p:sp>
+      <p:sp>
+        <p:nvSpPr>
+          <p:cNvPr id="65" name="Rectangle 64">
+            <a:extLst>
+              <a:ext uri="{FF2B5EF4-FFF2-40B4-BE49-F238E27FC236}">
+                <a16:creationId xmlns:a16="http://schemas.microsoft.com/office/drawing/2014/main" id="{81DD99EB-E6F1-82E1-9921-FBCFA3859AB1}"/>
+              </a:ext>
+            </a:extLst>
+          </p:cNvPr>
+          <p:cNvSpPr/>
+          <p:nvPr/>
+        </p:nvSpPr>
+        <p:spPr>
+          <a:xfrm>
+            <a:off x="50096" y="7547576"/>
+            <a:ext cx="5469706" cy="1228955"/>
+          </a:xfrm>
+          <a:prstGeom prst="rect">
+            <a:avLst/>
+          </a:prstGeom>
+          <a:noFill/>
+          <a:ln>
+            <a:solidFill>
+              <a:schemeClr val="bg1">
+                <a:lumMod val="75000"/>
+              </a:schemeClr>
+            </a:solidFill>
+          </a:ln>
+        </p:spPr>
+        <p:style>
+          <a:lnRef idx="2">
+            <a:schemeClr val="accent1">
+              <a:shade val="15000"/>
+            </a:schemeClr>
+          </a:lnRef>
+          <a:fillRef idx="1">
+            <a:schemeClr val="accent1"/>
+          </a:fillRef>
+          <a:effectRef idx="0">
+            <a:schemeClr val="accent1"/>
+          </a:effectRef>
+          <a:fontRef idx="minor">
+            <a:schemeClr val="lt1"/>
+          </a:fontRef>
+        </p:style>
+        <p:txBody>
+          <a:bodyPr rtlCol="0" anchor="ctr"/>
+          <a:lstStyle/>
+          <a:p>
+            <a:pPr algn="ctr"/>
+            <a:endParaRPr lang="en-GB"/>
+          </a:p>
+        </p:txBody>
+      </p:sp>
+      <p:sp>
+        <p:nvSpPr>
+          <p:cNvPr id="66" name="TextBox 65">
+            <a:extLst>
+              <a:ext uri="{FF2B5EF4-FFF2-40B4-BE49-F238E27FC236}">
+                <a16:creationId xmlns:a16="http://schemas.microsoft.com/office/drawing/2014/main" id="{867CA491-CBFE-6091-9C35-08DF1264F6F2}"/>
+              </a:ext>
+            </a:extLst>
+          </p:cNvPr>
+          <p:cNvSpPr txBox="1"/>
+          <p:nvPr/>
+        </p:nvSpPr>
+        <p:spPr>
+          <a:xfrm rot="16200000">
+            <a:off x="-490227" y="599380"/>
+            <a:ext cx="1363851" cy="261610"/>
+          </a:xfrm>
+          <a:prstGeom prst="rect">
+            <a:avLst/>
+          </a:prstGeom>
+          <a:noFill/>
+        </p:spPr>
+        <p:txBody>
+          <a:bodyPr wrap="square" rtlCol="0">
+            <a:spAutoFit/>
+          </a:bodyPr>
+          <a:lstStyle/>
+          <a:p>
+            <a:pPr algn="r"/>
+            <a:r>
+              <a:rPr lang="en-GB" sz="1100" dirty="0">
+                <a:latin typeface="Helvetica" pitchFamily="2" charset="0"/>
+              </a:rPr>
+              <a:t>1. Loading</a:t>
+            </a:r>
+          </a:p>
+        </p:txBody>
+      </p:sp>
+      <p:sp>
+        <p:nvSpPr>
+          <p:cNvPr id="68" name="TextBox 67">
+            <a:extLst>
+              <a:ext uri="{FF2B5EF4-FFF2-40B4-BE49-F238E27FC236}">
+                <a16:creationId xmlns:a16="http://schemas.microsoft.com/office/drawing/2014/main" id="{85F9F545-2972-66D5-B6AB-1E8881D71062}"/>
+              </a:ext>
+            </a:extLst>
+          </p:cNvPr>
+          <p:cNvSpPr txBox="1"/>
+          <p:nvPr/>
+        </p:nvSpPr>
+        <p:spPr>
+          <a:xfrm rot="16200000">
+            <a:off x="-490227" y="2365296"/>
+            <a:ext cx="1363851" cy="261610"/>
+          </a:xfrm>
+          <a:prstGeom prst="rect">
+            <a:avLst/>
+          </a:prstGeom>
+          <a:noFill/>
+        </p:spPr>
+        <p:txBody>
+          <a:bodyPr wrap="square" rtlCol="0">
+            <a:spAutoFit/>
+          </a:bodyPr>
+          <a:lstStyle/>
+          <a:p>
+            <a:pPr algn="r"/>
+            <a:r>
+              <a:rPr lang="en-GB" sz="1100" dirty="0">
+                <a:latin typeface="Helvetica" pitchFamily="2" charset="0"/>
+              </a:rPr>
+              <a:t>2. Pruning</a:t>
+            </a:r>
+          </a:p>
+        </p:txBody>
+      </p:sp>
+      <p:sp>
+        <p:nvSpPr>
+          <p:cNvPr id="69" name="TextBox 68">
+            <a:extLst>
+              <a:ext uri="{FF2B5EF4-FFF2-40B4-BE49-F238E27FC236}">
+                <a16:creationId xmlns:a16="http://schemas.microsoft.com/office/drawing/2014/main" id="{19A872F0-CF63-5E7A-57E3-0A5758949D7A}"/>
+              </a:ext>
+            </a:extLst>
+          </p:cNvPr>
+          <p:cNvSpPr txBox="1"/>
+          <p:nvPr/>
+        </p:nvSpPr>
+        <p:spPr>
+          <a:xfrm rot="16200000">
+            <a:off x="-910741" y="5435412"/>
+            <a:ext cx="2204879" cy="261610"/>
+          </a:xfrm>
+          <a:prstGeom prst="rect">
+            <a:avLst/>
+          </a:prstGeom>
+          <a:noFill/>
+        </p:spPr>
+        <p:txBody>
+          <a:bodyPr wrap="square" rtlCol="0">
+            <a:spAutoFit/>
+          </a:bodyPr>
+          <a:lstStyle/>
+          <a:p>
+            <a:pPr algn="r"/>
+            <a:r>
+              <a:rPr lang="en-GB" sz="1100" dirty="0">
+                <a:latin typeface="Helvetica" pitchFamily="2" charset="0"/>
+              </a:rPr>
+              <a:t>3. Polytomy resolution</a:t>
+            </a:r>
+          </a:p>
+        </p:txBody>
+      </p:sp>
+      <p:sp>
+        <p:nvSpPr>
+          <p:cNvPr id="70" name="TextBox 69">
+            <a:extLst>
+              <a:ext uri="{FF2B5EF4-FFF2-40B4-BE49-F238E27FC236}">
+                <a16:creationId xmlns:a16="http://schemas.microsoft.com/office/drawing/2014/main" id="{3E60DCC2-DD05-B875-9788-47EF1088AB7E}"/>
+              </a:ext>
+            </a:extLst>
+          </p:cNvPr>
+          <p:cNvSpPr txBox="1"/>
+          <p:nvPr/>
+        </p:nvSpPr>
+        <p:spPr>
+          <a:xfrm rot="16200000">
+            <a:off x="-490227" y="8098695"/>
+            <a:ext cx="1363851" cy="261610"/>
+          </a:xfrm>
+          <a:prstGeom prst="rect">
+            <a:avLst/>
+          </a:prstGeom>
+          <a:noFill/>
+        </p:spPr>
+        <p:txBody>
+          <a:bodyPr wrap="square" rtlCol="0">
+            <a:spAutoFit/>
+          </a:bodyPr>
+          <a:lstStyle/>
+          <a:p>
+            <a:pPr algn="r"/>
+            <a:r>
+              <a:rPr lang="en-GB" sz="1100" dirty="0">
+                <a:latin typeface="Helvetica" pitchFamily="2" charset="0"/>
+              </a:rPr>
+              <a:t>4. Dating</a:t>
+            </a:r>
+          </a:p>
+        </p:txBody>
+      </p:sp>
+      <p:cxnSp>
+        <p:nvCxnSpPr>
+          <p:cNvPr id="72" name="Straight Arrow Connector 71">
+            <a:extLst>
+              <a:ext uri="{FF2B5EF4-FFF2-40B4-BE49-F238E27FC236}">
+                <a16:creationId xmlns:a16="http://schemas.microsoft.com/office/drawing/2014/main" id="{2D112AE6-BC60-3AE2-057C-C001BF0616FA}"/>
+              </a:ext>
+            </a:extLst>
+          </p:cNvPr>
+          <p:cNvCxnSpPr>
+            <a:cxnSpLocks/>
+          </p:cNvCxnSpPr>
+          <p:nvPr/>
+        </p:nvCxnSpPr>
+        <p:spPr>
+          <a:xfrm>
+            <a:off x="2520882" y="427969"/>
+            <a:ext cx="578994" cy="252000"/>
+          </a:xfrm>
+          <a:prstGeom prst="straightConnector1">
+            <a:avLst/>
+          </a:prstGeom>
+          <a:ln w="12700">
             <a:solidFill>
               <a:schemeClr val="tx1"/>
             </a:solidFill>
+            <a:tailEnd type="triangle" w="med" len="sm"/>
           </a:ln>
-          <a:effectLst/>
-        </p:spPr>
-        <p:txBody>
-          <a:bodyPr wrap="square" rtlCol="0" anchor="ctr">
-            <a:noAutofit/>
-          </a:bodyPr>
-          <a:lstStyle/>
-          <a:p>
-            <a:pPr algn="ctr"/>
-            <a:r>
-              <a:rPr lang="en-GB" sz="900" b="1" dirty="0">
-                <a:latin typeface="Arial" panose="020B0604020202020204" pitchFamily="34" charset="0"/>
-                <a:cs typeface="Arial" panose="020B0604020202020204" pitchFamily="34" charset="0"/>
-              </a:rPr>
-              <a:t>Dates</a:t>
-            </a:r>
-            <a:r>
-              <a:rPr lang="en-GB" sz="900" dirty="0">
-                <a:latin typeface="Arial" panose="020B0604020202020204" pitchFamily="34" charset="0"/>
-                <a:cs typeface="Arial" panose="020B0604020202020204" pitchFamily="34" charset="0"/>
-              </a:rPr>
-              <a:t>: sampled from available sources in the Open Tree database</a:t>
-            </a:r>
-          </a:p>
-        </p:txBody>
-      </p:sp>
-      <p:sp>
-        <p:nvSpPr>
-          <p:cNvPr id="4" name="TextBox 3">
-            <a:extLst>
-              <a:ext uri="{FF2B5EF4-FFF2-40B4-BE49-F238E27FC236}">
-                <a16:creationId xmlns:a16="http://schemas.microsoft.com/office/drawing/2014/main" id="{F045268C-B16E-5842-05FE-DFF9A380260F}"/>
-              </a:ext>
-            </a:extLst>
-          </p:cNvPr>
-          <p:cNvSpPr txBox="1"/>
-          <p:nvPr/>
-        </p:nvSpPr>
-        <p:spPr>
-          <a:xfrm>
-            <a:off x="2293562" y="90280"/>
-            <a:ext cx="1620000" cy="612000"/>
-          </a:xfrm>
-          <a:prstGeom prst="rect">
-            <a:avLst/>
-          </a:prstGeom>
-          <a:solidFill>
-            <a:schemeClr val="accent3">
-              <a:lumMod val="20000"/>
-              <a:lumOff val="80000"/>
-            </a:schemeClr>
-          </a:solidFill>
-          <a:ln>
-            <a:solidFill>
-              <a:schemeClr val="tx1"/>
-            </a:solidFill>
-          </a:ln>
-          <a:effectLst/>
-        </p:spPr>
-        <p:txBody>
-          <a:bodyPr wrap="square" rtlCol="0" anchor="ctr">
-            <a:noAutofit/>
-          </a:bodyPr>
-          <a:lstStyle/>
-          <a:p>
-            <a:pPr algn="ctr"/>
-            <a:r>
-              <a:rPr lang="en-GB" sz="900" b="1" dirty="0">
-                <a:latin typeface="Arial" panose="020B0604020202020204" pitchFamily="34" charset="0"/>
-                <a:cs typeface="Arial" panose="020B0604020202020204" pitchFamily="34" charset="0"/>
-              </a:rPr>
-              <a:t>Open </a:t>
-            </a:r>
-            <a:r>
-              <a:rPr lang="en-GB" sz="900" b="1" dirty="0" err="1">
-                <a:latin typeface="Arial" panose="020B0604020202020204" pitchFamily="34" charset="0"/>
-                <a:cs typeface="Arial" panose="020B0604020202020204" pitchFamily="34" charset="0"/>
-              </a:rPr>
-              <a:t>TreeTaxonomy</a:t>
-            </a:r>
-            <a:r>
-              <a:rPr lang="en-GB" sz="900" b="1" dirty="0">
-                <a:latin typeface="Arial" panose="020B0604020202020204" pitchFamily="34" charset="0"/>
-                <a:cs typeface="Arial" panose="020B0604020202020204" pitchFamily="34" charset="0"/>
-              </a:rPr>
-              <a:t> 3.7.3:</a:t>
-            </a:r>
-            <a:r>
-              <a:rPr lang="en-GB" sz="900" dirty="0">
-                <a:latin typeface="Arial" panose="020B0604020202020204" pitchFamily="34" charset="0"/>
-                <a:cs typeface="Arial" panose="020B0604020202020204" pitchFamily="34" charset="0"/>
-              </a:rPr>
-              <a:t> taxonomic ranks,</a:t>
-            </a:r>
-          </a:p>
-          <a:p>
-            <a:pPr algn="ctr"/>
-            <a:r>
-              <a:rPr lang="en-GB" sz="900" dirty="0">
-                <a:latin typeface="Arial" panose="020B0604020202020204" pitchFamily="34" charset="0"/>
-                <a:cs typeface="Arial" panose="020B0604020202020204" pitchFamily="34" charset="0"/>
-              </a:rPr>
-              <a:t>“extinct” flags</a:t>
-            </a:r>
-          </a:p>
-        </p:txBody>
-      </p:sp>
-      <p:sp>
-        <p:nvSpPr>
-          <p:cNvPr id="5" name="TextBox 4">
-            <a:extLst>
-              <a:ext uri="{FF2B5EF4-FFF2-40B4-BE49-F238E27FC236}">
-                <a16:creationId xmlns:a16="http://schemas.microsoft.com/office/drawing/2014/main" id="{669CF81F-10BC-61A3-B5AC-4A2C8B97692E}"/>
-              </a:ext>
-            </a:extLst>
-          </p:cNvPr>
-          <p:cNvSpPr txBox="1"/>
-          <p:nvPr/>
-        </p:nvSpPr>
-        <p:spPr>
-          <a:xfrm>
-            <a:off x="363202" y="90280"/>
-            <a:ext cx="1620000" cy="612000"/>
-          </a:xfrm>
-          <a:prstGeom prst="rect">
-            <a:avLst/>
-          </a:prstGeom>
-          <a:solidFill>
-            <a:schemeClr val="accent3">
-              <a:lumMod val="20000"/>
-              <a:lumOff val="80000"/>
-            </a:schemeClr>
-          </a:solidFill>
-          <a:ln>
-            <a:solidFill>
-              <a:schemeClr val="tx1"/>
-            </a:solidFill>
-          </a:ln>
-          <a:effectLst/>
-        </p:spPr>
-        <p:txBody>
-          <a:bodyPr wrap="square" rtlCol="0" anchor="ctr">
-            <a:noAutofit/>
-          </a:bodyPr>
-          <a:lstStyle/>
-          <a:p>
-            <a:pPr algn="ctr"/>
-            <a:r>
-              <a:rPr lang="en-GB" sz="900" b="1" dirty="0">
-                <a:latin typeface="Arial" panose="020B0604020202020204" pitchFamily="34" charset="0"/>
-                <a:cs typeface="Arial" panose="020B0604020202020204" pitchFamily="34" charset="0"/>
-              </a:rPr>
-              <a:t>Open Tree of Life 16.1</a:t>
-            </a:r>
-            <a:r>
-              <a:rPr lang="en-GB" sz="900" dirty="0">
-                <a:latin typeface="Arial" panose="020B0604020202020204" pitchFamily="34" charset="0"/>
-                <a:cs typeface="Arial" panose="020B0604020202020204" pitchFamily="34" charset="0"/>
-              </a:rPr>
-              <a:t>:</a:t>
-            </a:r>
-            <a:r>
-              <a:rPr lang="en-GB" sz="900" b="1" dirty="0">
-                <a:latin typeface="Arial" panose="020B0604020202020204" pitchFamily="34" charset="0"/>
-                <a:cs typeface="Arial" panose="020B0604020202020204" pitchFamily="34" charset="0"/>
-              </a:rPr>
-              <a:t> </a:t>
-            </a:r>
-            <a:r>
-              <a:rPr lang="en-GB" sz="900" dirty="0" err="1">
-                <a:latin typeface="Arial" panose="020B0604020202020204" pitchFamily="34" charset="0"/>
-                <a:cs typeface="Arial" panose="020B0604020202020204" pitchFamily="34" charset="0"/>
-              </a:rPr>
-              <a:t>supertree</a:t>
-            </a:r>
-            <a:r>
-              <a:rPr lang="en-GB" sz="900" dirty="0">
-                <a:latin typeface="Arial" panose="020B0604020202020204" pitchFamily="34" charset="0"/>
-                <a:cs typeface="Arial" panose="020B0604020202020204" pitchFamily="34" charset="0"/>
-              </a:rPr>
-              <a:t> with accompanying annotations</a:t>
-            </a:r>
-          </a:p>
-        </p:txBody>
-      </p:sp>
-      <p:sp>
-        <p:nvSpPr>
-          <p:cNvPr id="6" name="TextBox 5">
-            <a:extLst>
-              <a:ext uri="{FF2B5EF4-FFF2-40B4-BE49-F238E27FC236}">
-                <a16:creationId xmlns:a16="http://schemas.microsoft.com/office/drawing/2014/main" id="{B8AD3EC3-F2C5-3DA2-D045-735822DB6CA8}"/>
-              </a:ext>
-            </a:extLst>
-          </p:cNvPr>
-          <p:cNvSpPr txBox="1"/>
-          <p:nvPr/>
-        </p:nvSpPr>
-        <p:spPr>
-          <a:xfrm>
-            <a:off x="363202" y="1028965"/>
-            <a:ext cx="1620000" cy="612000"/>
-          </a:xfrm>
-          <a:prstGeom prst="rect">
-            <a:avLst/>
-          </a:prstGeom>
-          <a:solidFill>
-            <a:srgbClr val="9FD6EB"/>
-          </a:solidFill>
-          <a:ln>
-            <a:solidFill>
-              <a:schemeClr val="tx1"/>
-            </a:solidFill>
-          </a:ln>
-          <a:effectLst/>
-        </p:spPr>
-        <p:txBody>
-          <a:bodyPr wrap="square" rtlCol="0" anchor="ctr">
-            <a:noAutofit/>
-          </a:bodyPr>
-          <a:lstStyle/>
-          <a:p>
-            <a:pPr algn="ctr"/>
-            <a:r>
-              <a:rPr lang="en-GB" sz="900" b="1" dirty="0">
-                <a:latin typeface="Arial" panose="020B0604020202020204" pitchFamily="34" charset="0"/>
-                <a:cs typeface="Arial" panose="020B0604020202020204" pitchFamily="34" charset="0"/>
-              </a:rPr>
-              <a:t>Open Tree of Life with added metadata</a:t>
-            </a:r>
-            <a:endParaRPr lang="en-GB" sz="900" dirty="0">
-              <a:latin typeface="Arial" panose="020B0604020202020204" pitchFamily="34" charset="0"/>
-              <a:cs typeface="Arial" panose="020B0604020202020204" pitchFamily="34" charset="0"/>
-            </a:endParaRPr>
-          </a:p>
-        </p:txBody>
-      </p:sp>
-      <p:sp>
-        <p:nvSpPr>
-          <p:cNvPr id="7" name="TextBox 6">
-            <a:extLst>
-              <a:ext uri="{FF2B5EF4-FFF2-40B4-BE49-F238E27FC236}">
-                <a16:creationId xmlns:a16="http://schemas.microsoft.com/office/drawing/2014/main" id="{48E728CE-393D-5264-73E2-C00444CB858B}"/>
-              </a:ext>
-            </a:extLst>
-          </p:cNvPr>
-          <p:cNvSpPr txBox="1"/>
-          <p:nvPr/>
-        </p:nvSpPr>
-        <p:spPr>
-          <a:xfrm>
-            <a:off x="4235086" y="2082973"/>
-            <a:ext cx="1620000" cy="612000"/>
-          </a:xfrm>
-          <a:prstGeom prst="rect">
-            <a:avLst/>
-          </a:prstGeom>
-          <a:solidFill>
-            <a:schemeClr val="bg1"/>
-          </a:solidFill>
-          <a:ln>
-            <a:solidFill>
-              <a:schemeClr val="tx1"/>
-            </a:solidFill>
-            <a:prstDash val="solid"/>
-          </a:ln>
-          <a:effectLst/>
-        </p:spPr>
-        <p:txBody>
-          <a:bodyPr wrap="square" rtlCol="0" anchor="ctr">
-            <a:noAutofit/>
-          </a:bodyPr>
-          <a:lstStyle/>
-          <a:p>
-            <a:pPr algn="ctr"/>
-            <a:r>
-              <a:rPr lang="en-GB" sz="900" dirty="0">
-                <a:latin typeface="Arial" panose="020B0604020202020204" pitchFamily="34" charset="0"/>
-                <a:cs typeface="Arial" panose="020B0604020202020204" pitchFamily="34" charset="0"/>
-              </a:rPr>
-              <a:t>Stochastic placement of clades into phylogenetic backbone</a:t>
-            </a:r>
-          </a:p>
-        </p:txBody>
-      </p:sp>
-      <p:sp>
-        <p:nvSpPr>
-          <p:cNvPr id="8" name="TextBox 7">
-            <a:extLst>
-              <a:ext uri="{FF2B5EF4-FFF2-40B4-BE49-F238E27FC236}">
-                <a16:creationId xmlns:a16="http://schemas.microsoft.com/office/drawing/2014/main" id="{9C08134D-AEDB-E01E-EC7F-550E31F31194}"/>
-              </a:ext>
-            </a:extLst>
-          </p:cNvPr>
-          <p:cNvSpPr txBox="1"/>
-          <p:nvPr/>
-        </p:nvSpPr>
-        <p:spPr>
-          <a:xfrm>
-            <a:off x="4235086" y="1028965"/>
-            <a:ext cx="1620000" cy="612000"/>
-          </a:xfrm>
-          <a:prstGeom prst="rect">
-            <a:avLst/>
-          </a:prstGeom>
-          <a:solidFill>
-            <a:schemeClr val="bg1"/>
-          </a:solidFill>
-          <a:ln>
-            <a:solidFill>
-              <a:schemeClr val="tx1"/>
-            </a:solidFill>
-            <a:prstDash val="solid"/>
-          </a:ln>
-          <a:effectLst/>
-        </p:spPr>
-        <p:txBody>
-          <a:bodyPr wrap="square" rtlCol="0" anchor="ctr">
-            <a:noAutofit/>
-          </a:bodyPr>
-          <a:lstStyle/>
-          <a:p>
-            <a:pPr algn="ctr"/>
-            <a:r>
-              <a:rPr lang="en-GB" sz="900" dirty="0">
-                <a:latin typeface="Arial" panose="020B0604020202020204" pitchFamily="34" charset="0"/>
-                <a:cs typeface="Arial" panose="020B0604020202020204" pitchFamily="34" charset="0"/>
-              </a:rPr>
-              <a:t>Identify clades in the tree that have no phylogenetic information</a:t>
-            </a:r>
-          </a:p>
-        </p:txBody>
-      </p:sp>
-      <p:sp>
-        <p:nvSpPr>
-          <p:cNvPr id="9" name="TextBox 8">
-            <a:extLst>
-              <a:ext uri="{FF2B5EF4-FFF2-40B4-BE49-F238E27FC236}">
-                <a16:creationId xmlns:a16="http://schemas.microsoft.com/office/drawing/2014/main" id="{935E1A13-7F1A-5A07-7D3F-5001F511C956}"/>
-              </a:ext>
-            </a:extLst>
-          </p:cNvPr>
-          <p:cNvSpPr txBox="1"/>
-          <p:nvPr/>
-        </p:nvSpPr>
-        <p:spPr>
-          <a:xfrm>
-            <a:off x="363202" y="3029432"/>
-            <a:ext cx="1620000" cy="612000"/>
-          </a:xfrm>
-          <a:prstGeom prst="rect">
-            <a:avLst/>
-          </a:prstGeom>
-          <a:solidFill>
-            <a:srgbClr val="9FD4EB"/>
-          </a:solidFill>
-          <a:ln>
-            <a:solidFill>
-              <a:schemeClr val="tx1"/>
-            </a:solidFill>
-          </a:ln>
-          <a:effectLst/>
-        </p:spPr>
-        <p:txBody>
-          <a:bodyPr wrap="square" rtlCol="0" anchor="ctr">
-            <a:noAutofit/>
-          </a:bodyPr>
-          <a:lstStyle/>
-          <a:p>
-            <a:pPr algn="ctr"/>
-            <a:r>
-              <a:rPr lang="en-GB" sz="900" b="1" dirty="0">
-                <a:latin typeface="Arial" panose="020B0604020202020204" pitchFamily="34" charset="0"/>
-                <a:cs typeface="Arial" panose="020B0604020202020204" pitchFamily="34" charset="0"/>
-              </a:rPr>
-              <a:t>Bifurcating,</a:t>
-            </a:r>
-          </a:p>
-          <a:p>
-            <a:pPr algn="ctr"/>
-            <a:r>
-              <a:rPr lang="en-GB" sz="900" b="1" dirty="0">
-                <a:latin typeface="Arial" panose="020B0604020202020204" pitchFamily="34" charset="0"/>
-                <a:cs typeface="Arial" panose="020B0604020202020204" pitchFamily="34" charset="0"/>
-              </a:rPr>
-              <a:t>partially-dated tree</a:t>
-            </a:r>
-            <a:endParaRPr lang="en-GB" sz="900" dirty="0">
-              <a:latin typeface="Arial" panose="020B0604020202020204" pitchFamily="34" charset="0"/>
-              <a:cs typeface="Arial" panose="020B0604020202020204" pitchFamily="34" charset="0"/>
-            </a:endParaRPr>
-          </a:p>
-        </p:txBody>
-      </p:sp>
-      <p:sp>
-        <p:nvSpPr>
-          <p:cNvPr id="10" name="TextBox 9">
-            <a:extLst>
-              <a:ext uri="{FF2B5EF4-FFF2-40B4-BE49-F238E27FC236}">
-                <a16:creationId xmlns:a16="http://schemas.microsoft.com/office/drawing/2014/main" id="{B5C64F8B-E1D1-EE40-FA12-AD9CFCAF5CB9}"/>
-              </a:ext>
-            </a:extLst>
-          </p:cNvPr>
-          <p:cNvSpPr txBox="1"/>
-          <p:nvPr/>
-        </p:nvSpPr>
-        <p:spPr>
-          <a:xfrm>
-            <a:off x="2301424" y="3029432"/>
-            <a:ext cx="1620000" cy="612000"/>
-          </a:xfrm>
-          <a:prstGeom prst="rect">
-            <a:avLst/>
-          </a:prstGeom>
-          <a:solidFill>
-            <a:schemeClr val="bg1"/>
-          </a:solidFill>
-          <a:ln>
-            <a:solidFill>
-              <a:schemeClr val="tx1"/>
-            </a:solidFill>
-            <a:prstDash val="solid"/>
-          </a:ln>
-          <a:effectLst/>
-        </p:spPr>
-        <p:txBody>
-          <a:bodyPr wrap="square" rtlCol="0" anchor="ctr">
-            <a:noAutofit/>
-          </a:bodyPr>
-          <a:lstStyle/>
-          <a:p>
-            <a:pPr algn="ctr"/>
-            <a:r>
-              <a:rPr lang="en-GB" sz="900" dirty="0">
-                <a:latin typeface="Arial" panose="020B0604020202020204" pitchFamily="34" charset="0"/>
-                <a:cs typeface="Arial" panose="020B0604020202020204" pitchFamily="34" charset="0"/>
-              </a:rPr>
-              <a:t>Remove inconsistent input dates then interpolate all missing dates</a:t>
-            </a:r>
-          </a:p>
-        </p:txBody>
-      </p:sp>
-      <p:sp>
-        <p:nvSpPr>
-          <p:cNvPr id="12" name="TextBox 11">
-            <a:extLst>
-              <a:ext uri="{FF2B5EF4-FFF2-40B4-BE49-F238E27FC236}">
-                <a16:creationId xmlns:a16="http://schemas.microsoft.com/office/drawing/2014/main" id="{2C5AEF97-6104-7E55-CFCF-4FFE3DDAA43A}"/>
-              </a:ext>
-            </a:extLst>
-          </p:cNvPr>
-          <p:cNvSpPr txBox="1"/>
-          <p:nvPr/>
-        </p:nvSpPr>
-        <p:spPr>
-          <a:xfrm>
-            <a:off x="4235086" y="3029432"/>
-            <a:ext cx="1620000" cy="612000"/>
-          </a:xfrm>
-          <a:prstGeom prst="rect">
-            <a:avLst/>
-          </a:prstGeom>
-          <a:solidFill>
-            <a:srgbClr val="9FD5EB"/>
-          </a:solidFill>
-          <a:ln w="25400" cmpd="dbl">
-            <a:solidFill>
-              <a:schemeClr val="tx1"/>
-            </a:solidFill>
-          </a:ln>
-          <a:effectLst/>
-        </p:spPr>
-        <p:txBody>
-          <a:bodyPr wrap="square" rtlCol="0" anchor="ctr">
-            <a:noAutofit/>
-          </a:bodyPr>
-          <a:lstStyle/>
-          <a:p>
-            <a:pPr algn="ctr"/>
-            <a:r>
-              <a:rPr lang="en-GB" sz="900" b="1" dirty="0">
-                <a:latin typeface="Arial" panose="020B0604020202020204" pitchFamily="34" charset="0"/>
-                <a:cs typeface="Arial" panose="020B0604020202020204" pitchFamily="34" charset="0"/>
-              </a:rPr>
-              <a:t>Bifurcating,</a:t>
-            </a:r>
-          </a:p>
-          <a:p>
-            <a:pPr algn="ctr"/>
-            <a:r>
-              <a:rPr lang="en-GB" sz="900" b="1" dirty="0">
-                <a:latin typeface="Arial" panose="020B0604020202020204" pitchFamily="34" charset="0"/>
-                <a:cs typeface="Arial" panose="020B0604020202020204" pitchFamily="34" charset="0"/>
-              </a:rPr>
-              <a:t>fully-dated tree</a:t>
-            </a:r>
-            <a:endParaRPr lang="en-GB" sz="900" dirty="0">
-              <a:latin typeface="Arial" panose="020B0604020202020204" pitchFamily="34" charset="0"/>
-              <a:cs typeface="Arial" panose="020B0604020202020204" pitchFamily="34" charset="0"/>
-            </a:endParaRPr>
-          </a:p>
-        </p:txBody>
-      </p:sp>
-      <p:sp>
-        <p:nvSpPr>
-          <p:cNvPr id="13" name="TextBox 12">
-            <a:extLst>
-              <a:ext uri="{FF2B5EF4-FFF2-40B4-BE49-F238E27FC236}">
-                <a16:creationId xmlns:a16="http://schemas.microsoft.com/office/drawing/2014/main" id="{796184DE-2651-E333-68D5-99E330A524A7}"/>
-              </a:ext>
-            </a:extLst>
-          </p:cNvPr>
-          <p:cNvSpPr txBox="1"/>
-          <p:nvPr/>
-        </p:nvSpPr>
-        <p:spPr>
-          <a:xfrm>
-            <a:off x="2298008" y="1028965"/>
-            <a:ext cx="1620000" cy="612000"/>
-          </a:xfrm>
-          <a:prstGeom prst="rect">
-            <a:avLst/>
-          </a:prstGeom>
-          <a:solidFill>
-            <a:schemeClr val="bg1"/>
-          </a:solidFill>
-          <a:ln>
-            <a:solidFill>
-              <a:schemeClr val="tx1"/>
-            </a:solidFill>
-            <a:prstDash val="solid"/>
-          </a:ln>
-          <a:effectLst/>
-        </p:spPr>
-        <p:txBody>
-          <a:bodyPr wrap="square" rtlCol="0" anchor="ctr">
-            <a:noAutofit/>
-          </a:bodyPr>
-          <a:lstStyle/>
-          <a:p>
-            <a:pPr algn="ctr"/>
-            <a:r>
-              <a:rPr lang="en-GB" sz="900" dirty="0">
-                <a:latin typeface="Arial" panose="020B0604020202020204" pitchFamily="34" charset="0"/>
-                <a:cs typeface="Arial" panose="020B0604020202020204" pitchFamily="34" charset="0"/>
-              </a:rPr>
-              <a:t>Prune subspecies and extinct species</a:t>
-            </a:r>
-          </a:p>
-        </p:txBody>
-      </p:sp>
-      <p:cxnSp>
-        <p:nvCxnSpPr>
-          <p:cNvPr id="16" name="Straight Arrow Connector 15">
-            <a:extLst>
-              <a:ext uri="{FF2B5EF4-FFF2-40B4-BE49-F238E27FC236}">
-                <a16:creationId xmlns:a16="http://schemas.microsoft.com/office/drawing/2014/main" id="{DE3D1AA5-940E-176D-2CA3-B3EB1EED4A06}"/>
-              </a:ext>
-            </a:extLst>
-          </p:cNvPr>
-          <p:cNvCxnSpPr>
-            <a:cxnSpLocks/>
-          </p:cNvCxnSpPr>
-          <p:nvPr/>
-        </p:nvCxnSpPr>
-        <p:spPr>
-          <a:xfrm>
-            <a:off x="1173600" y="705600"/>
-            <a:ext cx="0" cy="324000"/>
-          </a:xfrm>
-          <a:prstGeom prst="straightConnector1">
-            <a:avLst/>
-          </a:prstGeom>
-          <a:ln w="19050">
-            <a:solidFill>
-              <a:schemeClr val="tx1">
-                <a:lumMod val="65000"/>
-                <a:lumOff val="35000"/>
-              </a:schemeClr>
-            </a:solidFill>
-            <a:tailEnd type="triangle" w="lg" len="med"/>
-          </a:ln>
-          <a:effectLst/>
         </p:spPr>
         <p:style>
           <a:lnRef idx="2">
@@ -4051,10 +5441,10 @@
       </p:cxnSp>
       <p:cxnSp>
         <p:nvCxnSpPr>
-          <p:cNvPr id="24" name="Straight Arrow Connector 23">
-            <a:extLst>
-              <a:ext uri="{FF2B5EF4-FFF2-40B4-BE49-F238E27FC236}">
-                <a16:creationId xmlns:a16="http://schemas.microsoft.com/office/drawing/2014/main" id="{2485D323-979E-15CC-DE5C-58B5A694DFDB}"/>
+          <p:cNvPr id="73" name="Straight Arrow Connector 72">
+            <a:extLst>
+              <a:ext uri="{FF2B5EF4-FFF2-40B4-BE49-F238E27FC236}">
+                <a16:creationId xmlns:a16="http://schemas.microsoft.com/office/drawing/2014/main" id="{5F25895B-DE6F-1D46-E521-C411085E71B2}"/>
               </a:ext>
             </a:extLst>
           </p:cNvPr>
@@ -4065,731 +5455,18 @@
         </p:nvCxnSpPr>
         <p:spPr>
           <a:xfrm flipV="1">
-            <a:off x="1987200" y="1342165"/>
-            <a:ext cx="313200" cy="0"/>
+            <a:off x="2518102" y="756801"/>
+            <a:ext cx="581774" cy="125999"/>
           </a:xfrm>
           <a:prstGeom prst="straightConnector1">
             <a:avLst/>
           </a:prstGeom>
-          <a:ln w="19050">
-            <a:solidFill>
-              <a:schemeClr val="tx1">
-                <a:lumMod val="65000"/>
-                <a:lumOff val="35000"/>
-              </a:schemeClr>
-            </a:solidFill>
-            <a:tailEnd type="triangle" w="lg" len="med"/>
-          </a:ln>
-          <a:effectLst/>
-        </p:spPr>
-        <p:style>
-          <a:lnRef idx="2">
-            <a:schemeClr val="accent1"/>
-          </a:lnRef>
-          <a:fillRef idx="0">
-            <a:schemeClr val="accent1"/>
-          </a:fillRef>
-          <a:effectRef idx="1">
-            <a:schemeClr val="accent1"/>
-          </a:effectRef>
-          <a:fontRef idx="minor">
-            <a:schemeClr val="tx1"/>
-          </a:fontRef>
-        </p:style>
-      </p:cxnSp>
-      <p:sp>
-        <p:nvSpPr>
-          <p:cNvPr id="37" name="Alternative Process 36">
-            <a:extLst>
-              <a:ext uri="{FF2B5EF4-FFF2-40B4-BE49-F238E27FC236}">
-                <a16:creationId xmlns:a16="http://schemas.microsoft.com/office/drawing/2014/main" id="{5BBF4B9E-2C8A-F99B-1725-EE05055A4DC6}"/>
-              </a:ext>
-            </a:extLst>
-          </p:cNvPr>
-          <p:cNvSpPr/>
-          <p:nvPr/>
-        </p:nvSpPr>
-        <p:spPr>
-          <a:xfrm>
-            <a:off x="79567" y="1856745"/>
-            <a:ext cx="6032808" cy="2412000"/>
-          </a:xfrm>
-          <a:custGeom>
-            <a:avLst/>
-            <a:gdLst>
-              <a:gd name="connsiteX0" fmla="*/ 0 w 6120000"/>
-              <a:gd name="connsiteY0" fmla="*/ 527236 h 3163417"/>
-              <a:gd name="connsiteX1" fmla="*/ 527236 w 6120000"/>
-              <a:gd name="connsiteY1" fmla="*/ 0 h 3163417"/>
-              <a:gd name="connsiteX2" fmla="*/ 5592764 w 6120000"/>
-              <a:gd name="connsiteY2" fmla="*/ 0 h 3163417"/>
-              <a:gd name="connsiteX3" fmla="*/ 6120000 w 6120000"/>
-              <a:gd name="connsiteY3" fmla="*/ 527236 h 3163417"/>
-              <a:gd name="connsiteX4" fmla="*/ 6120000 w 6120000"/>
-              <a:gd name="connsiteY4" fmla="*/ 2636181 h 3163417"/>
-              <a:gd name="connsiteX5" fmla="*/ 5592764 w 6120000"/>
-              <a:gd name="connsiteY5" fmla="*/ 3163417 h 3163417"/>
-              <a:gd name="connsiteX6" fmla="*/ 527236 w 6120000"/>
-              <a:gd name="connsiteY6" fmla="*/ 3163417 h 3163417"/>
-              <a:gd name="connsiteX7" fmla="*/ 0 w 6120000"/>
-              <a:gd name="connsiteY7" fmla="*/ 2636181 h 3163417"/>
-              <a:gd name="connsiteX8" fmla="*/ 0 w 6120000"/>
-              <a:gd name="connsiteY8" fmla="*/ 527236 h 3163417"/>
-              <a:gd name="connsiteX0" fmla="*/ 0 w 6120000"/>
-              <a:gd name="connsiteY0" fmla="*/ 258481 h 3164627"/>
-              <a:gd name="connsiteX1" fmla="*/ 527236 w 6120000"/>
-              <a:gd name="connsiteY1" fmla="*/ 1210 h 3164627"/>
-              <a:gd name="connsiteX2" fmla="*/ 5592764 w 6120000"/>
-              <a:gd name="connsiteY2" fmla="*/ 1210 h 3164627"/>
-              <a:gd name="connsiteX3" fmla="*/ 6120000 w 6120000"/>
-              <a:gd name="connsiteY3" fmla="*/ 528446 h 3164627"/>
-              <a:gd name="connsiteX4" fmla="*/ 6120000 w 6120000"/>
-              <a:gd name="connsiteY4" fmla="*/ 2637391 h 3164627"/>
-              <a:gd name="connsiteX5" fmla="*/ 5592764 w 6120000"/>
-              <a:gd name="connsiteY5" fmla="*/ 3164627 h 3164627"/>
-              <a:gd name="connsiteX6" fmla="*/ 527236 w 6120000"/>
-              <a:gd name="connsiteY6" fmla="*/ 3164627 h 3164627"/>
-              <a:gd name="connsiteX7" fmla="*/ 0 w 6120000"/>
-              <a:gd name="connsiteY7" fmla="*/ 2637391 h 3164627"/>
-              <a:gd name="connsiteX8" fmla="*/ 0 w 6120000"/>
-              <a:gd name="connsiteY8" fmla="*/ 258481 h 3164627"/>
-              <a:gd name="connsiteX0" fmla="*/ 0 w 6120000"/>
-              <a:gd name="connsiteY0" fmla="*/ 258481 h 3164627"/>
-              <a:gd name="connsiteX1" fmla="*/ 292105 w 6120000"/>
-              <a:gd name="connsiteY1" fmla="*/ 1210 h 3164627"/>
-              <a:gd name="connsiteX2" fmla="*/ 5592764 w 6120000"/>
-              <a:gd name="connsiteY2" fmla="*/ 1210 h 3164627"/>
-              <a:gd name="connsiteX3" fmla="*/ 6120000 w 6120000"/>
-              <a:gd name="connsiteY3" fmla="*/ 528446 h 3164627"/>
-              <a:gd name="connsiteX4" fmla="*/ 6120000 w 6120000"/>
-              <a:gd name="connsiteY4" fmla="*/ 2637391 h 3164627"/>
-              <a:gd name="connsiteX5" fmla="*/ 5592764 w 6120000"/>
-              <a:gd name="connsiteY5" fmla="*/ 3164627 h 3164627"/>
-              <a:gd name="connsiteX6" fmla="*/ 527236 w 6120000"/>
-              <a:gd name="connsiteY6" fmla="*/ 3164627 h 3164627"/>
-              <a:gd name="connsiteX7" fmla="*/ 0 w 6120000"/>
-              <a:gd name="connsiteY7" fmla="*/ 2637391 h 3164627"/>
-              <a:gd name="connsiteX8" fmla="*/ 0 w 6120000"/>
-              <a:gd name="connsiteY8" fmla="*/ 258481 h 3164627"/>
-              <a:gd name="connsiteX0" fmla="*/ 0 w 6120000"/>
-              <a:gd name="connsiteY0" fmla="*/ 258481 h 3164627"/>
-              <a:gd name="connsiteX1" fmla="*/ 292105 w 6120000"/>
-              <a:gd name="connsiteY1" fmla="*/ 1210 h 3164627"/>
-              <a:gd name="connsiteX2" fmla="*/ 5810479 w 6120000"/>
-              <a:gd name="connsiteY2" fmla="*/ 1210 h 3164627"/>
-              <a:gd name="connsiteX3" fmla="*/ 6120000 w 6120000"/>
-              <a:gd name="connsiteY3" fmla="*/ 528446 h 3164627"/>
-              <a:gd name="connsiteX4" fmla="*/ 6120000 w 6120000"/>
-              <a:gd name="connsiteY4" fmla="*/ 2637391 h 3164627"/>
-              <a:gd name="connsiteX5" fmla="*/ 5592764 w 6120000"/>
-              <a:gd name="connsiteY5" fmla="*/ 3164627 h 3164627"/>
-              <a:gd name="connsiteX6" fmla="*/ 527236 w 6120000"/>
-              <a:gd name="connsiteY6" fmla="*/ 3164627 h 3164627"/>
-              <a:gd name="connsiteX7" fmla="*/ 0 w 6120000"/>
-              <a:gd name="connsiteY7" fmla="*/ 2637391 h 3164627"/>
-              <a:gd name="connsiteX8" fmla="*/ 0 w 6120000"/>
-              <a:gd name="connsiteY8" fmla="*/ 258481 h 3164627"/>
-              <a:gd name="connsiteX0" fmla="*/ 0 w 6120000"/>
-              <a:gd name="connsiteY0" fmla="*/ 258481 h 3164627"/>
-              <a:gd name="connsiteX1" fmla="*/ 292105 w 6120000"/>
-              <a:gd name="connsiteY1" fmla="*/ 1210 h 3164627"/>
-              <a:gd name="connsiteX2" fmla="*/ 5810479 w 6120000"/>
-              <a:gd name="connsiteY2" fmla="*/ 1210 h 3164627"/>
-              <a:gd name="connsiteX3" fmla="*/ 6120000 w 6120000"/>
-              <a:gd name="connsiteY3" fmla="*/ 302023 h 3164627"/>
-              <a:gd name="connsiteX4" fmla="*/ 6120000 w 6120000"/>
-              <a:gd name="connsiteY4" fmla="*/ 2637391 h 3164627"/>
-              <a:gd name="connsiteX5" fmla="*/ 5592764 w 6120000"/>
-              <a:gd name="connsiteY5" fmla="*/ 3164627 h 3164627"/>
-              <a:gd name="connsiteX6" fmla="*/ 527236 w 6120000"/>
-              <a:gd name="connsiteY6" fmla="*/ 3164627 h 3164627"/>
-              <a:gd name="connsiteX7" fmla="*/ 0 w 6120000"/>
-              <a:gd name="connsiteY7" fmla="*/ 2637391 h 3164627"/>
-              <a:gd name="connsiteX8" fmla="*/ 0 w 6120000"/>
-              <a:gd name="connsiteY8" fmla="*/ 258481 h 3164627"/>
-              <a:gd name="connsiteX0" fmla="*/ 0 w 6120000"/>
-              <a:gd name="connsiteY0" fmla="*/ 258481 h 3164627"/>
-              <a:gd name="connsiteX1" fmla="*/ 292105 w 6120000"/>
-              <a:gd name="connsiteY1" fmla="*/ 1210 h 3164627"/>
-              <a:gd name="connsiteX2" fmla="*/ 5810479 w 6120000"/>
-              <a:gd name="connsiteY2" fmla="*/ 1210 h 3164627"/>
-              <a:gd name="connsiteX3" fmla="*/ 6120000 w 6120000"/>
-              <a:gd name="connsiteY3" fmla="*/ 302023 h 3164627"/>
-              <a:gd name="connsiteX4" fmla="*/ 6120000 w 6120000"/>
-              <a:gd name="connsiteY4" fmla="*/ 2846397 h 3164627"/>
-              <a:gd name="connsiteX5" fmla="*/ 5592764 w 6120000"/>
-              <a:gd name="connsiteY5" fmla="*/ 3164627 h 3164627"/>
-              <a:gd name="connsiteX6" fmla="*/ 527236 w 6120000"/>
-              <a:gd name="connsiteY6" fmla="*/ 3164627 h 3164627"/>
-              <a:gd name="connsiteX7" fmla="*/ 0 w 6120000"/>
-              <a:gd name="connsiteY7" fmla="*/ 2637391 h 3164627"/>
-              <a:gd name="connsiteX8" fmla="*/ 0 w 6120000"/>
-              <a:gd name="connsiteY8" fmla="*/ 258481 h 3164627"/>
-              <a:gd name="connsiteX0" fmla="*/ 0 w 6120000"/>
-              <a:gd name="connsiteY0" fmla="*/ 258481 h 3164627"/>
-              <a:gd name="connsiteX1" fmla="*/ 292105 w 6120000"/>
-              <a:gd name="connsiteY1" fmla="*/ 1210 h 3164627"/>
-              <a:gd name="connsiteX2" fmla="*/ 5810479 w 6120000"/>
-              <a:gd name="connsiteY2" fmla="*/ 1210 h 3164627"/>
-              <a:gd name="connsiteX3" fmla="*/ 6120000 w 6120000"/>
-              <a:gd name="connsiteY3" fmla="*/ 302023 h 3164627"/>
-              <a:gd name="connsiteX4" fmla="*/ 6120000 w 6120000"/>
-              <a:gd name="connsiteY4" fmla="*/ 2846397 h 3164627"/>
-              <a:gd name="connsiteX5" fmla="*/ 5827896 w 6120000"/>
-              <a:gd name="connsiteY5" fmla="*/ 3164627 h 3164627"/>
-              <a:gd name="connsiteX6" fmla="*/ 527236 w 6120000"/>
-              <a:gd name="connsiteY6" fmla="*/ 3164627 h 3164627"/>
-              <a:gd name="connsiteX7" fmla="*/ 0 w 6120000"/>
-              <a:gd name="connsiteY7" fmla="*/ 2637391 h 3164627"/>
-              <a:gd name="connsiteX8" fmla="*/ 0 w 6120000"/>
-              <a:gd name="connsiteY8" fmla="*/ 258481 h 3164627"/>
-              <a:gd name="connsiteX0" fmla="*/ 0 w 6120000"/>
-              <a:gd name="connsiteY0" fmla="*/ 258481 h 3164627"/>
-              <a:gd name="connsiteX1" fmla="*/ 292105 w 6120000"/>
-              <a:gd name="connsiteY1" fmla="*/ 1210 h 3164627"/>
-              <a:gd name="connsiteX2" fmla="*/ 5810479 w 6120000"/>
-              <a:gd name="connsiteY2" fmla="*/ 1210 h 3164627"/>
-              <a:gd name="connsiteX3" fmla="*/ 6120000 w 6120000"/>
-              <a:gd name="connsiteY3" fmla="*/ 302023 h 3164627"/>
-              <a:gd name="connsiteX4" fmla="*/ 6120000 w 6120000"/>
-              <a:gd name="connsiteY4" fmla="*/ 2846397 h 3164627"/>
-              <a:gd name="connsiteX5" fmla="*/ 5827896 w 6120000"/>
-              <a:gd name="connsiteY5" fmla="*/ 3164627 h 3164627"/>
-              <a:gd name="connsiteX6" fmla="*/ 527236 w 6120000"/>
-              <a:gd name="connsiteY6" fmla="*/ 3164627 h 3164627"/>
-              <a:gd name="connsiteX7" fmla="*/ 8708 w 6120000"/>
-              <a:gd name="connsiteY7" fmla="*/ 2855105 h 3164627"/>
-              <a:gd name="connsiteX8" fmla="*/ 0 w 6120000"/>
-              <a:gd name="connsiteY8" fmla="*/ 258481 h 3164627"/>
-              <a:gd name="connsiteX0" fmla="*/ 0 w 6120000"/>
-              <a:gd name="connsiteY0" fmla="*/ 258481 h 3164627"/>
-              <a:gd name="connsiteX1" fmla="*/ 292105 w 6120000"/>
-              <a:gd name="connsiteY1" fmla="*/ 1210 h 3164627"/>
-              <a:gd name="connsiteX2" fmla="*/ 5810479 w 6120000"/>
-              <a:gd name="connsiteY2" fmla="*/ 1210 h 3164627"/>
-              <a:gd name="connsiteX3" fmla="*/ 6120000 w 6120000"/>
-              <a:gd name="connsiteY3" fmla="*/ 302023 h 3164627"/>
-              <a:gd name="connsiteX4" fmla="*/ 6120000 w 6120000"/>
-              <a:gd name="connsiteY4" fmla="*/ 2846397 h 3164627"/>
-              <a:gd name="connsiteX5" fmla="*/ 5827896 w 6120000"/>
-              <a:gd name="connsiteY5" fmla="*/ 3164627 h 3164627"/>
-              <a:gd name="connsiteX6" fmla="*/ 309522 w 6120000"/>
-              <a:gd name="connsiteY6" fmla="*/ 3164627 h 3164627"/>
-              <a:gd name="connsiteX7" fmla="*/ 8708 w 6120000"/>
-              <a:gd name="connsiteY7" fmla="*/ 2855105 h 3164627"/>
-              <a:gd name="connsiteX8" fmla="*/ 0 w 6120000"/>
-              <a:gd name="connsiteY8" fmla="*/ 258481 h 3164627"/>
-              <a:gd name="connsiteX0" fmla="*/ 0 w 6120000"/>
-              <a:gd name="connsiteY0" fmla="*/ 258481 h 3164627"/>
-              <a:gd name="connsiteX1" fmla="*/ 292105 w 6120000"/>
-              <a:gd name="connsiteY1" fmla="*/ 1210 h 3164627"/>
-              <a:gd name="connsiteX2" fmla="*/ 5810479 w 6120000"/>
-              <a:gd name="connsiteY2" fmla="*/ 1210 h 3164627"/>
-              <a:gd name="connsiteX3" fmla="*/ 6120000 w 6120000"/>
-              <a:gd name="connsiteY3" fmla="*/ 302023 h 3164627"/>
-              <a:gd name="connsiteX4" fmla="*/ 6120000 w 6120000"/>
-              <a:gd name="connsiteY4" fmla="*/ 2863814 h 3164627"/>
-              <a:gd name="connsiteX5" fmla="*/ 5827896 w 6120000"/>
-              <a:gd name="connsiteY5" fmla="*/ 3164627 h 3164627"/>
-              <a:gd name="connsiteX6" fmla="*/ 309522 w 6120000"/>
-              <a:gd name="connsiteY6" fmla="*/ 3164627 h 3164627"/>
-              <a:gd name="connsiteX7" fmla="*/ 8708 w 6120000"/>
-              <a:gd name="connsiteY7" fmla="*/ 2855105 h 3164627"/>
-              <a:gd name="connsiteX8" fmla="*/ 0 w 6120000"/>
-              <a:gd name="connsiteY8" fmla="*/ 258481 h 3164627"/>
-            </a:gdLst>
-            <a:ahLst/>
-            <a:cxnLst>
-              <a:cxn ang="0">
-                <a:pos x="connsiteX0" y="connsiteY0"/>
-              </a:cxn>
-              <a:cxn ang="0">
-                <a:pos x="connsiteX1" y="connsiteY1"/>
-              </a:cxn>
-              <a:cxn ang="0">
-                <a:pos x="connsiteX2" y="connsiteY2"/>
-              </a:cxn>
-              <a:cxn ang="0">
-                <a:pos x="connsiteX3" y="connsiteY3"/>
-              </a:cxn>
-              <a:cxn ang="0">
-                <a:pos x="connsiteX4" y="connsiteY4"/>
-              </a:cxn>
-              <a:cxn ang="0">
-                <a:pos x="connsiteX5" y="connsiteY5"/>
-              </a:cxn>
-              <a:cxn ang="0">
-                <a:pos x="connsiteX6" y="connsiteY6"/>
-              </a:cxn>
-              <a:cxn ang="0">
-                <a:pos x="connsiteX7" y="connsiteY7"/>
-              </a:cxn>
-              <a:cxn ang="0">
-                <a:pos x="connsiteX8" y="connsiteY8"/>
-              </a:cxn>
-            </a:cxnLst>
-            <a:rect l="l" t="t" r="r" b="b"/>
-            <a:pathLst>
-              <a:path w="6120000" h="3164627">
-                <a:moveTo>
-                  <a:pt x="0" y="258481"/>
-                </a:moveTo>
-                <a:cubicBezTo>
-                  <a:pt x="0" y="-32703"/>
-                  <a:pt x="921" y="1210"/>
-                  <a:pt x="292105" y="1210"/>
-                </a:cubicBezTo>
-                <a:lnTo>
-                  <a:pt x="5810479" y="1210"/>
-                </a:lnTo>
-                <a:cubicBezTo>
-                  <a:pt x="6101663" y="1210"/>
-                  <a:pt x="6120000" y="10839"/>
-                  <a:pt x="6120000" y="302023"/>
-                </a:cubicBezTo>
-                <a:lnTo>
-                  <a:pt x="6120000" y="2863814"/>
-                </a:lnTo>
-                <a:cubicBezTo>
-                  <a:pt x="6120000" y="3154998"/>
-                  <a:pt x="6119080" y="3164627"/>
-                  <a:pt x="5827896" y="3164627"/>
-                </a:cubicBezTo>
-                <a:lnTo>
-                  <a:pt x="309522" y="3164627"/>
-                </a:lnTo>
-                <a:cubicBezTo>
-                  <a:pt x="18338" y="3164627"/>
-                  <a:pt x="8708" y="3146289"/>
-                  <a:pt x="8708" y="2855105"/>
-                </a:cubicBezTo>
-                <a:cubicBezTo>
-                  <a:pt x="5805" y="1989564"/>
-                  <a:pt x="2903" y="1124022"/>
-                  <a:pt x="0" y="258481"/>
-                </a:cubicBezTo>
-                <a:close/>
-              </a:path>
-            </a:pathLst>
-          </a:custGeom>
-          <a:noFill/>
           <a:ln w="12700">
-            <a:solidFill>
-              <a:srgbClr val="C00000"/>
-            </a:solidFill>
-          </a:ln>
-          <a:effectLst/>
-        </p:spPr>
-        <p:style>
-          <a:lnRef idx="2">
-            <a:schemeClr val="accent1">
-              <a:shade val="15000"/>
-            </a:schemeClr>
-          </a:lnRef>
-          <a:fillRef idx="1">
-            <a:schemeClr val="accent1"/>
-          </a:fillRef>
-          <a:effectRef idx="0">
-            <a:schemeClr val="accent1"/>
-          </a:effectRef>
-          <a:fontRef idx="minor">
-            <a:schemeClr val="lt1"/>
-          </a:fontRef>
-        </p:style>
-        <p:txBody>
-          <a:bodyPr rtlCol="0" anchor="ctr"/>
-          <a:lstStyle/>
-          <a:p>
-            <a:pPr algn="ctr"/>
-            <a:endParaRPr lang="en-GB" sz="1600">
-              <a:latin typeface="Arial" panose="020B0604020202020204" pitchFamily="34" charset="0"/>
-              <a:cs typeface="Arial" panose="020B0604020202020204" pitchFamily="34" charset="0"/>
-            </a:endParaRPr>
-          </a:p>
-        </p:txBody>
-      </p:sp>
-      <p:sp>
-        <p:nvSpPr>
-          <p:cNvPr id="3" name="TextBox 2">
-            <a:extLst>
-              <a:ext uri="{FF2B5EF4-FFF2-40B4-BE49-F238E27FC236}">
-                <a16:creationId xmlns:a16="http://schemas.microsoft.com/office/drawing/2014/main" id="{6689A591-4967-EC4A-09E5-670415A39E7D}"/>
-              </a:ext>
-            </a:extLst>
-          </p:cNvPr>
-          <p:cNvSpPr txBox="1"/>
-          <p:nvPr/>
-        </p:nvSpPr>
-        <p:spPr>
-          <a:xfrm>
-            <a:off x="2293562" y="2087095"/>
-            <a:ext cx="1620000" cy="612000"/>
-          </a:xfrm>
-          <a:prstGeom prst="rect">
-            <a:avLst/>
-          </a:prstGeom>
-          <a:solidFill>
-            <a:schemeClr val="bg1"/>
-          </a:solidFill>
-          <a:ln>
             <a:solidFill>
               <a:schemeClr val="tx1"/>
             </a:solidFill>
-            <a:prstDash val="solid"/>
+            <a:tailEnd type="triangle" w="med" len="sm"/>
           </a:ln>
-          <a:effectLst/>
-        </p:spPr>
-        <p:txBody>
-          <a:bodyPr wrap="square" rtlCol="0" anchor="ctr">
-            <a:noAutofit/>
-          </a:bodyPr>
-          <a:lstStyle/>
-          <a:p>
-            <a:pPr algn="ctr"/>
-            <a:r>
-              <a:rPr lang="en-GB" sz="900" dirty="0">
-                <a:latin typeface="Arial" panose="020B0604020202020204" pitchFamily="34" charset="0"/>
-                <a:cs typeface="Arial" panose="020B0604020202020204" pitchFamily="34" charset="0"/>
-              </a:rPr>
-              <a:t>Resolve any remaining polytomies and remove nodes with only one child</a:t>
-            </a:r>
-          </a:p>
-        </p:txBody>
-      </p:sp>
-      <p:cxnSp>
-        <p:nvCxnSpPr>
-          <p:cNvPr id="25" name="Straight Arrow Connector 24">
-            <a:extLst>
-              <a:ext uri="{FF2B5EF4-FFF2-40B4-BE49-F238E27FC236}">
-                <a16:creationId xmlns:a16="http://schemas.microsoft.com/office/drawing/2014/main" id="{420CC237-A41C-9D74-F0C3-CFB9D8263B3B}"/>
-              </a:ext>
-            </a:extLst>
-          </p:cNvPr>
-          <p:cNvCxnSpPr>
-            <a:cxnSpLocks/>
-          </p:cNvCxnSpPr>
-          <p:nvPr/>
-        </p:nvCxnSpPr>
-        <p:spPr>
-          <a:xfrm flipH="1">
-            <a:off x="1983600" y="2703600"/>
-            <a:ext cx="313200" cy="324000"/>
-          </a:xfrm>
-          <a:prstGeom prst="straightConnector1">
-            <a:avLst/>
-          </a:prstGeom>
-          <a:ln w="19050">
-            <a:solidFill>
-              <a:schemeClr val="tx1">
-                <a:lumMod val="65000"/>
-                <a:lumOff val="35000"/>
-              </a:schemeClr>
-            </a:solidFill>
-            <a:tailEnd type="triangle" w="lg" len="med"/>
-          </a:ln>
-          <a:effectLst/>
-        </p:spPr>
-        <p:style>
-          <a:lnRef idx="2">
-            <a:schemeClr val="accent1"/>
-          </a:lnRef>
-          <a:fillRef idx="0">
-            <a:schemeClr val="accent1"/>
-          </a:fillRef>
-          <a:effectRef idx="1">
-            <a:schemeClr val="accent1"/>
-          </a:effectRef>
-          <a:fontRef idx="minor">
-            <a:schemeClr val="tx1"/>
-          </a:fontRef>
-        </p:style>
-      </p:cxnSp>
-      <p:grpSp>
-        <p:nvGrpSpPr>
-          <p:cNvPr id="53" name="Group 52">
-            <a:extLst>
-              <a:ext uri="{FF2B5EF4-FFF2-40B4-BE49-F238E27FC236}">
-                <a16:creationId xmlns:a16="http://schemas.microsoft.com/office/drawing/2014/main" id="{AF24AFB0-4B52-5DD5-BD72-3195AB2CDAAB}"/>
-              </a:ext>
-            </a:extLst>
-          </p:cNvPr>
-          <p:cNvGrpSpPr/>
-          <p:nvPr/>
-        </p:nvGrpSpPr>
-        <p:grpSpPr>
-          <a:xfrm>
-            <a:off x="1863056" y="3772692"/>
-            <a:ext cx="2465830" cy="369332"/>
-            <a:chOff x="1946197" y="6095465"/>
-            <a:chExt cx="2879803" cy="369332"/>
-          </a:xfrm>
-        </p:grpSpPr>
-        <p:sp>
-          <p:nvSpPr>
-            <p:cNvPr id="39" name="TextBox 38">
-              <a:extLst>
-                <a:ext uri="{FF2B5EF4-FFF2-40B4-BE49-F238E27FC236}">
-                  <a16:creationId xmlns:a16="http://schemas.microsoft.com/office/drawing/2014/main" id="{FA74C7D6-A2CE-9C23-D9EC-BCE392FCF0EC}"/>
-                </a:ext>
-              </a:extLst>
-            </p:cNvPr>
-            <p:cNvSpPr txBox="1"/>
-            <p:nvPr/>
-          </p:nvSpPr>
-          <p:spPr>
-            <a:xfrm>
-              <a:off x="2217222" y="6095465"/>
-              <a:ext cx="2608778" cy="369332"/>
-            </a:xfrm>
-            <a:prstGeom prst="rect">
-              <a:avLst/>
-            </a:prstGeom>
-            <a:noFill/>
-            <a:effectLst/>
-          </p:spPr>
-          <p:txBody>
-            <a:bodyPr wrap="square" rtlCol="0">
-              <a:spAutoFit/>
-            </a:bodyPr>
-            <a:lstStyle/>
-            <a:p>
-              <a:r>
-                <a:rPr lang="en-GB" sz="900" dirty="0">
-                  <a:solidFill>
-                    <a:srgbClr val="C00000"/>
-                  </a:solidFill>
-                  <a:latin typeface="Arial" panose="020B0604020202020204" pitchFamily="34" charset="0"/>
-                  <a:cs typeface="Arial" panose="020B0604020202020204" pitchFamily="34" charset="0"/>
-                </a:rPr>
-                <a:t>Iterate to generate </a:t>
-              </a:r>
-              <a:r>
-                <a:rPr lang="en-GB" sz="900" b="1" dirty="0">
-                  <a:solidFill>
-                    <a:srgbClr val="C00000"/>
-                  </a:solidFill>
-                  <a:latin typeface="Arial" panose="020B0604020202020204" pitchFamily="34" charset="0"/>
-                  <a:cs typeface="Arial" panose="020B0604020202020204" pitchFamily="34" charset="0"/>
-                </a:rPr>
-                <a:t>distribution</a:t>
-              </a:r>
-              <a:r>
-                <a:rPr lang="en-GB" sz="900" dirty="0">
-                  <a:solidFill>
-                    <a:srgbClr val="C00000"/>
-                  </a:solidFill>
-                  <a:latin typeface="Arial" panose="020B0604020202020204" pitchFamily="34" charset="0"/>
-                  <a:cs typeface="Arial" panose="020B0604020202020204" pitchFamily="34" charset="0"/>
-                </a:rPr>
-                <a:t> </a:t>
-              </a:r>
-              <a:r>
-                <a:rPr lang="en-GB" sz="900" b="1" dirty="0">
-                  <a:solidFill>
-                    <a:srgbClr val="C00000"/>
-                  </a:solidFill>
-                  <a:latin typeface="Arial" panose="020B0604020202020204" pitchFamily="34" charset="0"/>
-                  <a:cs typeface="Arial" panose="020B0604020202020204" pitchFamily="34" charset="0"/>
-                </a:rPr>
-                <a:t>of trees </a:t>
-              </a:r>
-              <a:br>
-                <a:rPr lang="en-GB" sz="900" b="1" dirty="0">
-                  <a:solidFill>
-                    <a:srgbClr val="C00000"/>
-                  </a:solidFill>
-                  <a:latin typeface="Arial" panose="020B0604020202020204" pitchFamily="34" charset="0"/>
-                  <a:cs typeface="Arial" panose="020B0604020202020204" pitchFamily="34" charset="0"/>
-                </a:rPr>
-              </a:br>
-              <a:r>
-                <a:rPr lang="en-GB" sz="900" dirty="0">
-                  <a:solidFill>
-                    <a:srgbClr val="C00000"/>
-                  </a:solidFill>
-                  <a:latin typeface="Arial" panose="020B0604020202020204" pitchFamily="34" charset="0"/>
-                  <a:cs typeface="Arial" panose="020B0604020202020204" pitchFamily="34" charset="0"/>
-                </a:rPr>
-                <a:t>with varying topologies and dates</a:t>
-              </a:r>
-            </a:p>
-          </p:txBody>
-        </p:sp>
-        <p:grpSp>
-          <p:nvGrpSpPr>
-            <p:cNvPr id="48" name="Group 47">
-              <a:extLst>
-                <a:ext uri="{FF2B5EF4-FFF2-40B4-BE49-F238E27FC236}">
-                  <a16:creationId xmlns:a16="http://schemas.microsoft.com/office/drawing/2014/main" id="{855B689A-A2A8-59DD-A86C-0A0FA9991CDF}"/>
-                </a:ext>
-              </a:extLst>
-            </p:cNvPr>
-            <p:cNvGrpSpPr/>
-            <p:nvPr/>
-          </p:nvGrpSpPr>
-          <p:grpSpPr>
-            <a:xfrm>
-              <a:off x="1946197" y="6170664"/>
-              <a:ext cx="271025" cy="235970"/>
-              <a:chOff x="447641" y="4096768"/>
-              <a:chExt cx="431300" cy="364779"/>
-            </a:xfrm>
-            <a:effectLst/>
-          </p:grpSpPr>
-          <p:sp>
-            <p:nvSpPr>
-              <p:cNvPr id="46" name="U-turn Arrow 45">
-                <a:extLst>
-                  <a:ext uri="{FF2B5EF4-FFF2-40B4-BE49-F238E27FC236}">
-                    <a16:creationId xmlns:a16="http://schemas.microsoft.com/office/drawing/2014/main" id="{699062B1-11D4-A620-0A51-9836561C0156}"/>
-                  </a:ext>
-                </a:extLst>
-              </p:cNvPr>
-              <p:cNvSpPr/>
-              <p:nvPr/>
-            </p:nvSpPr>
-            <p:spPr>
-              <a:xfrm>
-                <a:off x="468517" y="4096768"/>
-                <a:ext cx="410424" cy="180000"/>
-              </a:xfrm>
-              <a:prstGeom prst="uturnArrow">
-                <a:avLst/>
-              </a:prstGeom>
-              <a:solidFill>
-                <a:srgbClr val="C00000"/>
-              </a:solidFill>
-              <a:ln w="12700">
-                <a:solidFill>
-                  <a:srgbClr val="C00000"/>
-                </a:solidFill>
-              </a:ln>
-            </p:spPr>
-            <p:style>
-              <a:lnRef idx="2">
-                <a:schemeClr val="accent1">
-                  <a:shade val="15000"/>
-                </a:schemeClr>
-              </a:lnRef>
-              <a:fillRef idx="1">
-                <a:schemeClr val="accent1"/>
-              </a:fillRef>
-              <a:effectRef idx="0">
-                <a:schemeClr val="accent1"/>
-              </a:effectRef>
-              <a:fontRef idx="minor">
-                <a:schemeClr val="lt1"/>
-              </a:fontRef>
-            </p:style>
-            <p:txBody>
-              <a:bodyPr rtlCol="0" anchor="ctr"/>
-              <a:lstStyle/>
-              <a:p>
-                <a:pPr algn="ctr"/>
-                <a:endParaRPr lang="en-GB" sz="1600">
-                  <a:solidFill>
-                    <a:schemeClr val="tx1"/>
-                  </a:solidFill>
-                  <a:latin typeface="Arial" panose="020B0604020202020204" pitchFamily="34" charset="0"/>
-                  <a:cs typeface="Arial" panose="020B0604020202020204" pitchFamily="34" charset="0"/>
-                </a:endParaRPr>
-              </a:p>
-            </p:txBody>
-          </p:sp>
-          <p:sp>
-            <p:nvSpPr>
-              <p:cNvPr id="47" name="U-turn Arrow 46">
-                <a:extLst>
-                  <a:ext uri="{FF2B5EF4-FFF2-40B4-BE49-F238E27FC236}">
-                    <a16:creationId xmlns:a16="http://schemas.microsoft.com/office/drawing/2014/main" id="{DF0C36B6-F5F3-6CBF-99E3-071AC8FB4C5B}"/>
-                  </a:ext>
-                </a:extLst>
-              </p:cNvPr>
-              <p:cNvSpPr/>
-              <p:nvPr/>
-            </p:nvSpPr>
-            <p:spPr>
-              <a:xfrm rot="10800000">
-                <a:off x="447641" y="4281547"/>
-                <a:ext cx="410424" cy="180000"/>
-              </a:xfrm>
-              <a:prstGeom prst="uturnArrow">
-                <a:avLst/>
-              </a:prstGeom>
-              <a:solidFill>
-                <a:srgbClr val="C00000"/>
-              </a:solidFill>
-              <a:ln w="12700">
-                <a:solidFill>
-                  <a:srgbClr val="C00000"/>
-                </a:solidFill>
-              </a:ln>
-            </p:spPr>
-            <p:style>
-              <a:lnRef idx="2">
-                <a:schemeClr val="accent1">
-                  <a:shade val="15000"/>
-                </a:schemeClr>
-              </a:lnRef>
-              <a:fillRef idx="1">
-                <a:schemeClr val="accent1"/>
-              </a:fillRef>
-              <a:effectRef idx="0">
-                <a:schemeClr val="accent1"/>
-              </a:effectRef>
-              <a:fontRef idx="minor">
-                <a:schemeClr val="lt1"/>
-              </a:fontRef>
-            </p:style>
-            <p:txBody>
-              <a:bodyPr rtlCol="0" anchor="ctr"/>
-              <a:lstStyle/>
-              <a:p>
-                <a:pPr algn="ctr"/>
-                <a:endParaRPr lang="en-GB" sz="1600">
-                  <a:solidFill>
-                    <a:schemeClr val="tx1"/>
-                  </a:solidFill>
-                  <a:latin typeface="Arial" panose="020B0604020202020204" pitchFamily="34" charset="0"/>
-                  <a:cs typeface="Arial" panose="020B0604020202020204" pitchFamily="34" charset="0"/>
-                </a:endParaRPr>
-              </a:p>
-            </p:txBody>
-          </p:sp>
-        </p:grpSp>
-      </p:grpSp>
-      <p:cxnSp>
-        <p:nvCxnSpPr>
-          <p:cNvPr id="36" name="Straight Arrow Connector 35">
-            <a:extLst>
-              <a:ext uri="{FF2B5EF4-FFF2-40B4-BE49-F238E27FC236}">
-                <a16:creationId xmlns:a16="http://schemas.microsoft.com/office/drawing/2014/main" id="{62AD137D-1462-C44D-EBBA-F933150F1B54}"/>
-              </a:ext>
-            </a:extLst>
-          </p:cNvPr>
-          <p:cNvCxnSpPr>
-            <a:cxnSpLocks/>
-          </p:cNvCxnSpPr>
-          <p:nvPr/>
-        </p:nvCxnSpPr>
-        <p:spPr>
-          <a:xfrm flipV="1">
-            <a:off x="3921886" y="1342165"/>
-            <a:ext cx="313200" cy="0"/>
-          </a:xfrm>
-          <a:prstGeom prst="straightConnector1">
-            <a:avLst/>
-          </a:prstGeom>
-          <a:ln w="19050">
-            <a:solidFill>
-              <a:schemeClr val="tx1">
-                <a:lumMod val="65000"/>
-                <a:lumOff val="35000"/>
-              </a:schemeClr>
-            </a:solidFill>
-            <a:tailEnd type="triangle" w="lg" len="med"/>
-          </a:ln>
-          <a:effectLst/>
         </p:spPr>
         <p:style>
           <a:lnRef idx="2">
@@ -4808,36 +5485,33 @@
       </p:cxnSp>
       <p:cxnSp>
         <p:nvCxnSpPr>
-          <p:cNvPr id="38" name="Straight Arrow Connector 37">
-            <a:extLst>
-              <a:ext uri="{FF2B5EF4-FFF2-40B4-BE49-F238E27FC236}">
-                <a16:creationId xmlns:a16="http://schemas.microsoft.com/office/drawing/2014/main" id="{09B90FA0-14F2-2463-321F-526C93128F95}"/>
+          <p:cNvPr id="78" name="Straight Arrow Connector 77">
+            <a:extLst>
+              <a:ext uri="{FF2B5EF4-FFF2-40B4-BE49-F238E27FC236}">
+                <a16:creationId xmlns:a16="http://schemas.microsoft.com/office/drawing/2014/main" id="{588098AE-FED9-A3EB-5AB7-DFF7768C686D}"/>
               </a:ext>
             </a:extLst>
           </p:cNvPr>
           <p:cNvCxnSpPr>
             <a:cxnSpLocks/>
+            <a:endCxn id="11" idx="1"/>
           </p:cNvCxnSpPr>
           <p:nvPr/>
         </p:nvCxnSpPr>
         <p:spPr>
-          <a:xfrm flipH="1">
-            <a:off x="3916800" y="2403373"/>
-            <a:ext cx="313200" cy="0"/>
+          <a:xfrm>
+            <a:off x="2515320" y="1261932"/>
+            <a:ext cx="584556" cy="0"/>
           </a:xfrm>
           <a:prstGeom prst="straightConnector1">
             <a:avLst/>
           </a:prstGeom>
-          <a:ln w="19050">
+          <a:ln w="12700">
             <a:solidFill>
-              <a:schemeClr val="tx1">
-                <a:lumMod val="65000"/>
-                <a:lumOff val="35000"/>
-              </a:schemeClr>
+              <a:schemeClr val="tx1"/>
             </a:solidFill>
-            <a:tailEnd type="triangle" w="lg" len="med"/>
+            <a:tailEnd type="triangle" w="med" len="sm"/>
           </a:ln>
-          <a:effectLst/>
         </p:spPr>
         <p:style>
           <a:lnRef idx="2">
@@ -4856,10 +5530,10 @@
       </p:cxnSp>
       <p:cxnSp>
         <p:nvCxnSpPr>
-          <p:cNvPr id="44" name="Straight Arrow Connector 43">
-            <a:extLst>
-              <a:ext uri="{FF2B5EF4-FFF2-40B4-BE49-F238E27FC236}">
-                <a16:creationId xmlns:a16="http://schemas.microsoft.com/office/drawing/2014/main" id="{664664EA-6139-D5E3-9629-73687171243E}"/>
+          <p:cNvPr id="80" name="Straight Arrow Connector 79">
+            <a:extLst>
+              <a:ext uri="{FF2B5EF4-FFF2-40B4-BE49-F238E27FC236}">
+                <a16:creationId xmlns:a16="http://schemas.microsoft.com/office/drawing/2014/main" id="{A97D7AB9-F802-7899-CE64-EAB7E9E83984}"/>
               </a:ext>
             </a:extLst>
           </p:cNvPr>
@@ -4870,22 +5544,18 @@
         </p:nvCxnSpPr>
         <p:spPr>
           <a:xfrm>
-            <a:off x="5030696" y="1649126"/>
-            <a:ext cx="0" cy="432000"/>
+            <a:off x="4269876" y="841370"/>
+            <a:ext cx="0" cy="312840"/>
           </a:xfrm>
           <a:prstGeom prst="straightConnector1">
             <a:avLst/>
           </a:prstGeom>
-          <a:ln w="19050">
+          <a:ln w="12700">
             <a:solidFill>
-              <a:schemeClr val="tx1">
-                <a:lumMod val="65000"/>
-                <a:lumOff val="35000"/>
-              </a:schemeClr>
+              <a:schemeClr val="tx1"/>
             </a:solidFill>
-            <a:tailEnd type="triangle" w="lg" len="med"/>
+            <a:tailEnd type="triangle" w="med" len="sm"/>
           </a:ln>
-          <a:effectLst/>
         </p:spPr>
         <p:style>
           <a:lnRef idx="2">
@@ -4904,36 +5574,34 @@
       </p:cxnSp>
       <p:cxnSp>
         <p:nvCxnSpPr>
-          <p:cNvPr id="50" name="Straight Arrow Connector 49">
-            <a:extLst>
-              <a:ext uri="{FF2B5EF4-FFF2-40B4-BE49-F238E27FC236}">
-                <a16:creationId xmlns:a16="http://schemas.microsoft.com/office/drawing/2014/main" id="{6B1985BF-CD54-569B-F378-2238B9B0CB5E}"/>
+          <p:cNvPr id="83" name="Straight Arrow Connector 82">
+            <a:extLst>
+              <a:ext uri="{FF2B5EF4-FFF2-40B4-BE49-F238E27FC236}">
+                <a16:creationId xmlns:a16="http://schemas.microsoft.com/office/drawing/2014/main" id="{17B9EF76-E05B-A874-4E60-25E863D59179}"/>
               </a:ext>
             </a:extLst>
           </p:cNvPr>
           <p:cNvCxnSpPr>
             <a:cxnSpLocks/>
+            <a:stCxn id="11" idx="2"/>
+            <a:endCxn id="27" idx="0"/>
           </p:cNvCxnSpPr>
           <p:nvPr/>
         </p:nvCxnSpPr>
         <p:spPr>
-          <a:xfrm flipV="1">
-            <a:off x="1987200" y="3344464"/>
-            <a:ext cx="313200" cy="0"/>
+          <a:xfrm>
+            <a:off x="4269876" y="1369654"/>
+            <a:ext cx="0" cy="528072"/>
           </a:xfrm>
           <a:prstGeom prst="straightConnector1">
             <a:avLst/>
           </a:prstGeom>
-          <a:ln w="19050">
+          <a:ln w="12700">
             <a:solidFill>
-              <a:schemeClr val="tx1">
-                <a:lumMod val="65000"/>
-                <a:lumOff val="35000"/>
-              </a:schemeClr>
+              <a:schemeClr val="tx1"/>
             </a:solidFill>
-            <a:tailEnd type="triangle" w="lg" len="med"/>
+            <a:tailEnd type="triangle" w="med" len="sm"/>
           </a:ln>
-          <a:effectLst/>
         </p:spPr>
         <p:style>
           <a:lnRef idx="2">
@@ -4952,10 +5620,10 @@
       </p:cxnSp>
       <p:cxnSp>
         <p:nvCxnSpPr>
-          <p:cNvPr id="51" name="Straight Arrow Connector 50">
-            <a:extLst>
-              <a:ext uri="{FF2B5EF4-FFF2-40B4-BE49-F238E27FC236}">
-                <a16:creationId xmlns:a16="http://schemas.microsoft.com/office/drawing/2014/main" id="{1DD4E13E-ED07-6507-B3AE-78707820C038}"/>
+          <p:cNvPr id="86" name="Straight Arrow Connector 85">
+            <a:extLst>
+              <a:ext uri="{FF2B5EF4-FFF2-40B4-BE49-F238E27FC236}">
+                <a16:creationId xmlns:a16="http://schemas.microsoft.com/office/drawing/2014/main" id="{6969F0D1-BF56-D990-1C07-03C027BF0065}"/>
               </a:ext>
             </a:extLst>
           </p:cNvPr>
@@ -4966,22 +5634,18 @@
         </p:nvCxnSpPr>
         <p:spPr>
           <a:xfrm flipV="1">
-            <a:off x="3921886" y="3344464"/>
-            <a:ext cx="306000" cy="0"/>
+            <a:off x="2515320" y="2281794"/>
+            <a:ext cx="584556" cy="0"/>
           </a:xfrm>
           <a:prstGeom prst="straightConnector1">
             <a:avLst/>
           </a:prstGeom>
-          <a:ln w="19050">
+          <a:ln w="12700">
             <a:solidFill>
-              <a:schemeClr val="tx1">
-                <a:lumMod val="65000"/>
-                <a:lumOff val="35000"/>
-              </a:schemeClr>
+              <a:schemeClr val="tx1"/>
             </a:solidFill>
-            <a:tailEnd type="triangle" w="lg" len="med"/>
+            <a:tailEnd type="triangle" w="med" len="sm"/>
           </a:ln>
-          <a:effectLst/>
         </p:spPr>
         <p:style>
           <a:lnRef idx="2">
@@ -5000,10 +5664,10 @@
       </p:cxnSp>
       <p:cxnSp>
         <p:nvCxnSpPr>
-          <p:cNvPr id="52" name="Straight Arrow Connector 51">
-            <a:extLst>
-              <a:ext uri="{FF2B5EF4-FFF2-40B4-BE49-F238E27FC236}">
-                <a16:creationId xmlns:a16="http://schemas.microsoft.com/office/drawing/2014/main" id="{276BE8A3-558F-6D94-2264-FFED8B988573}"/>
+          <p:cNvPr id="87" name="Straight Arrow Connector 86">
+            <a:extLst>
+              <a:ext uri="{FF2B5EF4-FFF2-40B4-BE49-F238E27FC236}">
+                <a16:creationId xmlns:a16="http://schemas.microsoft.com/office/drawing/2014/main" id="{7B7B4F26-074A-675F-1900-69F887223BFB}"/>
               </a:ext>
             </a:extLst>
           </p:cNvPr>
@@ -5013,23 +5677,19 @@
           <p:nvPr/>
         </p:nvCxnSpPr>
         <p:spPr>
-          <a:xfrm>
-            <a:off x="1173202" y="2704663"/>
-            <a:ext cx="0" cy="324000"/>
+          <a:xfrm flipV="1">
+            <a:off x="2515320" y="2555354"/>
+            <a:ext cx="584556" cy="0"/>
           </a:xfrm>
           <a:prstGeom prst="straightConnector1">
             <a:avLst/>
           </a:prstGeom>
-          <a:ln w="19050">
+          <a:ln w="12700">
             <a:solidFill>
-              <a:schemeClr val="tx1">
-                <a:lumMod val="65000"/>
-                <a:lumOff val="35000"/>
-              </a:schemeClr>
+              <a:schemeClr val="tx1"/>
             </a:solidFill>
-            <a:tailEnd type="triangle" w="lg" len="med"/>
+            <a:tailEnd type="triangle" w="med" len="sm"/>
           </a:ln>
-          <a:effectLst/>
         </p:spPr>
         <p:style>
           <a:lnRef idx="2">
@@ -5046,285 +5706,34 @@
           </a:fontRef>
         </p:style>
       </p:cxnSp>
-      <p:sp>
-        <p:nvSpPr>
-          <p:cNvPr id="54" name="TextBox 53">
-            <a:extLst>
-              <a:ext uri="{FF2B5EF4-FFF2-40B4-BE49-F238E27FC236}">
-                <a16:creationId xmlns:a16="http://schemas.microsoft.com/office/drawing/2014/main" id="{AAE00670-E9FB-184A-2B00-248EE4F67946}"/>
-              </a:ext>
-            </a:extLst>
-          </p:cNvPr>
-          <p:cNvSpPr txBox="1"/>
-          <p:nvPr/>
-        </p:nvSpPr>
-        <p:spPr>
-          <a:xfrm>
-            <a:off x="4235086" y="90280"/>
-            <a:ext cx="437612" cy="108000"/>
-          </a:xfrm>
-          <a:prstGeom prst="rect">
-            <a:avLst/>
-          </a:prstGeom>
-          <a:solidFill>
-            <a:schemeClr val="accent3">
-              <a:lumMod val="20000"/>
-              <a:lumOff val="80000"/>
-            </a:schemeClr>
-          </a:solidFill>
-          <a:ln>
+      <p:cxnSp>
+        <p:nvCxnSpPr>
+          <p:cNvPr id="88" name="Straight Arrow Connector 87">
+            <a:extLst>
+              <a:ext uri="{FF2B5EF4-FFF2-40B4-BE49-F238E27FC236}">
+                <a16:creationId xmlns:a16="http://schemas.microsoft.com/office/drawing/2014/main" id="{A3CB5E0F-9FD3-D5FA-05C6-71921A3427FD}"/>
+              </a:ext>
+            </a:extLst>
+          </p:cNvPr>
+          <p:cNvCxnSpPr>
+            <a:cxnSpLocks/>
+          </p:cNvCxnSpPr>
+          <p:nvPr/>
+        </p:nvCxnSpPr>
+        <p:spPr>
+          <a:xfrm flipV="1">
+            <a:off x="2516071" y="3921230"/>
+            <a:ext cx="584556" cy="0"/>
+          </a:xfrm>
+          <a:prstGeom prst="straightConnector1">
+            <a:avLst/>
+          </a:prstGeom>
+          <a:ln w="12700">
             <a:solidFill>
               <a:schemeClr val="tx1"/>
             </a:solidFill>
+            <a:tailEnd type="triangle" w="med" len="sm"/>
           </a:ln>
-          <a:effectLst/>
-        </p:spPr>
-        <p:txBody>
-          <a:bodyPr wrap="square" rtlCol="0" anchor="ctr">
-            <a:noAutofit/>
-          </a:bodyPr>
-          <a:lstStyle/>
-          <a:p>
-            <a:pPr algn="ctr"/>
-            <a:endParaRPr lang="en-GB" sz="900" dirty="0">
-              <a:latin typeface="Arial" panose="020B0604020202020204" pitchFamily="34" charset="0"/>
-              <a:cs typeface="Arial" panose="020B0604020202020204" pitchFamily="34" charset="0"/>
-            </a:endParaRPr>
-          </a:p>
-        </p:txBody>
-      </p:sp>
-      <p:sp>
-        <p:nvSpPr>
-          <p:cNvPr id="55" name="TextBox 54">
-            <a:extLst>
-              <a:ext uri="{FF2B5EF4-FFF2-40B4-BE49-F238E27FC236}">
-                <a16:creationId xmlns:a16="http://schemas.microsoft.com/office/drawing/2014/main" id="{BFC4EDCC-561A-CBF9-B0D0-C2CCA08DA588}"/>
-              </a:ext>
-            </a:extLst>
-          </p:cNvPr>
-          <p:cNvSpPr txBox="1"/>
-          <p:nvPr/>
-        </p:nvSpPr>
-        <p:spPr>
-          <a:xfrm>
-            <a:off x="4687209" y="31643"/>
-            <a:ext cx="1234078" cy="230832"/>
-          </a:xfrm>
-          <a:prstGeom prst="rect">
-            <a:avLst/>
-          </a:prstGeom>
-          <a:noFill/>
-        </p:spPr>
-        <p:txBody>
-          <a:bodyPr wrap="square" rtlCol="0">
-            <a:spAutoFit/>
-          </a:bodyPr>
-          <a:lstStyle/>
-          <a:p>
-            <a:r>
-              <a:rPr lang="en-GB" sz="900" dirty="0">
-                <a:latin typeface="Arial" panose="020B0604020202020204" pitchFamily="34" charset="0"/>
-                <a:cs typeface="Arial" panose="020B0604020202020204" pitchFamily="34" charset="0"/>
-              </a:rPr>
-              <a:t>Input data</a:t>
-            </a:r>
-          </a:p>
-        </p:txBody>
-      </p:sp>
-      <p:sp>
-        <p:nvSpPr>
-          <p:cNvPr id="56" name="TextBox 55">
-            <a:extLst>
-              <a:ext uri="{FF2B5EF4-FFF2-40B4-BE49-F238E27FC236}">
-                <a16:creationId xmlns:a16="http://schemas.microsoft.com/office/drawing/2014/main" id="{0062C290-E9DF-0857-B22E-8FEBE0729CC2}"/>
-              </a:ext>
-            </a:extLst>
-          </p:cNvPr>
-          <p:cNvSpPr txBox="1"/>
-          <p:nvPr/>
-        </p:nvSpPr>
-        <p:spPr>
-          <a:xfrm>
-            <a:off x="4235535" y="342280"/>
-            <a:ext cx="437612" cy="108000"/>
-          </a:xfrm>
-          <a:prstGeom prst="rect">
-            <a:avLst/>
-          </a:prstGeom>
-          <a:solidFill>
-            <a:srgbClr val="9FD6EB"/>
-          </a:solidFill>
-          <a:ln>
-            <a:solidFill>
-              <a:schemeClr val="tx1"/>
-            </a:solidFill>
-          </a:ln>
-          <a:effectLst/>
-        </p:spPr>
-        <p:txBody>
-          <a:bodyPr wrap="square" rtlCol="0" anchor="ctr">
-            <a:noAutofit/>
-          </a:bodyPr>
-          <a:lstStyle/>
-          <a:p>
-            <a:pPr algn="ctr"/>
-            <a:endParaRPr lang="en-GB" sz="900" dirty="0">
-              <a:latin typeface="Arial" panose="020B0604020202020204" pitchFamily="34" charset="0"/>
-              <a:cs typeface="Arial" panose="020B0604020202020204" pitchFamily="34" charset="0"/>
-            </a:endParaRPr>
-          </a:p>
-        </p:txBody>
-      </p:sp>
-      <p:sp>
-        <p:nvSpPr>
-          <p:cNvPr id="57" name="TextBox 56">
-            <a:extLst>
-              <a:ext uri="{FF2B5EF4-FFF2-40B4-BE49-F238E27FC236}">
-                <a16:creationId xmlns:a16="http://schemas.microsoft.com/office/drawing/2014/main" id="{2F401E4E-17E5-D9A8-8571-B3C7A17F901A}"/>
-              </a:ext>
-            </a:extLst>
-          </p:cNvPr>
-          <p:cNvSpPr txBox="1"/>
-          <p:nvPr/>
-        </p:nvSpPr>
-        <p:spPr>
-          <a:xfrm>
-            <a:off x="4235086" y="594280"/>
-            <a:ext cx="437612" cy="108000"/>
-          </a:xfrm>
-          <a:prstGeom prst="rect">
-            <a:avLst/>
-          </a:prstGeom>
-          <a:noFill/>
-          <a:ln>
-            <a:solidFill>
-              <a:schemeClr val="tx1"/>
-            </a:solidFill>
-          </a:ln>
-          <a:effectLst/>
-        </p:spPr>
-        <p:txBody>
-          <a:bodyPr wrap="square" rtlCol="0" anchor="ctr">
-            <a:noAutofit/>
-          </a:bodyPr>
-          <a:lstStyle/>
-          <a:p>
-            <a:pPr algn="ctr"/>
-            <a:endParaRPr lang="en-GB" sz="900" dirty="0">
-              <a:latin typeface="Arial" panose="020B0604020202020204" pitchFamily="34" charset="0"/>
-              <a:cs typeface="Arial" panose="020B0604020202020204" pitchFamily="34" charset="0"/>
-            </a:endParaRPr>
-          </a:p>
-        </p:txBody>
-      </p:sp>
-      <p:sp>
-        <p:nvSpPr>
-          <p:cNvPr id="58" name="TextBox 57">
-            <a:extLst>
-              <a:ext uri="{FF2B5EF4-FFF2-40B4-BE49-F238E27FC236}">
-                <a16:creationId xmlns:a16="http://schemas.microsoft.com/office/drawing/2014/main" id="{3C98D1EF-B7E0-206B-8F25-5ED80628F2A0}"/>
-              </a:ext>
-            </a:extLst>
-          </p:cNvPr>
-          <p:cNvSpPr txBox="1"/>
-          <p:nvPr/>
-        </p:nvSpPr>
-        <p:spPr>
-          <a:xfrm>
-            <a:off x="4684023" y="282240"/>
-            <a:ext cx="1335526" cy="230832"/>
-          </a:xfrm>
-          <a:prstGeom prst="rect">
-            <a:avLst/>
-          </a:prstGeom>
-          <a:noFill/>
-        </p:spPr>
-        <p:txBody>
-          <a:bodyPr wrap="square" rtlCol="0">
-            <a:spAutoFit/>
-          </a:bodyPr>
-          <a:lstStyle/>
-          <a:p>
-            <a:r>
-              <a:rPr lang="en-GB" sz="900" dirty="0">
-                <a:latin typeface="Arial" panose="020B0604020202020204" pitchFamily="34" charset="0"/>
-                <a:cs typeface="Arial" panose="020B0604020202020204" pitchFamily="34" charset="0"/>
-              </a:rPr>
-              <a:t>Tree object in Python</a:t>
-            </a:r>
-          </a:p>
-        </p:txBody>
-      </p:sp>
-      <p:sp>
-        <p:nvSpPr>
-          <p:cNvPr id="59" name="TextBox 58">
-            <a:extLst>
-              <a:ext uri="{FF2B5EF4-FFF2-40B4-BE49-F238E27FC236}">
-                <a16:creationId xmlns:a16="http://schemas.microsoft.com/office/drawing/2014/main" id="{BCF67C39-F5C2-F77F-B896-CB7D59E64D13}"/>
-              </a:ext>
-            </a:extLst>
-          </p:cNvPr>
-          <p:cNvSpPr txBox="1"/>
-          <p:nvPr/>
-        </p:nvSpPr>
-        <p:spPr>
-          <a:xfrm>
-            <a:off x="4684027" y="488702"/>
-            <a:ext cx="1436973" cy="369332"/>
-          </a:xfrm>
-          <a:prstGeom prst="rect">
-            <a:avLst/>
-          </a:prstGeom>
-          <a:noFill/>
-        </p:spPr>
-        <p:txBody>
-          <a:bodyPr wrap="square" rtlCol="0">
-            <a:spAutoFit/>
-          </a:bodyPr>
-          <a:lstStyle/>
-          <a:p>
-            <a:r>
-              <a:rPr lang="en-GB" sz="900" dirty="0">
-                <a:latin typeface="Arial" panose="020B0604020202020204" pitchFamily="34" charset="0"/>
-                <a:cs typeface="Arial" panose="020B0604020202020204" pitchFamily="34" charset="0"/>
-              </a:rPr>
-              <a:t>Process: see Materials and methods</a:t>
-            </a:r>
-          </a:p>
-        </p:txBody>
-      </p:sp>
-      <p:cxnSp>
-        <p:nvCxnSpPr>
-          <p:cNvPr id="60" name="Straight Arrow Connector 59">
-            <a:extLst>
-              <a:ext uri="{FF2B5EF4-FFF2-40B4-BE49-F238E27FC236}">
-                <a16:creationId xmlns:a16="http://schemas.microsoft.com/office/drawing/2014/main" id="{AABD4C25-F2B5-5B6F-F4D0-B0EA162AB51E}"/>
-              </a:ext>
-            </a:extLst>
-          </p:cNvPr>
-          <p:cNvCxnSpPr>
-            <a:cxnSpLocks/>
-          </p:cNvCxnSpPr>
-          <p:nvPr/>
-        </p:nvCxnSpPr>
-        <p:spPr>
-          <a:xfrm flipH="1">
-            <a:off x="1983600" y="702000"/>
-            <a:ext cx="311580" cy="324000"/>
-          </a:xfrm>
-          <a:prstGeom prst="straightConnector1">
-            <a:avLst/>
-          </a:prstGeom>
-          <a:ln w="19050">
-            <a:solidFill>
-              <a:schemeClr val="tx1">
-                <a:lumMod val="65000"/>
-                <a:lumOff val="35000"/>
-              </a:schemeClr>
-            </a:solidFill>
-            <a:tailEnd type="triangle" w="lg" len="med"/>
-          </a:ln>
-          <a:effectLst/>
         </p:spPr>
         <p:style>
           <a:lnRef idx="2">
@@ -5341,10 +5750,1800 @@
           </a:fontRef>
         </p:style>
       </p:cxnSp>
+      <p:cxnSp>
+        <p:nvCxnSpPr>
+          <p:cNvPr id="89" name="Straight Arrow Connector 88">
+            <a:extLst>
+              <a:ext uri="{FF2B5EF4-FFF2-40B4-BE49-F238E27FC236}">
+                <a16:creationId xmlns:a16="http://schemas.microsoft.com/office/drawing/2014/main" id="{72A49E72-364A-64C3-C37B-40F332BC0716}"/>
+              </a:ext>
+            </a:extLst>
+          </p:cNvPr>
+          <p:cNvCxnSpPr>
+            <a:cxnSpLocks/>
+          </p:cNvCxnSpPr>
+          <p:nvPr/>
+        </p:nvCxnSpPr>
+        <p:spPr>
+          <a:xfrm flipV="1">
+            <a:off x="2516071" y="4650527"/>
+            <a:ext cx="584556" cy="0"/>
+          </a:xfrm>
+          <a:prstGeom prst="straightConnector1">
+            <a:avLst/>
+          </a:prstGeom>
+          <a:ln w="12700">
+            <a:solidFill>
+              <a:schemeClr val="tx1"/>
+            </a:solidFill>
+            <a:tailEnd type="triangle" w="med" len="sm"/>
+          </a:ln>
+        </p:spPr>
+        <p:style>
+          <a:lnRef idx="2">
+            <a:schemeClr val="accent1"/>
+          </a:lnRef>
+          <a:fillRef idx="0">
+            <a:schemeClr val="accent1"/>
+          </a:fillRef>
+          <a:effectRef idx="1">
+            <a:schemeClr val="accent1"/>
+          </a:effectRef>
+          <a:fontRef idx="minor">
+            <a:schemeClr val="tx1"/>
+          </a:fontRef>
+        </p:style>
+      </p:cxnSp>
+      <p:cxnSp>
+        <p:nvCxnSpPr>
+          <p:cNvPr id="90" name="Straight Arrow Connector 89">
+            <a:extLst>
+              <a:ext uri="{FF2B5EF4-FFF2-40B4-BE49-F238E27FC236}">
+                <a16:creationId xmlns:a16="http://schemas.microsoft.com/office/drawing/2014/main" id="{D7198CC1-7B81-B00B-F925-8384DD08F509}"/>
+              </a:ext>
+            </a:extLst>
+          </p:cNvPr>
+          <p:cNvCxnSpPr>
+            <a:cxnSpLocks/>
+          </p:cNvCxnSpPr>
+          <p:nvPr/>
+        </p:nvCxnSpPr>
+        <p:spPr>
+          <a:xfrm flipV="1">
+            <a:off x="2516071" y="7748026"/>
+            <a:ext cx="584556" cy="0"/>
+          </a:xfrm>
+          <a:prstGeom prst="straightConnector1">
+            <a:avLst/>
+          </a:prstGeom>
+          <a:ln w="12700">
+            <a:solidFill>
+              <a:schemeClr val="tx1"/>
+            </a:solidFill>
+            <a:tailEnd type="triangle" w="med" len="sm"/>
+          </a:ln>
+        </p:spPr>
+        <p:style>
+          <a:lnRef idx="2">
+            <a:schemeClr val="accent1"/>
+          </a:lnRef>
+          <a:fillRef idx="0">
+            <a:schemeClr val="accent1"/>
+          </a:fillRef>
+          <a:effectRef idx="1">
+            <a:schemeClr val="accent1"/>
+          </a:effectRef>
+          <a:fontRef idx="minor">
+            <a:schemeClr val="tx1"/>
+          </a:fontRef>
+        </p:style>
+      </p:cxnSp>
+      <p:cxnSp>
+        <p:nvCxnSpPr>
+          <p:cNvPr id="93" name="Straight Arrow Connector 92">
+            <a:extLst>
+              <a:ext uri="{FF2B5EF4-FFF2-40B4-BE49-F238E27FC236}">
+                <a16:creationId xmlns:a16="http://schemas.microsoft.com/office/drawing/2014/main" id="{C9654698-4BA3-78B1-B0F7-DAF4BC5854A1}"/>
+              </a:ext>
+            </a:extLst>
+          </p:cNvPr>
+          <p:cNvCxnSpPr>
+            <a:cxnSpLocks/>
+          </p:cNvCxnSpPr>
+          <p:nvPr/>
+        </p:nvCxnSpPr>
+        <p:spPr>
+          <a:xfrm>
+            <a:off x="3443487" y="4764599"/>
+            <a:ext cx="0" cy="363798"/>
+          </a:xfrm>
+          <a:prstGeom prst="straightConnector1">
+            <a:avLst/>
+          </a:prstGeom>
+          <a:ln w="12700">
+            <a:solidFill>
+              <a:schemeClr val="tx1"/>
+            </a:solidFill>
+            <a:tailEnd type="triangle" w="med" len="sm"/>
+          </a:ln>
+        </p:spPr>
+        <p:style>
+          <a:lnRef idx="2">
+            <a:schemeClr val="accent1"/>
+          </a:lnRef>
+          <a:fillRef idx="0">
+            <a:schemeClr val="accent1"/>
+          </a:fillRef>
+          <a:effectRef idx="1">
+            <a:schemeClr val="accent1"/>
+          </a:effectRef>
+          <a:fontRef idx="minor">
+            <a:schemeClr val="tx1"/>
+          </a:fontRef>
+        </p:style>
+      </p:cxnSp>
+      <p:cxnSp>
+        <p:nvCxnSpPr>
+          <p:cNvPr id="95" name="Straight Arrow Connector 94">
+            <a:extLst>
+              <a:ext uri="{FF2B5EF4-FFF2-40B4-BE49-F238E27FC236}">
+                <a16:creationId xmlns:a16="http://schemas.microsoft.com/office/drawing/2014/main" id="{C9274B65-3A8C-A8C7-3D17-C7D3918FD9A9}"/>
+              </a:ext>
+            </a:extLst>
+          </p:cNvPr>
+          <p:cNvCxnSpPr>
+            <a:cxnSpLocks/>
+          </p:cNvCxnSpPr>
+          <p:nvPr/>
+        </p:nvCxnSpPr>
+        <p:spPr>
+          <a:xfrm>
+            <a:off x="1838439" y="5906730"/>
+            <a:ext cx="0" cy="36000"/>
+          </a:xfrm>
+          <a:prstGeom prst="straightConnector1">
+            <a:avLst/>
+          </a:prstGeom>
+          <a:ln>
+            <a:solidFill>
+              <a:schemeClr val="tx1"/>
+            </a:solidFill>
+            <a:tailEnd type="triangle" w="med" len="sm"/>
+          </a:ln>
+        </p:spPr>
+        <p:style>
+          <a:lnRef idx="2">
+            <a:schemeClr val="accent1"/>
+          </a:lnRef>
+          <a:fillRef idx="0">
+            <a:schemeClr val="accent1"/>
+          </a:fillRef>
+          <a:effectRef idx="1">
+            <a:schemeClr val="accent1"/>
+          </a:effectRef>
+          <a:fontRef idx="minor">
+            <a:schemeClr val="tx1"/>
+          </a:fontRef>
+        </p:style>
+      </p:cxnSp>
+      <p:cxnSp>
+        <p:nvCxnSpPr>
+          <p:cNvPr id="97" name="Straight Arrow Connector 96">
+            <a:extLst>
+              <a:ext uri="{FF2B5EF4-FFF2-40B4-BE49-F238E27FC236}">
+                <a16:creationId xmlns:a16="http://schemas.microsoft.com/office/drawing/2014/main" id="{018994C4-29A7-EF98-6AF1-F477ACE15962}"/>
+              </a:ext>
+            </a:extLst>
+          </p:cNvPr>
+          <p:cNvCxnSpPr>
+            <a:cxnSpLocks/>
+          </p:cNvCxnSpPr>
+          <p:nvPr/>
+        </p:nvCxnSpPr>
+        <p:spPr>
+          <a:xfrm>
+            <a:off x="4269876" y="2132347"/>
+            <a:ext cx="0" cy="36000"/>
+          </a:xfrm>
+          <a:prstGeom prst="straightConnector1">
+            <a:avLst/>
+          </a:prstGeom>
+          <a:ln>
+            <a:solidFill>
+              <a:schemeClr val="tx1"/>
+            </a:solidFill>
+            <a:tailEnd type="triangle" w="med" len="sm"/>
+          </a:ln>
+        </p:spPr>
+        <p:style>
+          <a:lnRef idx="2">
+            <a:schemeClr val="accent1"/>
+          </a:lnRef>
+          <a:fillRef idx="0">
+            <a:schemeClr val="accent1"/>
+          </a:fillRef>
+          <a:effectRef idx="1">
+            <a:schemeClr val="accent1"/>
+          </a:effectRef>
+          <a:fontRef idx="minor">
+            <a:schemeClr val="tx1"/>
+          </a:fontRef>
+        </p:style>
+      </p:cxnSp>
+      <p:cxnSp>
+        <p:nvCxnSpPr>
+          <p:cNvPr id="100" name="Straight Arrow Connector 99">
+            <a:extLst>
+              <a:ext uri="{FF2B5EF4-FFF2-40B4-BE49-F238E27FC236}">
+                <a16:creationId xmlns:a16="http://schemas.microsoft.com/office/drawing/2014/main" id="{924E969A-2730-2DC8-4B65-B04A7AFCB7F6}"/>
+              </a:ext>
+            </a:extLst>
+          </p:cNvPr>
+          <p:cNvCxnSpPr>
+            <a:cxnSpLocks/>
+          </p:cNvCxnSpPr>
+          <p:nvPr/>
+        </p:nvCxnSpPr>
+        <p:spPr>
+          <a:xfrm>
+            <a:off x="4269876" y="2678372"/>
+            <a:ext cx="0" cy="36000"/>
+          </a:xfrm>
+          <a:prstGeom prst="straightConnector1">
+            <a:avLst/>
+          </a:prstGeom>
+          <a:ln>
+            <a:solidFill>
+              <a:schemeClr val="tx1"/>
+            </a:solidFill>
+            <a:tailEnd type="triangle" w="med" len="sm"/>
+          </a:ln>
+        </p:spPr>
+        <p:style>
+          <a:lnRef idx="2">
+            <a:schemeClr val="accent1"/>
+          </a:lnRef>
+          <a:fillRef idx="0">
+            <a:schemeClr val="accent1"/>
+          </a:fillRef>
+          <a:effectRef idx="1">
+            <a:schemeClr val="accent1"/>
+          </a:effectRef>
+          <a:fontRef idx="minor">
+            <a:schemeClr val="tx1"/>
+          </a:fontRef>
+        </p:style>
+      </p:cxnSp>
+      <p:cxnSp>
+        <p:nvCxnSpPr>
+          <p:cNvPr id="101" name="Straight Arrow Connector 100">
+            <a:extLst>
+              <a:ext uri="{FF2B5EF4-FFF2-40B4-BE49-F238E27FC236}">
+                <a16:creationId xmlns:a16="http://schemas.microsoft.com/office/drawing/2014/main" id="{C649EFD7-084C-1D20-E029-09EB4B116D9B}"/>
+              </a:ext>
+            </a:extLst>
+          </p:cNvPr>
+          <p:cNvCxnSpPr>
+            <a:cxnSpLocks/>
+          </p:cNvCxnSpPr>
+          <p:nvPr/>
+        </p:nvCxnSpPr>
+        <p:spPr>
+          <a:xfrm>
+            <a:off x="4269876" y="2952381"/>
+            <a:ext cx="0" cy="36000"/>
+          </a:xfrm>
+          <a:prstGeom prst="straightConnector1">
+            <a:avLst/>
+          </a:prstGeom>
+          <a:ln>
+            <a:solidFill>
+              <a:schemeClr val="tx1"/>
+            </a:solidFill>
+            <a:tailEnd type="triangle" w="med" len="sm"/>
+          </a:ln>
+        </p:spPr>
+        <p:style>
+          <a:lnRef idx="2">
+            <a:schemeClr val="accent1"/>
+          </a:lnRef>
+          <a:fillRef idx="0">
+            <a:schemeClr val="accent1"/>
+          </a:fillRef>
+          <a:effectRef idx="1">
+            <a:schemeClr val="accent1"/>
+          </a:effectRef>
+          <a:fontRef idx="minor">
+            <a:schemeClr val="tx1"/>
+          </a:fontRef>
+        </p:style>
+      </p:cxnSp>
+      <p:cxnSp>
+        <p:nvCxnSpPr>
+          <p:cNvPr id="102" name="Straight Arrow Connector 101">
+            <a:extLst>
+              <a:ext uri="{FF2B5EF4-FFF2-40B4-BE49-F238E27FC236}">
+                <a16:creationId xmlns:a16="http://schemas.microsoft.com/office/drawing/2014/main" id="{7ACFA687-1084-1654-5BA1-014D6CFA5ECD}"/>
+              </a:ext>
+            </a:extLst>
+          </p:cNvPr>
+          <p:cNvCxnSpPr>
+            <a:cxnSpLocks/>
+          </p:cNvCxnSpPr>
+          <p:nvPr/>
+        </p:nvCxnSpPr>
+        <p:spPr>
+          <a:xfrm>
+            <a:off x="4269876" y="3227347"/>
+            <a:ext cx="0" cy="36000"/>
+          </a:xfrm>
+          <a:prstGeom prst="straightConnector1">
+            <a:avLst/>
+          </a:prstGeom>
+          <a:ln>
+            <a:solidFill>
+              <a:schemeClr val="tx1"/>
+            </a:solidFill>
+            <a:tailEnd type="triangle" w="med" len="sm"/>
+          </a:ln>
+        </p:spPr>
+        <p:style>
+          <a:lnRef idx="2">
+            <a:schemeClr val="accent1"/>
+          </a:lnRef>
+          <a:fillRef idx="0">
+            <a:schemeClr val="accent1"/>
+          </a:fillRef>
+          <a:effectRef idx="1">
+            <a:schemeClr val="accent1"/>
+          </a:effectRef>
+          <a:fontRef idx="minor">
+            <a:schemeClr val="tx1"/>
+          </a:fontRef>
+        </p:style>
+      </p:cxnSp>
+      <p:cxnSp>
+        <p:nvCxnSpPr>
+          <p:cNvPr id="103" name="Straight Arrow Connector 102">
+            <a:extLst>
+              <a:ext uri="{FF2B5EF4-FFF2-40B4-BE49-F238E27FC236}">
+                <a16:creationId xmlns:a16="http://schemas.microsoft.com/office/drawing/2014/main" id="{36A8DDCC-EAF6-D4DB-523A-812E0C7121F0}"/>
+              </a:ext>
+            </a:extLst>
+          </p:cNvPr>
+          <p:cNvCxnSpPr>
+            <a:cxnSpLocks/>
+          </p:cNvCxnSpPr>
+          <p:nvPr/>
+        </p:nvCxnSpPr>
+        <p:spPr>
+          <a:xfrm>
+            <a:off x="4269876" y="3502427"/>
+            <a:ext cx="0" cy="36000"/>
+          </a:xfrm>
+          <a:prstGeom prst="straightConnector1">
+            <a:avLst/>
+          </a:prstGeom>
+          <a:ln>
+            <a:solidFill>
+              <a:schemeClr val="tx1"/>
+            </a:solidFill>
+            <a:tailEnd type="triangle" w="med" len="sm"/>
+          </a:ln>
+        </p:spPr>
+        <p:style>
+          <a:lnRef idx="2">
+            <a:schemeClr val="accent1"/>
+          </a:lnRef>
+          <a:fillRef idx="0">
+            <a:schemeClr val="accent1"/>
+          </a:fillRef>
+          <a:effectRef idx="1">
+            <a:schemeClr val="accent1"/>
+          </a:effectRef>
+          <a:fontRef idx="minor">
+            <a:schemeClr val="tx1"/>
+          </a:fontRef>
+        </p:style>
+      </p:cxnSp>
+      <p:cxnSp>
+        <p:nvCxnSpPr>
+          <p:cNvPr id="104" name="Straight Arrow Connector 103">
+            <a:extLst>
+              <a:ext uri="{FF2B5EF4-FFF2-40B4-BE49-F238E27FC236}">
+                <a16:creationId xmlns:a16="http://schemas.microsoft.com/office/drawing/2014/main" id="{C4878D40-4998-6A05-7D14-BF144459DF4F}"/>
+              </a:ext>
+            </a:extLst>
+          </p:cNvPr>
+          <p:cNvCxnSpPr>
+            <a:cxnSpLocks/>
+          </p:cNvCxnSpPr>
+          <p:nvPr/>
+        </p:nvCxnSpPr>
+        <p:spPr>
+          <a:xfrm>
+            <a:off x="4269271" y="3774333"/>
+            <a:ext cx="0" cy="36000"/>
+          </a:xfrm>
+          <a:prstGeom prst="straightConnector1">
+            <a:avLst/>
+          </a:prstGeom>
+          <a:ln>
+            <a:solidFill>
+              <a:schemeClr val="tx1"/>
+            </a:solidFill>
+            <a:tailEnd type="triangle" w="med" len="sm"/>
+          </a:ln>
+        </p:spPr>
+        <p:style>
+          <a:lnRef idx="2">
+            <a:schemeClr val="accent1"/>
+          </a:lnRef>
+          <a:fillRef idx="0">
+            <a:schemeClr val="accent1"/>
+          </a:fillRef>
+          <a:effectRef idx="1">
+            <a:schemeClr val="accent1"/>
+          </a:effectRef>
+          <a:fontRef idx="minor">
+            <a:schemeClr val="tx1"/>
+          </a:fontRef>
+        </p:style>
+      </p:cxnSp>
+      <p:cxnSp>
+        <p:nvCxnSpPr>
+          <p:cNvPr id="105" name="Straight Arrow Connector 104">
+            <a:extLst>
+              <a:ext uri="{FF2B5EF4-FFF2-40B4-BE49-F238E27FC236}">
+                <a16:creationId xmlns:a16="http://schemas.microsoft.com/office/drawing/2014/main" id="{EC5075D1-9C52-B7D4-259A-D0844263895E}"/>
+              </a:ext>
+            </a:extLst>
+          </p:cNvPr>
+          <p:cNvCxnSpPr>
+            <a:cxnSpLocks/>
+          </p:cNvCxnSpPr>
+          <p:nvPr/>
+        </p:nvCxnSpPr>
+        <p:spPr>
+          <a:xfrm>
+            <a:off x="1838439" y="5634625"/>
+            <a:ext cx="0" cy="36000"/>
+          </a:xfrm>
+          <a:prstGeom prst="straightConnector1">
+            <a:avLst/>
+          </a:prstGeom>
+          <a:ln>
+            <a:solidFill>
+              <a:schemeClr val="tx1"/>
+            </a:solidFill>
+            <a:tailEnd type="triangle" w="med" len="sm"/>
+          </a:ln>
+        </p:spPr>
+        <p:style>
+          <a:lnRef idx="2">
+            <a:schemeClr val="accent1"/>
+          </a:lnRef>
+          <a:fillRef idx="0">
+            <a:schemeClr val="accent1"/>
+          </a:fillRef>
+          <a:effectRef idx="1">
+            <a:schemeClr val="accent1"/>
+          </a:effectRef>
+          <a:fontRef idx="minor">
+            <a:schemeClr val="tx1"/>
+          </a:fontRef>
+        </p:style>
+      </p:cxnSp>
+      <p:cxnSp>
+        <p:nvCxnSpPr>
+          <p:cNvPr id="106" name="Straight Arrow Connector 105">
+            <a:extLst>
+              <a:ext uri="{FF2B5EF4-FFF2-40B4-BE49-F238E27FC236}">
+                <a16:creationId xmlns:a16="http://schemas.microsoft.com/office/drawing/2014/main" id="{401E9D57-577D-930E-815E-DB89770A5ADC}"/>
+              </a:ext>
+            </a:extLst>
+          </p:cNvPr>
+          <p:cNvCxnSpPr>
+            <a:cxnSpLocks/>
+          </p:cNvCxnSpPr>
+          <p:nvPr/>
+        </p:nvCxnSpPr>
+        <p:spPr>
+          <a:xfrm>
+            <a:off x="1838439" y="6182083"/>
+            <a:ext cx="0" cy="36000"/>
+          </a:xfrm>
+          <a:prstGeom prst="straightConnector1">
+            <a:avLst/>
+          </a:prstGeom>
+          <a:ln>
+            <a:solidFill>
+              <a:schemeClr val="tx1"/>
+            </a:solidFill>
+            <a:tailEnd type="triangle" w="med" len="sm"/>
+          </a:ln>
+        </p:spPr>
+        <p:style>
+          <a:lnRef idx="2">
+            <a:schemeClr val="accent1"/>
+          </a:lnRef>
+          <a:fillRef idx="0">
+            <a:schemeClr val="accent1"/>
+          </a:fillRef>
+          <a:effectRef idx="1">
+            <a:schemeClr val="accent1"/>
+          </a:effectRef>
+          <a:fontRef idx="minor">
+            <a:schemeClr val="tx1"/>
+          </a:fontRef>
+        </p:style>
+      </p:cxnSp>
+      <p:cxnSp>
+        <p:nvCxnSpPr>
+          <p:cNvPr id="107" name="Straight Arrow Connector 106">
+            <a:extLst>
+              <a:ext uri="{FF2B5EF4-FFF2-40B4-BE49-F238E27FC236}">
+                <a16:creationId xmlns:a16="http://schemas.microsoft.com/office/drawing/2014/main" id="{08F54B48-6AC8-E9E9-1251-FC2CF64B7EFC}"/>
+              </a:ext>
+            </a:extLst>
+          </p:cNvPr>
+          <p:cNvCxnSpPr>
+            <a:cxnSpLocks/>
+          </p:cNvCxnSpPr>
+          <p:nvPr/>
+        </p:nvCxnSpPr>
+        <p:spPr>
+          <a:xfrm>
+            <a:off x="4269271" y="5358753"/>
+            <a:ext cx="0" cy="36000"/>
+          </a:xfrm>
+          <a:prstGeom prst="straightConnector1">
+            <a:avLst/>
+          </a:prstGeom>
+          <a:ln>
+            <a:solidFill>
+              <a:schemeClr val="tx1"/>
+            </a:solidFill>
+            <a:tailEnd type="triangle" w="med" len="sm"/>
+          </a:ln>
+        </p:spPr>
+        <p:style>
+          <a:lnRef idx="2">
+            <a:schemeClr val="accent1"/>
+          </a:lnRef>
+          <a:fillRef idx="0">
+            <a:schemeClr val="accent1"/>
+          </a:fillRef>
+          <a:effectRef idx="1">
+            <a:schemeClr val="accent1"/>
+          </a:effectRef>
+          <a:fontRef idx="minor">
+            <a:schemeClr val="tx1"/>
+          </a:fontRef>
+        </p:style>
+      </p:cxnSp>
+      <p:cxnSp>
+        <p:nvCxnSpPr>
+          <p:cNvPr id="108" name="Straight Arrow Connector 107">
+            <a:extLst>
+              <a:ext uri="{FF2B5EF4-FFF2-40B4-BE49-F238E27FC236}">
+                <a16:creationId xmlns:a16="http://schemas.microsoft.com/office/drawing/2014/main" id="{6FE2A7A7-2104-1ED7-0083-942EFFDACF15}"/>
+              </a:ext>
+            </a:extLst>
+          </p:cNvPr>
+          <p:cNvCxnSpPr>
+            <a:cxnSpLocks/>
+          </p:cNvCxnSpPr>
+          <p:nvPr/>
+        </p:nvCxnSpPr>
+        <p:spPr>
+          <a:xfrm>
+            <a:off x="4269271" y="5631981"/>
+            <a:ext cx="0" cy="36000"/>
+          </a:xfrm>
+          <a:prstGeom prst="straightConnector1">
+            <a:avLst/>
+          </a:prstGeom>
+          <a:ln>
+            <a:solidFill>
+              <a:schemeClr val="tx1"/>
+            </a:solidFill>
+            <a:tailEnd type="triangle" w="med" len="sm"/>
+          </a:ln>
+        </p:spPr>
+        <p:style>
+          <a:lnRef idx="2">
+            <a:schemeClr val="accent1"/>
+          </a:lnRef>
+          <a:fillRef idx="0">
+            <a:schemeClr val="accent1"/>
+          </a:fillRef>
+          <a:effectRef idx="1">
+            <a:schemeClr val="accent1"/>
+          </a:effectRef>
+          <a:fontRef idx="minor">
+            <a:schemeClr val="tx1"/>
+          </a:fontRef>
+        </p:style>
+      </p:cxnSp>
+      <p:cxnSp>
+        <p:nvCxnSpPr>
+          <p:cNvPr id="109" name="Straight Arrow Connector 108">
+            <a:extLst>
+              <a:ext uri="{FF2B5EF4-FFF2-40B4-BE49-F238E27FC236}">
+                <a16:creationId xmlns:a16="http://schemas.microsoft.com/office/drawing/2014/main" id="{D8CAFB7B-FA47-72DE-3105-DCEF99369D35}"/>
+              </a:ext>
+            </a:extLst>
+          </p:cNvPr>
+          <p:cNvCxnSpPr>
+            <a:cxnSpLocks/>
+          </p:cNvCxnSpPr>
+          <p:nvPr/>
+        </p:nvCxnSpPr>
+        <p:spPr>
+          <a:xfrm>
+            <a:off x="4269271" y="5906779"/>
+            <a:ext cx="0" cy="36000"/>
+          </a:xfrm>
+          <a:prstGeom prst="straightConnector1">
+            <a:avLst/>
+          </a:prstGeom>
+          <a:ln>
+            <a:solidFill>
+              <a:schemeClr val="tx1"/>
+            </a:solidFill>
+            <a:tailEnd type="triangle" w="med" len="sm"/>
+          </a:ln>
+        </p:spPr>
+        <p:style>
+          <a:lnRef idx="2">
+            <a:schemeClr val="accent1"/>
+          </a:lnRef>
+          <a:fillRef idx="0">
+            <a:schemeClr val="accent1"/>
+          </a:fillRef>
+          <a:effectRef idx="1">
+            <a:schemeClr val="accent1"/>
+          </a:effectRef>
+          <a:fontRef idx="minor">
+            <a:schemeClr val="tx1"/>
+          </a:fontRef>
+        </p:style>
+      </p:cxnSp>
+      <p:cxnSp>
+        <p:nvCxnSpPr>
+          <p:cNvPr id="110" name="Straight Arrow Connector 109">
+            <a:extLst>
+              <a:ext uri="{FF2B5EF4-FFF2-40B4-BE49-F238E27FC236}">
+                <a16:creationId xmlns:a16="http://schemas.microsoft.com/office/drawing/2014/main" id="{3FB85EE7-B369-E8EF-ECE3-AA7A171350FB}"/>
+              </a:ext>
+            </a:extLst>
+          </p:cNvPr>
+          <p:cNvCxnSpPr>
+            <a:cxnSpLocks/>
+          </p:cNvCxnSpPr>
+          <p:nvPr/>
+        </p:nvCxnSpPr>
+        <p:spPr>
+          <a:xfrm>
+            <a:off x="4269271" y="6179527"/>
+            <a:ext cx="0" cy="36000"/>
+          </a:xfrm>
+          <a:prstGeom prst="straightConnector1">
+            <a:avLst/>
+          </a:prstGeom>
+          <a:ln>
+            <a:solidFill>
+              <a:schemeClr val="tx1"/>
+            </a:solidFill>
+            <a:tailEnd type="triangle" w="med" len="sm"/>
+          </a:ln>
+        </p:spPr>
+        <p:style>
+          <a:lnRef idx="2">
+            <a:schemeClr val="accent1"/>
+          </a:lnRef>
+          <a:fillRef idx="0">
+            <a:schemeClr val="accent1"/>
+          </a:fillRef>
+          <a:effectRef idx="1">
+            <a:schemeClr val="accent1"/>
+          </a:effectRef>
+          <a:fontRef idx="minor">
+            <a:schemeClr val="tx1"/>
+          </a:fontRef>
+        </p:style>
+      </p:cxnSp>
+      <p:cxnSp>
+        <p:nvCxnSpPr>
+          <p:cNvPr id="111" name="Straight Arrow Connector 110">
+            <a:extLst>
+              <a:ext uri="{FF2B5EF4-FFF2-40B4-BE49-F238E27FC236}">
+                <a16:creationId xmlns:a16="http://schemas.microsoft.com/office/drawing/2014/main" id="{D780C3A4-4A0A-22EB-1C35-2586004EC293}"/>
+              </a:ext>
+            </a:extLst>
+          </p:cNvPr>
+          <p:cNvCxnSpPr>
+            <a:cxnSpLocks/>
+          </p:cNvCxnSpPr>
+          <p:nvPr/>
+        </p:nvCxnSpPr>
+        <p:spPr>
+          <a:xfrm>
+            <a:off x="4269271" y="6925029"/>
+            <a:ext cx="0" cy="36000"/>
+          </a:xfrm>
+          <a:prstGeom prst="straightConnector1">
+            <a:avLst/>
+          </a:prstGeom>
+          <a:ln>
+            <a:solidFill>
+              <a:schemeClr val="tx1"/>
+            </a:solidFill>
+            <a:tailEnd type="triangle" w="med" len="sm"/>
+          </a:ln>
+        </p:spPr>
+        <p:style>
+          <a:lnRef idx="2">
+            <a:schemeClr val="accent1"/>
+          </a:lnRef>
+          <a:fillRef idx="0">
+            <a:schemeClr val="accent1"/>
+          </a:fillRef>
+          <a:effectRef idx="1">
+            <a:schemeClr val="accent1"/>
+          </a:effectRef>
+          <a:fontRef idx="minor">
+            <a:schemeClr val="tx1"/>
+          </a:fontRef>
+        </p:style>
+      </p:cxnSp>
+      <p:cxnSp>
+        <p:nvCxnSpPr>
+          <p:cNvPr id="112" name="Straight Arrow Connector 111">
+            <a:extLst>
+              <a:ext uri="{FF2B5EF4-FFF2-40B4-BE49-F238E27FC236}">
+                <a16:creationId xmlns:a16="http://schemas.microsoft.com/office/drawing/2014/main" id="{B218DE07-E00B-B60C-BB03-A40EE45A89F9}"/>
+              </a:ext>
+            </a:extLst>
+          </p:cNvPr>
+          <p:cNvCxnSpPr>
+            <a:cxnSpLocks/>
+          </p:cNvCxnSpPr>
+          <p:nvPr/>
+        </p:nvCxnSpPr>
+        <p:spPr>
+          <a:xfrm>
+            <a:off x="4269271" y="7872370"/>
+            <a:ext cx="0" cy="36000"/>
+          </a:xfrm>
+          <a:prstGeom prst="straightConnector1">
+            <a:avLst/>
+          </a:prstGeom>
+          <a:ln>
+            <a:solidFill>
+              <a:schemeClr val="tx1"/>
+            </a:solidFill>
+            <a:tailEnd type="triangle" w="med" len="sm"/>
+          </a:ln>
+        </p:spPr>
+        <p:style>
+          <a:lnRef idx="2">
+            <a:schemeClr val="accent1"/>
+          </a:lnRef>
+          <a:fillRef idx="0">
+            <a:schemeClr val="accent1"/>
+          </a:fillRef>
+          <a:effectRef idx="1">
+            <a:schemeClr val="accent1"/>
+          </a:effectRef>
+          <a:fontRef idx="minor">
+            <a:schemeClr val="tx1"/>
+          </a:fontRef>
+        </p:style>
+      </p:cxnSp>
+      <p:cxnSp>
+        <p:nvCxnSpPr>
+          <p:cNvPr id="113" name="Straight Arrow Connector 112">
+            <a:extLst>
+              <a:ext uri="{FF2B5EF4-FFF2-40B4-BE49-F238E27FC236}">
+                <a16:creationId xmlns:a16="http://schemas.microsoft.com/office/drawing/2014/main" id="{785F1D92-118A-1EAA-EDDD-1E7C2F10870E}"/>
+              </a:ext>
+            </a:extLst>
+          </p:cNvPr>
+          <p:cNvCxnSpPr>
+            <a:cxnSpLocks/>
+          </p:cNvCxnSpPr>
+          <p:nvPr/>
+        </p:nvCxnSpPr>
+        <p:spPr>
+          <a:xfrm>
+            <a:off x="4269271" y="8150437"/>
+            <a:ext cx="0" cy="36000"/>
+          </a:xfrm>
+          <a:prstGeom prst="straightConnector1">
+            <a:avLst/>
+          </a:prstGeom>
+          <a:ln>
+            <a:solidFill>
+              <a:schemeClr val="tx1"/>
+            </a:solidFill>
+            <a:tailEnd type="triangle" w="med" len="sm"/>
+          </a:ln>
+        </p:spPr>
+        <p:style>
+          <a:lnRef idx="2">
+            <a:schemeClr val="accent1"/>
+          </a:lnRef>
+          <a:fillRef idx="0">
+            <a:schemeClr val="accent1"/>
+          </a:fillRef>
+          <a:effectRef idx="1">
+            <a:schemeClr val="accent1"/>
+          </a:effectRef>
+          <a:fontRef idx="minor">
+            <a:schemeClr val="tx1"/>
+          </a:fontRef>
+        </p:style>
+      </p:cxnSp>
+      <p:cxnSp>
+        <p:nvCxnSpPr>
+          <p:cNvPr id="114" name="Straight Arrow Connector 113">
+            <a:extLst>
+              <a:ext uri="{FF2B5EF4-FFF2-40B4-BE49-F238E27FC236}">
+                <a16:creationId xmlns:a16="http://schemas.microsoft.com/office/drawing/2014/main" id="{4E9DC3F4-7E89-0E07-5ECA-6EE0A2C478B2}"/>
+              </a:ext>
+            </a:extLst>
+          </p:cNvPr>
+          <p:cNvCxnSpPr>
+            <a:cxnSpLocks/>
+          </p:cNvCxnSpPr>
+          <p:nvPr/>
+        </p:nvCxnSpPr>
+        <p:spPr>
+          <a:xfrm>
+            <a:off x="4269271" y="8427563"/>
+            <a:ext cx="0" cy="36000"/>
+          </a:xfrm>
+          <a:prstGeom prst="straightConnector1">
+            <a:avLst/>
+          </a:prstGeom>
+          <a:ln>
+            <a:solidFill>
+              <a:schemeClr val="tx1"/>
+            </a:solidFill>
+            <a:tailEnd type="triangle" w="med" len="sm"/>
+          </a:ln>
+        </p:spPr>
+        <p:style>
+          <a:lnRef idx="2">
+            <a:schemeClr val="accent1"/>
+          </a:lnRef>
+          <a:fillRef idx="0">
+            <a:schemeClr val="accent1"/>
+          </a:fillRef>
+          <a:effectRef idx="1">
+            <a:schemeClr val="accent1"/>
+          </a:effectRef>
+          <a:fontRef idx="minor">
+            <a:schemeClr val="tx1"/>
+          </a:fontRef>
+        </p:style>
+      </p:cxnSp>
+      <p:sp>
+        <p:nvSpPr>
+          <p:cNvPr id="115" name="TextBox 114">
+            <a:extLst>
+              <a:ext uri="{FF2B5EF4-FFF2-40B4-BE49-F238E27FC236}">
+                <a16:creationId xmlns:a16="http://schemas.microsoft.com/office/drawing/2014/main" id="{41A6E868-57CB-F285-8951-C3FBE7A229D5}"/>
+              </a:ext>
+            </a:extLst>
+          </p:cNvPr>
+          <p:cNvSpPr txBox="1"/>
+          <p:nvPr/>
+        </p:nvSpPr>
+        <p:spPr>
+          <a:xfrm>
+            <a:off x="4239407" y="1401657"/>
+            <a:ext cx="1046564" cy="338554"/>
+          </a:xfrm>
+          <a:prstGeom prst="rect">
+            <a:avLst/>
+          </a:prstGeom>
+          <a:noFill/>
+        </p:spPr>
+        <p:txBody>
+          <a:bodyPr wrap="square" rtlCol="0">
+            <a:spAutoFit/>
+          </a:bodyPr>
+          <a:lstStyle/>
+          <a:p>
+            <a:r>
+              <a:rPr lang="en-GB" sz="800" dirty="0">
+                <a:solidFill>
+                  <a:srgbClr val="C00000"/>
+                </a:solidFill>
+                <a:latin typeface="Helvetica" pitchFamily="2" charset="0"/>
+              </a:rPr>
+              <a:t>ete4 Tree object</a:t>
+            </a:r>
+          </a:p>
+          <a:p>
+            <a:r>
+              <a:rPr lang="en-GB" sz="800" dirty="0">
+                <a:solidFill>
+                  <a:srgbClr val="C00000"/>
+                </a:solidFill>
+                <a:latin typeface="Helvetica" pitchFamily="2" charset="0"/>
+              </a:rPr>
+              <a:t>2,385,875 spp.</a:t>
+            </a:r>
+          </a:p>
+        </p:txBody>
+      </p:sp>
+      <p:sp>
+        <p:nvSpPr>
+          <p:cNvPr id="116" name="TextBox 115">
+            <a:extLst>
+              <a:ext uri="{FF2B5EF4-FFF2-40B4-BE49-F238E27FC236}">
+                <a16:creationId xmlns:a16="http://schemas.microsoft.com/office/drawing/2014/main" id="{B4C45096-8E6A-BDE2-17D8-2F235BE6FFC8}"/>
+              </a:ext>
+            </a:extLst>
+          </p:cNvPr>
+          <p:cNvSpPr txBox="1"/>
+          <p:nvPr/>
+        </p:nvSpPr>
+        <p:spPr>
+          <a:xfrm>
+            <a:off x="4239407" y="4062797"/>
+            <a:ext cx="1046564" cy="338554"/>
+          </a:xfrm>
+          <a:prstGeom prst="rect">
+            <a:avLst/>
+          </a:prstGeom>
+          <a:noFill/>
+        </p:spPr>
+        <p:txBody>
+          <a:bodyPr wrap="square" rtlCol="0">
+            <a:spAutoFit/>
+          </a:bodyPr>
+          <a:lstStyle/>
+          <a:p>
+            <a:r>
+              <a:rPr lang="en-GB" sz="800" dirty="0">
+                <a:solidFill>
+                  <a:srgbClr val="C00000"/>
+                </a:solidFill>
+                <a:latin typeface="Helvetica" pitchFamily="2" charset="0"/>
+              </a:rPr>
+              <a:t>Pruned tree</a:t>
+            </a:r>
+          </a:p>
+          <a:p>
+            <a:r>
+              <a:rPr lang="en-GB" sz="800" dirty="0">
+                <a:solidFill>
+                  <a:srgbClr val="C00000"/>
+                </a:solidFill>
+                <a:latin typeface="Helvetica" pitchFamily="2" charset="0"/>
+              </a:rPr>
+              <a:t>2,294,776 spp.</a:t>
+            </a:r>
+          </a:p>
+        </p:txBody>
+      </p:sp>
+      <p:sp>
+        <p:nvSpPr>
+          <p:cNvPr id="117" name="TextBox 116">
+            <a:extLst>
+              <a:ext uri="{FF2B5EF4-FFF2-40B4-BE49-F238E27FC236}">
+                <a16:creationId xmlns:a16="http://schemas.microsoft.com/office/drawing/2014/main" id="{416041AF-D905-716A-0938-8DF88DFC6637}"/>
+              </a:ext>
+            </a:extLst>
+          </p:cNvPr>
+          <p:cNvSpPr txBox="1"/>
+          <p:nvPr/>
+        </p:nvSpPr>
+        <p:spPr>
+          <a:xfrm>
+            <a:off x="4239409" y="7242587"/>
+            <a:ext cx="1531573" cy="215444"/>
+          </a:xfrm>
+          <a:prstGeom prst="rect">
+            <a:avLst/>
+          </a:prstGeom>
+          <a:noFill/>
+        </p:spPr>
+        <p:txBody>
+          <a:bodyPr wrap="square" rtlCol="0">
+            <a:spAutoFit/>
+          </a:bodyPr>
+          <a:lstStyle/>
+          <a:p>
+            <a:r>
+              <a:rPr lang="en-GB" sz="800" dirty="0">
+                <a:solidFill>
+                  <a:srgbClr val="C00000"/>
+                </a:solidFill>
+                <a:latin typeface="Helvetica" pitchFamily="2" charset="0"/>
+              </a:rPr>
+              <a:t>Bifurcating tree</a:t>
+            </a:r>
+          </a:p>
+        </p:txBody>
+      </p:sp>
+      <p:sp>
+        <p:nvSpPr>
+          <p:cNvPr id="118" name="TextBox 117">
+            <a:extLst>
+              <a:ext uri="{FF2B5EF4-FFF2-40B4-BE49-F238E27FC236}">
+                <a16:creationId xmlns:a16="http://schemas.microsoft.com/office/drawing/2014/main" id="{86C833CE-D17F-1DA7-A9F6-D04F38BCF141}"/>
+              </a:ext>
+            </a:extLst>
+          </p:cNvPr>
+          <p:cNvSpPr txBox="1"/>
+          <p:nvPr/>
+        </p:nvSpPr>
+        <p:spPr>
+          <a:xfrm>
+            <a:off x="3470053" y="8929627"/>
+            <a:ext cx="1598441" cy="215444"/>
+          </a:xfrm>
+          <a:prstGeom prst="rect">
+            <a:avLst/>
+          </a:prstGeom>
+          <a:noFill/>
+        </p:spPr>
+        <p:txBody>
+          <a:bodyPr wrap="square" rtlCol="0">
+            <a:spAutoFit/>
+          </a:bodyPr>
+          <a:lstStyle/>
+          <a:p>
+            <a:pPr algn="ctr"/>
+            <a:r>
+              <a:rPr lang="en-GB" sz="800" b="1" dirty="0">
+                <a:solidFill>
+                  <a:srgbClr val="C00000"/>
+                </a:solidFill>
+                <a:latin typeface="Helvetica" pitchFamily="2" charset="0"/>
+              </a:rPr>
+              <a:t>Fully-dated tree</a:t>
+            </a:r>
+          </a:p>
+        </p:txBody>
+      </p:sp>
+      <p:sp>
+        <p:nvSpPr>
+          <p:cNvPr id="119" name="TextBox 118">
+            <a:extLst>
+              <a:ext uri="{FF2B5EF4-FFF2-40B4-BE49-F238E27FC236}">
+                <a16:creationId xmlns:a16="http://schemas.microsoft.com/office/drawing/2014/main" id="{3A82CD7C-618B-344E-362D-90739DCE83E3}"/>
+              </a:ext>
+            </a:extLst>
+          </p:cNvPr>
+          <p:cNvSpPr txBox="1"/>
+          <p:nvPr/>
+        </p:nvSpPr>
+        <p:spPr>
+          <a:xfrm>
+            <a:off x="608861" y="5193265"/>
+            <a:ext cx="2477981" cy="215444"/>
+          </a:xfrm>
+          <a:prstGeom prst="rect">
+            <a:avLst/>
+          </a:prstGeom>
+          <a:noFill/>
+          <a:ln>
+            <a:noFill/>
+          </a:ln>
+        </p:spPr>
+        <p:txBody>
+          <a:bodyPr wrap="square" rtlCol="0">
+            <a:spAutoFit/>
+          </a:bodyPr>
+          <a:lstStyle/>
+          <a:p>
+            <a:r>
+              <a:rPr lang="en-GB" sz="800" dirty="0">
+                <a:solidFill>
+                  <a:schemeClr val="bg1">
+                    <a:lumMod val="50000"/>
+                  </a:schemeClr>
+                </a:solidFill>
+                <a:latin typeface="Helvetica" pitchFamily="2" charset="0"/>
+              </a:rPr>
+              <a:t>Resolve polytomies within genera</a:t>
+            </a:r>
+          </a:p>
+        </p:txBody>
+      </p:sp>
+      <p:sp>
+        <p:nvSpPr>
+          <p:cNvPr id="120" name="TextBox 119">
+            <a:extLst>
+              <a:ext uri="{FF2B5EF4-FFF2-40B4-BE49-F238E27FC236}">
+                <a16:creationId xmlns:a16="http://schemas.microsoft.com/office/drawing/2014/main" id="{D66A4D00-3AE8-70E1-289A-90E1E78898AE}"/>
+              </a:ext>
+            </a:extLst>
+          </p:cNvPr>
+          <p:cNvSpPr txBox="1"/>
+          <p:nvPr/>
+        </p:nvSpPr>
+        <p:spPr>
+          <a:xfrm>
+            <a:off x="2961292" y="4913887"/>
+            <a:ext cx="2477981" cy="215444"/>
+          </a:xfrm>
+          <a:prstGeom prst="rect">
+            <a:avLst/>
+          </a:prstGeom>
+          <a:noFill/>
+          <a:ln>
+            <a:noFill/>
+          </a:ln>
+        </p:spPr>
+        <p:txBody>
+          <a:bodyPr wrap="square" rtlCol="0">
+            <a:spAutoFit/>
+          </a:bodyPr>
+          <a:lstStyle/>
+          <a:p>
+            <a:pPr algn="r"/>
+            <a:r>
+              <a:rPr lang="en-GB" sz="800" dirty="0">
+                <a:solidFill>
+                  <a:schemeClr val="bg1">
+                    <a:lumMod val="50000"/>
+                  </a:schemeClr>
+                </a:solidFill>
+                <a:latin typeface="Helvetica" pitchFamily="2" charset="0"/>
+              </a:rPr>
+              <a:t>Resolve polytomies at higher ranks</a:t>
+            </a:r>
+          </a:p>
+        </p:txBody>
+      </p:sp>
+      <p:cxnSp>
+        <p:nvCxnSpPr>
+          <p:cNvPr id="121" name="Straight Arrow Connector 120">
+            <a:extLst>
+              <a:ext uri="{FF2B5EF4-FFF2-40B4-BE49-F238E27FC236}">
+                <a16:creationId xmlns:a16="http://schemas.microsoft.com/office/drawing/2014/main" id="{B952093C-DEB8-F981-D8BE-9DF5BC0FF82F}"/>
+              </a:ext>
+            </a:extLst>
+          </p:cNvPr>
+          <p:cNvCxnSpPr>
+            <a:cxnSpLocks/>
+          </p:cNvCxnSpPr>
+          <p:nvPr/>
+        </p:nvCxnSpPr>
+        <p:spPr>
+          <a:xfrm flipH="1">
+            <a:off x="2701128" y="4765864"/>
+            <a:ext cx="420302" cy="637689"/>
+          </a:xfrm>
+          <a:prstGeom prst="straightConnector1">
+            <a:avLst/>
+          </a:prstGeom>
+          <a:ln w="12700">
+            <a:solidFill>
+              <a:schemeClr val="tx1"/>
+            </a:solidFill>
+            <a:tailEnd type="triangle" w="med" len="sm"/>
+          </a:ln>
+        </p:spPr>
+        <p:style>
+          <a:lnRef idx="2">
+            <a:schemeClr val="accent1"/>
+          </a:lnRef>
+          <a:fillRef idx="0">
+            <a:schemeClr val="accent1"/>
+          </a:fillRef>
+          <a:effectRef idx="1">
+            <a:schemeClr val="accent1"/>
+          </a:effectRef>
+          <a:fontRef idx="minor">
+            <a:schemeClr val="tx1"/>
+          </a:fontRef>
+        </p:style>
+      </p:cxnSp>
+      <p:cxnSp>
+        <p:nvCxnSpPr>
+          <p:cNvPr id="123" name="Straight Arrow Connector 122">
+            <a:extLst>
+              <a:ext uri="{FF2B5EF4-FFF2-40B4-BE49-F238E27FC236}">
+                <a16:creationId xmlns:a16="http://schemas.microsoft.com/office/drawing/2014/main" id="{501536E9-C71B-86EF-4D5B-40109EAF2F5D}"/>
+              </a:ext>
+            </a:extLst>
+          </p:cNvPr>
+          <p:cNvCxnSpPr>
+            <a:cxnSpLocks/>
+          </p:cNvCxnSpPr>
+          <p:nvPr/>
+        </p:nvCxnSpPr>
+        <p:spPr>
+          <a:xfrm>
+            <a:off x="2751721" y="6439878"/>
+            <a:ext cx="345600" cy="248518"/>
+          </a:xfrm>
+          <a:prstGeom prst="straightConnector1">
+            <a:avLst/>
+          </a:prstGeom>
+          <a:ln w="12700">
+            <a:solidFill>
+              <a:schemeClr val="tx1"/>
+            </a:solidFill>
+            <a:tailEnd type="triangle" w="med" len="sm"/>
+          </a:ln>
+        </p:spPr>
+        <p:style>
+          <a:lnRef idx="2">
+            <a:schemeClr val="accent1"/>
+          </a:lnRef>
+          <a:fillRef idx="0">
+            <a:schemeClr val="accent1"/>
+          </a:fillRef>
+          <a:effectRef idx="1">
+            <a:schemeClr val="accent1"/>
+          </a:effectRef>
+          <a:fontRef idx="minor">
+            <a:schemeClr val="tx1"/>
+          </a:fontRef>
+        </p:style>
+      </p:cxnSp>
+      <p:cxnSp>
+        <p:nvCxnSpPr>
+          <p:cNvPr id="125" name="Straight Arrow Connector 124">
+            <a:extLst>
+              <a:ext uri="{FF2B5EF4-FFF2-40B4-BE49-F238E27FC236}">
+                <a16:creationId xmlns:a16="http://schemas.microsoft.com/office/drawing/2014/main" id="{F3160BB4-E066-E5E6-5B93-754E4ADC0CBA}"/>
+              </a:ext>
+            </a:extLst>
+          </p:cNvPr>
+          <p:cNvCxnSpPr>
+            <a:cxnSpLocks/>
+          </p:cNvCxnSpPr>
+          <p:nvPr/>
+        </p:nvCxnSpPr>
+        <p:spPr>
+          <a:xfrm>
+            <a:off x="4269271" y="6438056"/>
+            <a:ext cx="0" cy="255600"/>
+          </a:xfrm>
+          <a:prstGeom prst="straightConnector1">
+            <a:avLst/>
+          </a:prstGeom>
+          <a:ln w="12700">
+            <a:solidFill>
+              <a:schemeClr val="tx1"/>
+            </a:solidFill>
+            <a:tailEnd type="triangle" w="med" len="sm"/>
+          </a:ln>
+        </p:spPr>
+        <p:style>
+          <a:lnRef idx="2">
+            <a:schemeClr val="accent1"/>
+          </a:lnRef>
+          <a:fillRef idx="0">
+            <a:schemeClr val="accent1"/>
+          </a:fillRef>
+          <a:effectRef idx="1">
+            <a:schemeClr val="accent1"/>
+          </a:effectRef>
+          <a:fontRef idx="minor">
+            <a:schemeClr val="tx1"/>
+          </a:fontRef>
+        </p:style>
+      </p:cxnSp>
+      <p:cxnSp>
+        <p:nvCxnSpPr>
+          <p:cNvPr id="127" name="Straight Arrow Connector 126">
+            <a:extLst>
+              <a:ext uri="{FF2B5EF4-FFF2-40B4-BE49-F238E27FC236}">
+                <a16:creationId xmlns:a16="http://schemas.microsoft.com/office/drawing/2014/main" id="{4EB330A7-6B4B-3272-BB33-BFC26EAD6CC2}"/>
+              </a:ext>
+            </a:extLst>
+          </p:cNvPr>
+          <p:cNvCxnSpPr>
+            <a:cxnSpLocks/>
+          </p:cNvCxnSpPr>
+          <p:nvPr/>
+        </p:nvCxnSpPr>
+        <p:spPr>
+          <a:xfrm>
+            <a:off x="4269271" y="7185148"/>
+            <a:ext cx="0" cy="446400"/>
+          </a:xfrm>
+          <a:prstGeom prst="straightConnector1">
+            <a:avLst/>
+          </a:prstGeom>
+          <a:ln w="12700">
+            <a:solidFill>
+              <a:schemeClr val="tx1"/>
+            </a:solidFill>
+            <a:tailEnd type="triangle" w="med" len="sm"/>
+          </a:ln>
+        </p:spPr>
+        <p:style>
+          <a:lnRef idx="2">
+            <a:schemeClr val="accent1"/>
+          </a:lnRef>
+          <a:fillRef idx="0">
+            <a:schemeClr val="accent1"/>
+          </a:fillRef>
+          <a:effectRef idx="1">
+            <a:schemeClr val="accent1"/>
+          </a:effectRef>
+          <a:fontRef idx="minor">
+            <a:schemeClr val="tx1"/>
+          </a:fontRef>
+        </p:style>
+      </p:cxnSp>
+      <p:cxnSp>
+        <p:nvCxnSpPr>
+          <p:cNvPr id="129" name="Straight Arrow Connector 128">
+            <a:extLst>
+              <a:ext uri="{FF2B5EF4-FFF2-40B4-BE49-F238E27FC236}">
+                <a16:creationId xmlns:a16="http://schemas.microsoft.com/office/drawing/2014/main" id="{23BE3256-1B36-DEBF-E14C-9F570257D535}"/>
+              </a:ext>
+            </a:extLst>
+          </p:cNvPr>
+          <p:cNvCxnSpPr>
+            <a:cxnSpLocks/>
+          </p:cNvCxnSpPr>
+          <p:nvPr/>
+        </p:nvCxnSpPr>
+        <p:spPr>
+          <a:xfrm>
+            <a:off x="4269271" y="8690076"/>
+            <a:ext cx="0" cy="266182"/>
+          </a:xfrm>
+          <a:prstGeom prst="straightConnector1">
+            <a:avLst/>
+          </a:prstGeom>
+          <a:ln w="12700">
+            <a:solidFill>
+              <a:schemeClr val="tx1"/>
+            </a:solidFill>
+            <a:tailEnd type="triangle" w="med" len="sm"/>
+          </a:ln>
+        </p:spPr>
+        <p:style>
+          <a:lnRef idx="2">
+            <a:schemeClr val="accent1"/>
+          </a:lnRef>
+          <a:fillRef idx="0">
+            <a:schemeClr val="accent1"/>
+          </a:fillRef>
+          <a:effectRef idx="1">
+            <a:schemeClr val="accent1"/>
+          </a:effectRef>
+          <a:fontRef idx="minor">
+            <a:schemeClr val="tx1"/>
+          </a:fontRef>
+        </p:style>
+      </p:cxnSp>
+      <p:cxnSp>
+        <p:nvCxnSpPr>
+          <p:cNvPr id="131" name="Straight Arrow Connector 130">
+            <a:extLst>
+              <a:ext uri="{FF2B5EF4-FFF2-40B4-BE49-F238E27FC236}">
+                <a16:creationId xmlns:a16="http://schemas.microsoft.com/office/drawing/2014/main" id="{92611DEF-C8F5-64A6-5550-09447D691500}"/>
+              </a:ext>
+            </a:extLst>
+          </p:cNvPr>
+          <p:cNvCxnSpPr>
+            <a:cxnSpLocks/>
+          </p:cNvCxnSpPr>
+          <p:nvPr/>
+        </p:nvCxnSpPr>
+        <p:spPr>
+          <a:xfrm>
+            <a:off x="4269271" y="4031570"/>
+            <a:ext cx="0" cy="514800"/>
+          </a:xfrm>
+          <a:prstGeom prst="straightConnector1">
+            <a:avLst/>
+          </a:prstGeom>
+          <a:ln w="12700">
+            <a:solidFill>
+              <a:schemeClr val="tx1"/>
+            </a:solidFill>
+            <a:tailEnd type="triangle" w="med" len="sm"/>
+          </a:ln>
+        </p:spPr>
+        <p:style>
+          <a:lnRef idx="2">
+            <a:schemeClr val="accent1"/>
+          </a:lnRef>
+          <a:fillRef idx="0">
+            <a:schemeClr val="accent1"/>
+          </a:fillRef>
+          <a:effectRef idx="1">
+            <a:schemeClr val="accent1"/>
+          </a:effectRef>
+          <a:fontRef idx="minor">
+            <a:schemeClr val="tx1"/>
+          </a:fontRef>
+        </p:style>
+      </p:cxnSp>
+      <p:sp>
+        <p:nvSpPr>
+          <p:cNvPr id="133" name="TextBox 132">
+            <a:extLst>
+              <a:ext uri="{FF2B5EF4-FFF2-40B4-BE49-F238E27FC236}">
+                <a16:creationId xmlns:a16="http://schemas.microsoft.com/office/drawing/2014/main" id="{CA9CFFF8-B1AB-9019-8DDB-B029DA8AF932}"/>
+              </a:ext>
+            </a:extLst>
+          </p:cNvPr>
+          <p:cNvSpPr txBox="1"/>
+          <p:nvPr/>
+        </p:nvSpPr>
+        <p:spPr>
+          <a:xfrm>
+            <a:off x="449913" y="8892039"/>
+            <a:ext cx="640859" cy="215444"/>
+          </a:xfrm>
+          <a:prstGeom prst="rect">
+            <a:avLst/>
+          </a:prstGeom>
+          <a:solidFill>
+            <a:srgbClr val="C2F1C8"/>
+          </a:solidFill>
+        </p:spPr>
+        <p:txBody>
+          <a:bodyPr wrap="square" rtlCol="0">
+            <a:spAutoFit/>
+          </a:bodyPr>
+          <a:lstStyle/>
+          <a:p>
+            <a:r>
+              <a:rPr lang="en-GB" sz="800" dirty="0">
+                <a:latin typeface="Helvetica" pitchFamily="2" charset="0"/>
+              </a:rPr>
+              <a:t>Input data</a:t>
+            </a:r>
+          </a:p>
+        </p:txBody>
+      </p:sp>
+      <p:sp>
+        <p:nvSpPr>
+          <p:cNvPr id="134" name="TextBox 133">
+            <a:extLst>
+              <a:ext uri="{FF2B5EF4-FFF2-40B4-BE49-F238E27FC236}">
+                <a16:creationId xmlns:a16="http://schemas.microsoft.com/office/drawing/2014/main" id="{B200FDBD-258E-A237-CB87-C0A80C3CFC70}"/>
+              </a:ext>
+            </a:extLst>
+          </p:cNvPr>
+          <p:cNvSpPr txBox="1"/>
+          <p:nvPr/>
+        </p:nvSpPr>
+        <p:spPr>
+          <a:xfrm>
+            <a:off x="1172996" y="8886573"/>
+            <a:ext cx="961007" cy="215444"/>
+          </a:xfrm>
+          <a:prstGeom prst="rect">
+            <a:avLst/>
+          </a:prstGeom>
+          <a:noFill/>
+          <a:ln w="6350">
+            <a:solidFill>
+              <a:schemeClr val="bg1">
+                <a:lumMod val="50000"/>
+              </a:schemeClr>
+            </a:solidFill>
+          </a:ln>
+        </p:spPr>
+        <p:txBody>
+          <a:bodyPr wrap="square" rtlCol="0">
+            <a:spAutoFit/>
+          </a:bodyPr>
+          <a:lstStyle/>
+          <a:p>
+            <a:pPr algn="ctr"/>
+            <a:r>
+              <a:rPr lang="en-GB" sz="800" dirty="0">
+                <a:latin typeface="Helvetica" pitchFamily="2" charset="0"/>
+              </a:rPr>
+              <a:t>Python functions</a:t>
+            </a:r>
+          </a:p>
+        </p:txBody>
+      </p:sp>
+      <p:sp>
+        <p:nvSpPr>
+          <p:cNvPr id="135" name="TextBox 134">
+            <a:extLst>
+              <a:ext uri="{FF2B5EF4-FFF2-40B4-BE49-F238E27FC236}">
+                <a16:creationId xmlns:a16="http://schemas.microsoft.com/office/drawing/2014/main" id="{C8187897-2DBB-CBB9-51AD-D9A80ED31F33}"/>
+              </a:ext>
+            </a:extLst>
+          </p:cNvPr>
+          <p:cNvSpPr txBox="1"/>
+          <p:nvPr/>
+        </p:nvSpPr>
+        <p:spPr>
+          <a:xfrm>
+            <a:off x="50097" y="8896661"/>
+            <a:ext cx="961007" cy="215444"/>
+          </a:xfrm>
+          <a:prstGeom prst="rect">
+            <a:avLst/>
+          </a:prstGeom>
+          <a:noFill/>
+          <a:ln>
+            <a:noFill/>
+          </a:ln>
+        </p:spPr>
+        <p:txBody>
+          <a:bodyPr wrap="square" rtlCol="0">
+            <a:spAutoFit/>
+          </a:bodyPr>
+          <a:lstStyle/>
+          <a:p>
+            <a:r>
+              <a:rPr lang="en-GB" sz="800" dirty="0">
+                <a:latin typeface="Helvetica" pitchFamily="2" charset="0"/>
+              </a:rPr>
+              <a:t>Key:</a:t>
+            </a:r>
+          </a:p>
+        </p:txBody>
+      </p:sp>
+      <p:sp>
+        <p:nvSpPr>
+          <p:cNvPr id="136" name="TextBox 135">
+            <a:extLst>
+              <a:ext uri="{FF2B5EF4-FFF2-40B4-BE49-F238E27FC236}">
+                <a16:creationId xmlns:a16="http://schemas.microsoft.com/office/drawing/2014/main" id="{C3FA17B2-BD58-05EC-B792-3AAC74AC2CA0}"/>
+              </a:ext>
+            </a:extLst>
+          </p:cNvPr>
+          <p:cNvSpPr txBox="1"/>
+          <p:nvPr/>
+        </p:nvSpPr>
+        <p:spPr>
+          <a:xfrm>
+            <a:off x="2111413" y="8893121"/>
+            <a:ext cx="633488" cy="215444"/>
+          </a:xfrm>
+          <a:prstGeom prst="rect">
+            <a:avLst/>
+          </a:prstGeom>
+          <a:noFill/>
+        </p:spPr>
+        <p:txBody>
+          <a:bodyPr wrap="square" rtlCol="0">
+            <a:spAutoFit/>
+          </a:bodyPr>
+          <a:lstStyle/>
+          <a:p>
+            <a:r>
+              <a:rPr lang="en-GB" sz="800" dirty="0">
+                <a:solidFill>
+                  <a:srgbClr val="C00000"/>
+                </a:solidFill>
+                <a:latin typeface="Helvetica" pitchFamily="2" charset="0"/>
+              </a:rPr>
+              <a:t>Outputs</a:t>
+            </a:r>
+          </a:p>
+        </p:txBody>
+      </p:sp>
+      <p:cxnSp>
+        <p:nvCxnSpPr>
+          <p:cNvPr id="144" name="Straight Arrow Connector 143">
+            <a:extLst>
+              <a:ext uri="{FF2B5EF4-FFF2-40B4-BE49-F238E27FC236}">
+                <a16:creationId xmlns:a16="http://schemas.microsoft.com/office/drawing/2014/main" id="{58CC2990-51F5-71FD-F562-EAB927656FDD}"/>
+              </a:ext>
+            </a:extLst>
+          </p:cNvPr>
+          <p:cNvCxnSpPr>
+            <a:cxnSpLocks/>
+          </p:cNvCxnSpPr>
+          <p:nvPr/>
+        </p:nvCxnSpPr>
+        <p:spPr>
+          <a:xfrm>
+            <a:off x="4269876" y="2404891"/>
+            <a:ext cx="0" cy="36000"/>
+          </a:xfrm>
+          <a:prstGeom prst="straightConnector1">
+            <a:avLst/>
+          </a:prstGeom>
+          <a:ln>
+            <a:solidFill>
+              <a:schemeClr val="tx1"/>
+            </a:solidFill>
+            <a:tailEnd type="triangle" w="med" len="sm"/>
+          </a:ln>
+        </p:spPr>
+        <p:style>
+          <a:lnRef idx="2">
+            <a:schemeClr val="accent1"/>
+          </a:lnRef>
+          <a:fillRef idx="0">
+            <a:schemeClr val="accent1"/>
+          </a:fillRef>
+          <a:effectRef idx="1">
+            <a:schemeClr val="accent1"/>
+          </a:effectRef>
+          <a:fontRef idx="minor">
+            <a:schemeClr val="tx1"/>
+          </a:fontRef>
+        </p:style>
+      </p:cxnSp>
+      <p:sp>
+        <p:nvSpPr>
+          <p:cNvPr id="31" name="TextBox 30">
+            <a:extLst>
+              <a:ext uri="{FF2B5EF4-FFF2-40B4-BE49-F238E27FC236}">
+                <a16:creationId xmlns:a16="http://schemas.microsoft.com/office/drawing/2014/main" id="{1E16CC72-7135-B8B6-0050-30AB6B24EA64}"/>
+              </a:ext>
+            </a:extLst>
+          </p:cNvPr>
+          <p:cNvSpPr txBox="1"/>
+          <p:nvPr/>
+        </p:nvSpPr>
+        <p:spPr>
+          <a:xfrm>
+            <a:off x="369824" y="4560103"/>
+            <a:ext cx="2160000" cy="584776"/>
+          </a:xfrm>
+          <a:prstGeom prst="rect">
+            <a:avLst/>
+          </a:prstGeom>
+          <a:solidFill>
+            <a:srgbClr val="C2F1C8"/>
+          </a:solidFill>
+        </p:spPr>
+        <p:txBody>
+          <a:bodyPr wrap="square" rtlCol="0">
+            <a:spAutoFit/>
+          </a:bodyPr>
+          <a:lstStyle/>
+          <a:p>
+            <a:r>
+              <a:rPr lang="en-GB" sz="800" dirty="0">
+                <a:latin typeface="Helvetica" pitchFamily="2" charset="0"/>
+              </a:rPr>
+              <a:t>File: config/</a:t>
+            </a:r>
+            <a:r>
+              <a:rPr lang="en-GB" sz="800" dirty="0" err="1">
+                <a:latin typeface="Helvetica" pitchFamily="2" charset="0"/>
+              </a:rPr>
+              <a:t>forced_taxa_moves.csv</a:t>
+            </a:r>
+            <a:endParaRPr lang="en-GB" sz="800" dirty="0">
+              <a:latin typeface="Helvetica" pitchFamily="2" charset="0"/>
+            </a:endParaRPr>
+          </a:p>
+          <a:p>
+            <a:r>
+              <a:rPr lang="en-GB" sz="800" dirty="0">
+                <a:latin typeface="Helvetica" pitchFamily="2" charset="0"/>
+              </a:rPr>
+              <a:t>Source: Included in package</a:t>
+            </a:r>
+          </a:p>
+          <a:p>
+            <a:r>
+              <a:rPr lang="en-GB" sz="800" dirty="0">
+                <a:latin typeface="Helvetica" pitchFamily="2" charset="0"/>
+              </a:rPr>
+              <a:t>Data: Non-random polytomy resolution; forces </a:t>
+            </a:r>
+            <a:r>
+              <a:rPr lang="en-GB" sz="800" dirty="0" err="1">
+                <a:latin typeface="Helvetica" pitchFamily="2" charset="0"/>
+              </a:rPr>
+              <a:t>Eukaryota</a:t>
+            </a:r>
+            <a:r>
+              <a:rPr lang="en-GB" sz="800" dirty="0">
+                <a:latin typeface="Helvetica" pitchFamily="2" charset="0"/>
+              </a:rPr>
+              <a:t> to be sister to Archaea</a:t>
+            </a:r>
+          </a:p>
+        </p:txBody>
+      </p:sp>
+      <p:sp>
+        <p:nvSpPr>
+          <p:cNvPr id="60" name="TextBox 59">
+            <a:extLst>
+              <a:ext uri="{FF2B5EF4-FFF2-40B4-BE49-F238E27FC236}">
+                <a16:creationId xmlns:a16="http://schemas.microsoft.com/office/drawing/2014/main" id="{920FAA49-323E-3477-EF89-686E16D86205}"/>
+              </a:ext>
+            </a:extLst>
+          </p:cNvPr>
+          <p:cNvSpPr txBox="1"/>
+          <p:nvPr/>
+        </p:nvSpPr>
+        <p:spPr>
+          <a:xfrm>
+            <a:off x="370471" y="7640304"/>
+            <a:ext cx="2160000" cy="707886"/>
+          </a:xfrm>
+          <a:prstGeom prst="rect">
+            <a:avLst/>
+          </a:prstGeom>
+          <a:solidFill>
+            <a:srgbClr val="C2F1C8"/>
+          </a:solidFill>
+        </p:spPr>
+        <p:txBody>
+          <a:bodyPr wrap="square" rtlCol="0">
+            <a:spAutoFit/>
+          </a:bodyPr>
+          <a:lstStyle/>
+          <a:p>
+            <a:r>
+              <a:rPr lang="en-GB" sz="800" dirty="0">
+                <a:latin typeface="Helvetica" pitchFamily="2" charset="0"/>
+              </a:rPr>
+              <a:t>File: </a:t>
+            </a:r>
+            <a:r>
+              <a:rPr lang="en-GB" sz="800" dirty="0" err="1">
+                <a:latin typeface="Helvetica" pitchFamily="2" charset="0"/>
+              </a:rPr>
+              <a:t>chronosynth_cache</a:t>
+            </a:r>
+            <a:r>
+              <a:rPr lang="en-GB" sz="800" dirty="0">
+                <a:latin typeface="Helvetica" pitchFamily="2" charset="0"/>
+              </a:rPr>
+              <a:t>/</a:t>
+            </a:r>
+            <a:r>
+              <a:rPr lang="en-GB" sz="800" dirty="0" err="1">
+                <a:latin typeface="Helvetica" pitchFamily="2" charset="0"/>
+              </a:rPr>
+              <a:t>node_ages.json</a:t>
+            </a:r>
+            <a:endParaRPr lang="en-GB" sz="800" dirty="0">
+              <a:latin typeface="Helvetica" pitchFamily="2" charset="0"/>
+            </a:endParaRPr>
+          </a:p>
+          <a:p>
+            <a:r>
+              <a:rPr lang="en-GB" sz="800" dirty="0">
+                <a:latin typeface="Helvetica" pitchFamily="2" charset="0"/>
+              </a:rPr>
+              <a:t>Source: Included in package, or generated using external </a:t>
+            </a:r>
+            <a:r>
+              <a:rPr lang="en-GB" sz="800" dirty="0" err="1">
+                <a:latin typeface="Helvetica" pitchFamily="2" charset="0"/>
+              </a:rPr>
+              <a:t>Chronosynth</a:t>
+            </a:r>
+            <a:r>
+              <a:rPr lang="en-GB" sz="800" dirty="0">
+                <a:latin typeface="Helvetica" pitchFamily="2" charset="0"/>
+              </a:rPr>
+              <a:t> package</a:t>
+            </a:r>
+          </a:p>
+          <a:p>
+            <a:r>
+              <a:rPr lang="en-GB" sz="800" dirty="0">
+                <a:latin typeface="Helvetica" pitchFamily="2" charset="0"/>
+              </a:rPr>
+              <a:t>Data: Node dates, from underlying time-scaled trees in Open Tree database</a:t>
+            </a:r>
+          </a:p>
+        </p:txBody>
+      </p:sp>
     </p:spTree>
     <p:extLst>
       <p:ext uri="{BB962C8B-B14F-4D97-AF65-F5344CB8AC3E}">
-        <p14:creationId xmlns:p14="http://schemas.microsoft.com/office/powerpoint/2010/main" val="836930983"/>
+        <p14:creationId xmlns:p14="http://schemas.microsoft.com/office/powerpoint/2010/main" val="3328266176"/>
       </p:ext>
     </p:extLst>
   </p:cSld>
